--- a/outputs/kilosort_variants_summary.pptx
+++ b/outputs/kilosort_variants_summary.pptx
@@ -7,6 +7,7 @@
   <p:sldIdLst>
     <p:sldId id="256" r:id="rId7"/>
     <p:sldId id="257" r:id="rId8"/>
+    <p:sldId id="258" r:id="rId9"/>
   </p:sldIdLst>
   <p:sldSz cx="12191695" cy="6858000" type="screen4x3"/>
   <p:notesSz cx="6858000" cy="9144000"/>
@@ -3097,7 +3098,7 @@
         </p:nvSpPr>
         <p:spPr>
           <a:xfrm>
-            <a:off x="566928" y="384048"/>
+            <a:off x="566928" y="365760"/>
             <a:ext cx="11064240" cy="274320"/>
           </a:xfrm>
           <a:prstGeom prst="rect">
@@ -3119,7 +3120,7 @@
                 </a:solidFill>
                 <a:latin typeface="Segoe UI"/>
               </a:rPr>
-              <a:t>SPIKE SORTING · WHAT WE TRIED AND WHAT IT BOUGHT</a:t>
+              <a:t>GROUND TRUTH · RAT SHAMIR, STRIATAL NEUROPIXELS</a:t>
             </a:r>
           </a:p>
         </p:txBody>
@@ -3132,7 +3133,7 @@
         </p:nvSpPr>
         <p:spPr>
           <a:xfrm>
-            <a:off x="566928" y="658368"/>
+            <a:off x="566928" y="640080"/>
             <a:ext cx="11064240" cy="457200"/>
           </a:xfrm>
           <a:prstGeom prst="rect">
@@ -3154,7 +3155,7 @@
                 </a:solidFill>
                 <a:latin typeface="Segoe UI"/>
               </a:rPr>
-              <a:t>Kilosort4 variants on a hybrid ground-truth benchmark</a:t>
+              <a:t>How the test data was made</a:t>
             </a:r>
           </a:p>
         </p:txBody>
@@ -3167,7 +3168,7 @@
         </p:nvSpPr>
         <p:spPr>
           <a:xfrm>
-            <a:off x="566928" y="1207008"/>
+            <a:off x="566928" y="1170432"/>
             <a:ext cx="11064240" cy="11887"/>
           </a:xfrm>
           <a:prstGeom prst="rect">
@@ -3211,16 +3212,16 @@
         </p:nvSpPr>
         <p:spPr>
           <a:xfrm>
-            <a:off x="566928" y="1389888"/>
-            <a:ext cx="11064240" cy="932688"/>
+            <a:off x="566928" y="1335024"/>
+            <a:ext cx="11064240" cy="475488"/>
           </a:xfrm>
           <a:prstGeom prst="roundRect">
             <a:avLst>
-              <a:gd name="adj" fmla="val 4000"/>
+              <a:gd name="adj" fmla="val 3500"/>
             </a:avLst>
           </a:prstGeom>
           <a:solidFill>
-            <a:srgbClr val="F4F6F8"/>
+            <a:srgbClr val="E8F1F1"/>
           </a:solidFill>
           <a:ln>
             <a:noFill/>
@@ -3257,8 +3258,8 @@
         </p:nvSpPr>
         <p:spPr>
           <a:xfrm>
-            <a:off x="786384" y="1554480"/>
-            <a:ext cx="4937760" cy="685800"/>
+            <a:off x="804672" y="1463040"/>
+            <a:ext cx="10607040" cy="274320"/>
           </a:xfrm>
           <a:prstGeom prst="rect">
             <a:avLst/>
@@ -3273,195 +3274,388 @@
           <a:p>
             <a:pPr algn="l"/>
             <a:r>
+              <a:rPr sz="1250" b="1">
+                <a:solidFill>
+                  <a:srgbClr val="1A1F2E"/>
+                </a:solidFill>
+                <a:latin typeface="Segoe UI"/>
+              </a:rPr>
+              <a:t>On a real recording nobody knows which neuron a spike came from.  </a:t>
+            </a:r>
+            <a:r>
+              <a:rPr sz="1250" b="0">
+                <a:solidFill>
+                  <a:srgbClr val="1A1F2E"/>
+                </a:solidFill>
+                <a:latin typeface="Segoe UI"/>
+              </a:rPr>
+              <a:t>So we built recordings where we do: real voltage with its real neurons still in it, plus a few donor neurons whose every spike time we chose ourselves.</a:t>
+            </a:r>
+          </a:p>
+        </p:txBody>
+      </p:sp>
+      <p:sp>
+        <p:nvSpPr>
+          <p:cNvPr id="7" name="TextBox 6"/>
+          <p:cNvSpPr txBox="1"/>
+          <p:nvPr/>
+        </p:nvSpPr>
+        <p:spPr>
+          <a:xfrm>
+            <a:off x="566928" y="2011680"/>
+            <a:ext cx="5257800" cy="237744"/>
+          </a:xfrm>
+          <a:prstGeom prst="rect">
+            <a:avLst/>
+          </a:prstGeom>
+          <a:noFill/>
+        </p:spPr>
+        <p:txBody>
+          <a:bodyPr wrap="square" lIns="0" rIns="0" tIns="0" bIns="0">
+            <a:spAutoFit/>
+          </a:bodyPr>
+          <a:lstStyle/>
+          <a:p>
+            <a:pPr algn="l"/>
+            <a:r>
+              <a:rPr sz="1200" b="1">
+                <a:solidFill>
+                  <a:srgbClr val="0F6E6E"/>
+                </a:solidFill>
+                <a:latin typeface="Segoe UI"/>
+              </a:rPr>
+              <a:t>1 · Choosing the donor neurons</a:t>
+            </a:r>
+          </a:p>
+        </p:txBody>
+      </p:sp>
+      <p:sp>
+        <p:nvSpPr>
+          <p:cNvPr id="8" name="TextBox 7"/>
+          <p:cNvSpPr txBox="1"/>
+          <p:nvPr/>
+        </p:nvSpPr>
+        <p:spPr>
+          <a:xfrm>
+            <a:off x="566928" y="2322576"/>
+            <a:ext cx="5257800" cy="914400"/>
+          </a:xfrm>
+          <a:prstGeom prst="rect">
+            <a:avLst/>
+          </a:prstGeom>
+          <a:noFill/>
+        </p:spPr>
+        <p:txBody>
+          <a:bodyPr wrap="square" lIns="0" rIns="0" tIns="0" bIns="0">
+            <a:spAutoFit/>
+          </a:bodyPr>
+          <a:lstStyle/>
+          <a:p>
+            <a:pPr algn="l"/>
+            <a:r>
               <a:rPr sz="1050" b="1">
                 <a:solidFill>
-                  <a:srgbClr val="0F6E6E"/>
-                </a:solidFill>
-                <a:latin typeface="Segoe UI"/>
-              </a:rPr>
-              <a:t>Dataset   </a:t>
+                  <a:srgbClr val="1A1F2E"/>
+                </a:solidFill>
+                <a:latin typeface="Segoe UI"/>
+              </a:rPr>
+              <a:t>Hand-reviewed.  </a:t>
             </a:r>
             <a:r>
               <a:rPr sz="1050" b="0">
                 <a:solidFill>
-                  <a:srgbClr val="1A1F2E"/>
-                </a:solidFill>
-                <a:latin typeface="Segoe UI"/>
-              </a:rPr>
-              <a:t>Shamir striatal Neuropixels (20260916_110311). 33 hand-reviewed real units, their own recorded snippets re-injected into real voltage at known times.</a:t>
+                  <a:srgbClr val="6B7280"/>
+                </a:solidFill>
+                <a:latin typeface="Segoe UI"/>
+              </a:rPr>
+              <a:t>Gil reviewed every candidate in the review tool; the 33 labelled good became the donor pool.</a:t>
             </a:r>
           </a:p>
           <a:p>
             <a:pPr>
               <a:spcBef>
-                <a:spcPts val="400"/>
+                <a:spcPts val="600"/>
               </a:spcBef>
             </a:pPr>
             <a:r>
+              <a:rPr sz="1050" b="1">
+                <a:solidFill>
+                  <a:srgbClr val="1A1F2E"/>
+                </a:solidFill>
+                <a:latin typeface="Segoe UI"/>
+              </a:rPr>
+              <a:t>Then filtered.  </a:t>
+            </a:r>
+            <a:r>
               <a:rPr sz="1050" b="0">
                 <a:solidFill>
                   <a:srgbClr val="6B7280"/>
                 </a:solidFill>
                 <a:latin typeface="Segoe UI"/>
               </a:rPr>
-              <a:t>52 placements × 4 replicates (120 s windows), 15,086 truth spikes.</a:t>
-            </a:r>
-          </a:p>
-        </p:txBody>
-      </p:sp>
-      <p:sp>
-        <p:nvSpPr>
-          <p:cNvPr id="7" name="TextBox 6"/>
-          <p:cNvSpPr txBox="1"/>
-          <p:nvPr/>
-        </p:nvSpPr>
-        <p:spPr>
-          <a:xfrm>
-            <a:off x="6126480" y="1554480"/>
-            <a:ext cx="5349240" cy="685800"/>
-          </a:xfrm>
-          <a:prstGeom prst="rect">
-            <a:avLst/>
-          </a:prstGeom>
-          <a:noFill/>
-        </p:spPr>
-        <p:txBody>
-          <a:bodyPr wrap="square" lIns="0" rIns="0" tIns="0" bIns="0">
-            <a:spAutoFit/>
-          </a:bodyPr>
-          <a:lstStyle/>
-          <a:p>
-            <a:pPr algn="l"/>
-            <a:r>
-              <a:rPr sz="1050" b="1">
-                <a:solidFill>
-                  <a:srgbClr val="0F6E6E"/>
-                </a:solidFill>
-                <a:latin typeface="Segoe UI"/>
-              </a:rPr>
-              <a:t>Conditions   </a:t>
-            </a:r>
-            <a:r>
-              <a:rPr sz="1050" b="0">
-                <a:solidFill>
-                  <a:srgbClr val="6B7280"/>
-                </a:solidFill>
-                <a:latin typeface="Segoe UI"/>
-              </a:rPr>
-              <a:t>set by the loudest resident neuron on the destination channel</a:t>
+              <a:t>low contamination (clean refractory period), and a compact spatial footprint.</a:t>
             </a:r>
           </a:p>
           <a:p>
             <a:pPr>
               <a:spcBef>
-                <a:spcPts val="100"/>
+                <a:spcPts val="600"/>
               </a:spcBef>
             </a:pPr>
             <a:r>
-              <a:rPr sz="950" b="1">
+              <a:rPr sz="1050" b="1">
                 <a:solidFill>
                   <a:srgbClr val="1A1F2E"/>
                 </a:solidFill>
                 <a:latin typeface="Segoe UI"/>
               </a:rPr>
-              <a:t>easy   </a:t>
-            </a:r>
-            <a:r>
-              <a:rPr sz="950" b="0">
+              <a:t>Pairs checked separately.  </a:t>
+            </a:r>
+            <a:r>
+              <a:rPr sz="1050" b="0">
                 <a:solidFill>
                   <a:srgbClr val="6B7280"/>
                 </a:solidFill>
                 <a:latin typeface="Segoe UI"/>
               </a:rPr>
-              <a:t>23–70 µV neighbour</a:t>
+              <a:t>a cross-correlogram refractory test confirms the two donors are really different cells, not one cell Kilosort had split.</a:t>
             </a:r>
           </a:p>
           <a:p>
             <a:pPr>
               <a:spcBef>
-                <a:spcPts val="100"/>
+                <a:spcPts val="600"/>
               </a:spcBef>
             </a:pPr>
             <a:r>
-              <a:rPr sz="950" b="1">
+              <a:rPr sz="1050" b="1">
                 <a:solidFill>
                   <a:srgbClr val="1A1F2E"/>
                 </a:solidFill>
                 <a:latin typeface="Segoe UI"/>
               </a:rPr>
-              <a:t>collision   </a:t>
-            </a:r>
-            <a:r>
-              <a:rPr sz="950" b="0">
+              <a:t>Real snippets, not templates.  </a:t>
+            </a:r>
+            <a:r>
+              <a:rPr sz="1050" b="0">
                 <a:solidFill>
                   <a:srgbClr val="6B7280"/>
                 </a:solidFill>
                 <a:latin typeface="Segoe UI"/>
               </a:rPr>
-              <a:t>quiet site, spike 4–25 samples from a resident's</a:t>
+              <a:t>we inject the neuron's own recorded spikes. A copied template is identical every time, which flatters any sorter — real spikes vary in shape and amplitude, and that variation is what makes sorting hard.</a:t>
+            </a:r>
+          </a:p>
+        </p:txBody>
+      </p:sp>
+      <p:sp>
+        <p:nvSpPr>
+          <p:cNvPr id="9" name="TextBox 8"/>
+          <p:cNvSpPr txBox="1"/>
+          <p:nvPr/>
+        </p:nvSpPr>
+        <p:spPr>
+          <a:xfrm>
+            <a:off x="6382512" y="2011680"/>
+            <a:ext cx="5248656" cy="237744"/>
+          </a:xfrm>
+          <a:prstGeom prst="rect">
+            <a:avLst/>
+          </a:prstGeom>
+          <a:noFill/>
+        </p:spPr>
+        <p:txBody>
+          <a:bodyPr wrap="square" lIns="0" rIns="0" tIns="0" bIns="0">
+            <a:spAutoFit/>
+          </a:bodyPr>
+          <a:lstStyle/>
+          <a:p>
+            <a:pPr algn="l"/>
+            <a:r>
+              <a:rPr sz="1200" b="1">
+                <a:solidFill>
+                  <a:srgbClr val="0F6E6E"/>
+                </a:solidFill>
+                <a:latin typeface="Segoe UI"/>
+              </a:rPr>
+              <a:t>2 · Choosing where to put them</a:t>
+            </a:r>
+          </a:p>
+        </p:txBody>
+      </p:sp>
+      <p:sp>
+        <p:nvSpPr>
+          <p:cNvPr id="10" name="TextBox 9"/>
+          <p:cNvSpPr txBox="1"/>
+          <p:nvPr/>
+        </p:nvSpPr>
+        <p:spPr>
+          <a:xfrm>
+            <a:off x="6382512" y="2322576"/>
+            <a:ext cx="5248656" cy="914400"/>
+          </a:xfrm>
+          <a:prstGeom prst="rect">
+            <a:avLst/>
+          </a:prstGeom>
+          <a:noFill/>
+        </p:spPr>
+        <p:txBody>
+          <a:bodyPr wrap="square" lIns="0" rIns="0" tIns="0" bIns="0">
+            <a:spAutoFit/>
+          </a:bodyPr>
+          <a:lstStyle/>
+          <a:p>
+            <a:pPr algn="l"/>
+            <a:r>
+              <a:rPr sz="1050" b="1">
+                <a:solidFill>
+                  <a:srgbClr val="1A1F2E"/>
+                </a:solidFill>
+                <a:latin typeface="Segoe UI"/>
+              </a:rPr>
+              <a:t>Sites ranked by their loudest resident.  </a:t>
+            </a:r>
+            <a:r>
+              <a:rPr sz="1050" b="0">
+                <a:solidFill>
+                  <a:srgbClr val="6B7280"/>
+                </a:solidFill>
+                <a:latin typeface="Segoe UI"/>
+              </a:rPr>
+              <a:t>every probe site scored by the amplitude of the biggest neuron already living there — 23 to 467 µV across this probe, a 20× contrast to build difficulty from.</a:t>
             </a:r>
           </a:p>
           <a:p>
             <a:pPr>
               <a:spcBef>
-                <a:spcPts val="100"/>
+                <a:spcPts val="600"/>
               </a:spcBef>
             </a:pPr>
             <a:r>
-              <a:rPr sz="950" b="1">
+              <a:rPr sz="1050" b="1">
                 <a:solidFill>
                   <a:srgbClr val="1A1F2E"/>
                 </a:solidFill>
                 <a:latin typeface="Segoe UI"/>
               </a:rPr>
-              <a:t>pair   </a:t>
-            </a:r>
-            <a:r>
-              <a:rPr sz="950" b="0">
+              <a:t>Spikes dodge the residents.  </a:t>
+            </a:r>
+            <a:r>
+              <a:rPr sz="1050" b="0">
                 <a:solidFill>
                   <a:srgbClr val="6B7280"/>
                 </a:solidFill>
                 <a:latin typeface="Segoe UI"/>
               </a:rPr>
-              <a:t>two donors 181–242 µm apart, similarity 0.000</a:t>
+              <a:t>injection times keep a 75-sample guard from a resident neuron's own spikes — except on the collision tier, where the overlap is the point.</a:t>
             </a:r>
           </a:p>
           <a:p>
             <a:pPr>
               <a:spcBef>
-                <a:spcPts val="100"/>
+                <a:spcPts val="600"/>
               </a:spcBef>
             </a:pPr>
             <a:r>
-              <a:rPr sz="950" b="1">
+              <a:rPr sz="1050" b="1">
                 <a:solidFill>
                   <a:srgbClr val="1A1F2E"/>
                 </a:solidFill>
                 <a:latin typeface="Segoe UI"/>
               </a:rPr>
-              <a:t>hard   </a:t>
-            </a:r>
-            <a:r>
-              <a:rPr sz="950" b="0">
+              <a:t>Each unit rotates through tiers.  </a:t>
+            </a:r>
+            <a:r>
+              <a:rPr sz="1050" b="0">
                 <a:solidFill>
                   <a:srgbClr val="6B7280"/>
                 </a:solidFill>
                 <a:latin typeface="Segoe UI"/>
               </a:rPr>
-              <a:t>223–466 µV — NOT measurable, excluded</a:t>
-            </a:r>
-          </a:p>
-        </p:txBody>
-      </p:sp>
-      <p:sp>
-        <p:nvSpPr>
-          <p:cNvPr id="8" name="Rectangle 7"/>
+              <a:t>a donor appears at a different difficulty in each recording, so a tier difference is measured within a neuron rather than between neurons.</a:t>
+            </a:r>
+          </a:p>
+        </p:txBody>
+      </p:sp>
+      <p:sp>
+        <p:nvSpPr>
+          <p:cNvPr id="11" name="TextBox 10"/>
+          <p:cNvSpPr txBox="1"/>
+          <p:nvPr/>
+        </p:nvSpPr>
+        <p:spPr>
+          <a:xfrm>
+            <a:off x="566928" y="4005072"/>
+            <a:ext cx="6400800" cy="237744"/>
+          </a:xfrm>
+          <a:prstGeom prst="rect">
+            <a:avLst/>
+          </a:prstGeom>
+          <a:noFill/>
+        </p:spPr>
+        <p:txBody>
+          <a:bodyPr wrap="square" lIns="0" rIns="0" tIns="0" bIns="0">
+            <a:spAutoFit/>
+          </a:bodyPr>
+          <a:lstStyle/>
+          <a:p>
+            <a:pPr algn="l"/>
+            <a:r>
+              <a:rPr sz="1200" b="1">
+                <a:solidFill>
+                  <a:srgbClr val="0F6E6E"/>
+                </a:solidFill>
+                <a:latin typeface="Segoe UI"/>
+              </a:rPr>
+              <a:t>3 · The four conditions</a:t>
+            </a:r>
+          </a:p>
+        </p:txBody>
+      </p:sp>
+      <p:sp>
+        <p:nvSpPr>
+          <p:cNvPr id="12" name="TextBox 11"/>
+          <p:cNvSpPr txBox="1"/>
+          <p:nvPr/>
+        </p:nvSpPr>
+        <p:spPr>
+          <a:xfrm>
+            <a:off x="3931920" y="4023359"/>
+            <a:ext cx="7699248" cy="219456"/>
+          </a:xfrm>
+          <a:prstGeom prst="rect">
+            <a:avLst/>
+          </a:prstGeom>
+          <a:noFill/>
+        </p:spPr>
+        <p:txBody>
+          <a:bodyPr wrap="square" lIns="0" rIns="0" tIns="0" bIns="0">
+            <a:spAutoFit/>
+          </a:bodyPr>
+          <a:lstStyle/>
+          <a:p>
+            <a:pPr algn="r"/>
+            <a:r>
+              <a:rPr sz="1000" b="0">
+                <a:solidFill>
+                  <a:srgbClr val="6B7280"/>
+                </a:solidFill>
+                <a:latin typeface="Segoe UI"/>
+              </a:rPr>
+              <a:t>13 placements per recording · 4 recordings from different windows of the session · ~290 spikes each</a:t>
+            </a:r>
+          </a:p>
+        </p:txBody>
+      </p:sp>
+      <p:sp>
+        <p:nvSpPr>
+          <p:cNvPr id="13" name="Rectangle 12"/>
           <p:cNvSpPr/>
           <p:nvPr/>
         </p:nvSpPr>
         <p:spPr>
           <a:xfrm>
-            <a:off x="566928" y="2542032"/>
+            <a:off x="566928" y="4279392"/>
             <a:ext cx="11064240" cy="14630"/>
           </a:xfrm>
           <a:prstGeom prst="rect">
@@ -3499,14 +3693,14 @@
       </p:sp>
       <p:sp>
         <p:nvSpPr>
-          <p:cNvPr id="9" name="TextBox 8"/>
-          <p:cNvSpPr txBox="1"/>
-          <p:nvPr/>
-        </p:nvSpPr>
-        <p:spPr>
-          <a:xfrm>
-            <a:off x="786384" y="2624327"/>
-            <a:ext cx="3017520" cy="201168"/>
+          <p:cNvPr id="14" name="TextBox 13"/>
+          <p:cNvSpPr txBox="1"/>
+          <p:nvPr/>
+        </p:nvSpPr>
+        <p:spPr>
+          <a:xfrm>
+            <a:off x="786384" y="4352544"/>
+            <a:ext cx="1188720" cy="201168"/>
           </a:xfrm>
           <a:prstGeom prst="rect">
             <a:avLst/>
@@ -3527,21 +3721,21 @@
                 </a:solidFill>
                 <a:latin typeface="Segoe UI"/>
               </a:rPr>
-              <a:t>VARIANT</a:t>
-            </a:r>
-          </a:p>
-        </p:txBody>
-      </p:sp>
-      <p:sp>
-        <p:nvSpPr>
-          <p:cNvPr id="10" name="TextBox 9"/>
-          <p:cNvSpPr txBox="1"/>
-          <p:nvPr/>
-        </p:nvSpPr>
-        <p:spPr>
-          <a:xfrm>
-            <a:off x="3977639" y="2624327"/>
-            <a:ext cx="5394960" cy="201168"/>
+              <a:t>TIER</a:t>
+            </a:r>
+          </a:p>
+        </p:txBody>
+      </p:sp>
+      <p:sp>
+        <p:nvSpPr>
+          <p:cNvPr id="15" name="TextBox 14"/>
+          <p:cNvSpPr txBox="1"/>
+          <p:nvPr/>
+        </p:nvSpPr>
+        <p:spPr>
+          <a:xfrm>
+            <a:off x="1975104" y="4352544"/>
+            <a:ext cx="822960" cy="201168"/>
           </a:xfrm>
           <a:prstGeom prst="rect">
             <a:avLst/>
@@ -3562,34 +3756,34 @@
                 </a:solidFill>
                 <a:latin typeface="Segoe UI"/>
               </a:rPr>
-              <a:t>WHAT IT ADDS</a:t>
-            </a:r>
-          </a:p>
-        </p:txBody>
-      </p:sp>
-      <p:sp>
-        <p:nvSpPr>
-          <p:cNvPr id="11" name="TextBox 10"/>
-          <p:cNvSpPr txBox="1"/>
-          <p:nvPr/>
-        </p:nvSpPr>
-        <p:spPr>
-          <a:xfrm>
-            <a:off x="9528048" y="2624327"/>
-            <a:ext cx="960120" cy="201168"/>
-          </a:xfrm>
-          <a:prstGeom prst="rect">
-            <a:avLst/>
-          </a:prstGeom>
-          <a:noFill/>
-        </p:spPr>
-        <p:txBody>
-          <a:bodyPr wrap="square" lIns="0" rIns="0" tIns="0" bIns="0">
-            <a:spAutoFit/>
-          </a:bodyPr>
-          <a:lstStyle/>
-          <a:p>
-            <a:pPr algn="r"/>
+              <a:t>PER REC.</a:t>
+            </a:r>
+          </a:p>
+        </p:txBody>
+      </p:sp>
+      <p:sp>
+        <p:nvSpPr>
+          <p:cNvPr id="16" name="TextBox 15"/>
+          <p:cNvSpPr txBox="1"/>
+          <p:nvPr/>
+        </p:nvSpPr>
+        <p:spPr>
+          <a:xfrm>
+            <a:off x="2926080" y="4352544"/>
+            <a:ext cx="2651760" cy="201168"/>
+          </a:xfrm>
+          <a:prstGeom prst="rect">
+            <a:avLst/>
+          </a:prstGeom>
+          <a:noFill/>
+        </p:spPr>
+        <p:txBody>
+          <a:bodyPr wrap="square" lIns="0" rIns="0" tIns="0" bIns="0">
+            <a:spAutoFit/>
+          </a:bodyPr>
+          <a:lstStyle/>
+          <a:p>
+            <a:pPr algn="l"/>
             <a:r>
               <a:rPr sz="900" b="1">
                 <a:solidFill>
@@ -3597,34 +3791,34 @@
                 </a:solidFill>
                 <a:latin typeface="Segoe UI"/>
               </a:rPr>
-              <a:t>RECALL</a:t>
-            </a:r>
-          </a:p>
-        </p:txBody>
-      </p:sp>
-      <p:sp>
-        <p:nvSpPr>
-          <p:cNvPr id="12" name="TextBox 11"/>
-          <p:cNvSpPr txBox="1"/>
-          <p:nvPr/>
-        </p:nvSpPr>
-        <p:spPr>
-          <a:xfrm>
-            <a:off x="10533888" y="2624327"/>
-            <a:ext cx="960120" cy="201168"/>
-          </a:xfrm>
-          <a:prstGeom prst="rect">
-            <a:avLst/>
-          </a:prstGeom>
-          <a:noFill/>
-        </p:spPr>
-        <p:txBody>
-          <a:bodyPr wrap="square" lIns="0" rIns="0" tIns="0" bIns="0">
-            <a:spAutoFit/>
-          </a:bodyPr>
-          <a:lstStyle/>
-          <a:p>
-            <a:pPr algn="r"/>
+              <a:t>WHERE IT GOES</a:t>
+            </a:r>
+          </a:p>
+        </p:txBody>
+      </p:sp>
+      <p:sp>
+        <p:nvSpPr>
+          <p:cNvPr id="17" name="TextBox 16"/>
+          <p:cNvSpPr txBox="1"/>
+          <p:nvPr/>
+        </p:nvSpPr>
+        <p:spPr>
+          <a:xfrm>
+            <a:off x="5715000" y="4352544"/>
+            <a:ext cx="5760720" cy="201168"/>
+          </a:xfrm>
+          <a:prstGeom prst="rect">
+            <a:avLst/>
+          </a:prstGeom>
+          <a:noFill/>
+        </p:spPr>
+        <p:txBody>
+          <a:bodyPr wrap="square" lIns="0" rIns="0" tIns="0" bIns="0">
+            <a:spAutoFit/>
+          </a:bodyPr>
+          <a:lstStyle/>
+          <a:p>
+            <a:pPr algn="l"/>
             <a:r>
               <a:rPr sz="900" b="1">
                 <a:solidFill>
@@ -3632,29 +3826,167 @@
                 </a:solidFill>
                 <a:latin typeface="Segoe UI"/>
               </a:rPr>
-              <a:t>PRECISION</a:t>
-            </a:r>
-          </a:p>
-        </p:txBody>
-      </p:sp>
-      <p:sp>
-        <p:nvSpPr>
-          <p:cNvPr id="13" name="Rounded Rectangle 12"/>
+              <a:t>WHAT MAKES IT HARD</a:t>
+            </a:r>
+          </a:p>
+        </p:txBody>
+      </p:sp>
+      <p:sp>
+        <p:nvSpPr>
+          <p:cNvPr id="18" name="TextBox 17"/>
+          <p:cNvSpPr txBox="1"/>
+          <p:nvPr/>
+        </p:nvSpPr>
+        <p:spPr>
+          <a:xfrm>
+            <a:off x="786384" y="4626864"/>
+            <a:ext cx="1188720" cy="274320"/>
+          </a:xfrm>
+          <a:prstGeom prst="rect">
+            <a:avLst/>
+          </a:prstGeom>
+          <a:noFill/>
+        </p:spPr>
+        <p:txBody>
+          <a:bodyPr wrap="square" lIns="0" rIns="0" tIns="0" bIns="0">
+            <a:spAutoFit/>
+          </a:bodyPr>
+          <a:lstStyle/>
+          <a:p>
+            <a:pPr algn="l"/>
+            <a:r>
+              <a:rPr sz="1200" b="1">
+                <a:solidFill>
+                  <a:srgbClr val="1A1F2E"/>
+                </a:solidFill>
+                <a:latin typeface="Segoe UI"/>
+              </a:rPr>
+              <a:t>easy</a:t>
+            </a:r>
+          </a:p>
+        </p:txBody>
+      </p:sp>
+      <p:sp>
+        <p:nvSpPr>
+          <p:cNvPr id="19" name="TextBox 18"/>
+          <p:cNvSpPr txBox="1"/>
+          <p:nvPr/>
+        </p:nvSpPr>
+        <p:spPr>
+          <a:xfrm>
+            <a:off x="1975104" y="4636008"/>
+            <a:ext cx="822960" cy="274320"/>
+          </a:xfrm>
+          <a:prstGeom prst="rect">
+            <a:avLst/>
+          </a:prstGeom>
+          <a:noFill/>
+        </p:spPr>
+        <p:txBody>
+          <a:bodyPr wrap="square" lIns="0" rIns="0" tIns="0" bIns="0">
+            <a:spAutoFit/>
+          </a:bodyPr>
+          <a:lstStyle/>
+          <a:p>
+            <a:pPr algn="l"/>
+            <a:r>
+              <a:rPr sz="1050" b="0">
+                <a:solidFill>
+                  <a:srgbClr val="1A1F2E"/>
+                </a:solidFill>
+                <a:latin typeface="Segoe UI"/>
+              </a:rPr>
+              <a:t>3</a:t>
+            </a:r>
+          </a:p>
+        </p:txBody>
+      </p:sp>
+      <p:sp>
+        <p:nvSpPr>
+          <p:cNvPr id="20" name="TextBox 19"/>
+          <p:cNvSpPr txBox="1"/>
+          <p:nvPr/>
+        </p:nvSpPr>
+        <p:spPr>
+          <a:xfrm>
+            <a:off x="2926080" y="4636008"/>
+            <a:ext cx="2697480" cy="365760"/>
+          </a:xfrm>
+          <a:prstGeom prst="rect">
+            <a:avLst/>
+          </a:prstGeom>
+          <a:noFill/>
+        </p:spPr>
+        <p:txBody>
+          <a:bodyPr wrap="square" lIns="0" rIns="0" tIns="0" bIns="0">
+            <a:spAutoFit/>
+          </a:bodyPr>
+          <a:lstStyle/>
+          <a:p>
+            <a:pPr algn="l"/>
+            <a:r>
+              <a:rPr sz="1000" b="0">
+                <a:solidFill>
+                  <a:srgbClr val="1A1F2E"/>
+                </a:solidFill>
+                <a:latin typeface="Segoe UI"/>
+              </a:rPr>
+              <a:t>quiet site, 23–70 µV neighbours</a:t>
+            </a:r>
+          </a:p>
+        </p:txBody>
+      </p:sp>
+      <p:sp>
+        <p:nvSpPr>
+          <p:cNvPr id="21" name="TextBox 20"/>
+          <p:cNvSpPr txBox="1"/>
+          <p:nvPr/>
+        </p:nvSpPr>
+        <p:spPr>
+          <a:xfrm>
+            <a:off x="5715000" y="4617720"/>
+            <a:ext cx="5760720" cy="420624"/>
+          </a:xfrm>
+          <a:prstGeom prst="rect">
+            <a:avLst/>
+          </a:prstGeom>
+          <a:noFill/>
+        </p:spPr>
+        <p:txBody>
+          <a:bodyPr wrap="square" lIns="0" rIns="0" tIns="0" bIns="0">
+            <a:spAutoFit/>
+          </a:bodyPr>
+          <a:lstStyle/>
+          <a:p>
+            <a:pPr algn="l"/>
+            <a:r>
+              <a:rPr sz="1000" b="0">
+                <a:solidFill>
+                  <a:srgbClr val="6B7280"/>
+                </a:solidFill>
+                <a:latin typeface="Segoe UI"/>
+              </a:rPr>
+              <a:t>nothing — this is the control</a:t>
+            </a:r>
+          </a:p>
+        </p:txBody>
+      </p:sp>
+      <p:sp>
+        <p:nvSpPr>
+          <p:cNvPr id="22" name="Rectangle 21"/>
           <p:cNvSpPr/>
           <p:nvPr/>
         </p:nvSpPr>
         <p:spPr>
           <a:xfrm>
-            <a:off x="566928" y="2862072"/>
-            <a:ext cx="11064240" cy="475488"/>
-          </a:xfrm>
-          <a:prstGeom prst="roundRect">
-            <a:avLst>
-              <a:gd name="adj" fmla="val 4000"/>
-            </a:avLst>
+            <a:off x="786384" y="5010912"/>
+            <a:ext cx="10625328" cy="11887"/>
+          </a:xfrm>
+          <a:prstGeom prst="rect">
+            <a:avLst/>
           </a:prstGeom>
           <a:solidFill>
-            <a:srgbClr val="ECEFF2"/>
+            <a:srgbClr val="D7DBE0"/>
           </a:solidFill>
           <a:ln>
             <a:noFill/>
@@ -3685,14 +4017,14 @@
       </p:sp>
       <p:sp>
         <p:nvSpPr>
-          <p:cNvPr id="14" name="TextBox 13"/>
-          <p:cNvSpPr txBox="1"/>
-          <p:nvPr/>
-        </p:nvSpPr>
-        <p:spPr>
-          <a:xfrm>
-            <a:off x="786384" y="2926079"/>
-            <a:ext cx="3063240" cy="457200"/>
+          <p:cNvPr id="23" name="TextBox 22"/>
+          <p:cNvSpPr txBox="1"/>
+          <p:nvPr/>
+        </p:nvSpPr>
+        <p:spPr>
+          <a:xfrm>
+            <a:off x="786384" y="5065775"/>
+            <a:ext cx="1188720" cy="274320"/>
           </a:xfrm>
           <a:prstGeom prst="rect">
             <a:avLst/>
@@ -3707,27 +4039,27 @@
           <a:p>
             <a:pPr algn="l"/>
             <a:r>
-              <a:rPr sz="1150" b="1">
+              <a:rPr sz="1200" b="1">
                 <a:solidFill>
                   <a:srgbClr val="1A1F2E"/>
                 </a:solidFill>
                 <a:latin typeface="Segoe UI"/>
               </a:rPr>
-              <a:t>Stock Kilosort4</a:t>
-            </a:r>
-          </a:p>
-        </p:txBody>
-      </p:sp>
-      <p:sp>
-        <p:nvSpPr>
-          <p:cNvPr id="15" name="TextBox 14"/>
-          <p:cNvSpPr txBox="1"/>
-          <p:nvPr/>
-        </p:nvSpPr>
-        <p:spPr>
-          <a:xfrm>
-            <a:off x="3977639" y="2916935"/>
-            <a:ext cx="5349240" cy="493776"/>
+              <a:t>collision</a:t>
+            </a:r>
+          </a:p>
+        </p:txBody>
+      </p:sp>
+      <p:sp>
+        <p:nvSpPr>
+          <p:cNvPr id="24" name="TextBox 23"/>
+          <p:cNvSpPr txBox="1"/>
+          <p:nvPr/>
+        </p:nvSpPr>
+        <p:spPr>
+          <a:xfrm>
+            <a:off x="1975104" y="5074920"/>
+            <a:ext cx="822960" cy="274320"/>
           </a:xfrm>
           <a:prstGeom prst="rect">
             <a:avLst/>
@@ -3742,96 +4074,96 @@
           <a:p>
             <a:pPr algn="l"/>
             <a:r>
-              <a:rPr sz="950" b="0">
+              <a:rPr sz="1050" b="0">
+                <a:solidFill>
+                  <a:srgbClr val="1A1F2E"/>
+                </a:solidFill>
+                <a:latin typeface="Segoe UI"/>
+              </a:rPr>
+              <a:t>3</a:t>
+            </a:r>
+          </a:p>
+        </p:txBody>
+      </p:sp>
+      <p:sp>
+        <p:nvSpPr>
+          <p:cNvPr id="25" name="TextBox 24"/>
+          <p:cNvSpPr txBox="1"/>
+          <p:nvPr/>
+        </p:nvSpPr>
+        <p:spPr>
+          <a:xfrm>
+            <a:off x="2926080" y="5074920"/>
+            <a:ext cx="2697480" cy="365760"/>
+          </a:xfrm>
+          <a:prstGeom prst="rect">
+            <a:avLst/>
+          </a:prstGeom>
+          <a:noFill/>
+        </p:spPr>
+        <p:txBody>
+          <a:bodyPr wrap="square" lIns="0" rIns="0" tIns="0" bIns="0">
+            <a:spAutoFit/>
+          </a:bodyPr>
+          <a:lstStyle/>
+          <a:p>
+            <a:pPr algn="l"/>
+            <a:r>
+              <a:rPr sz="1000" b="0">
+                <a:solidFill>
+                  <a:srgbClr val="1A1F2E"/>
+                </a:solidFill>
+                <a:latin typeface="Segoe UI"/>
+              </a:rPr>
+              <a:t>quiet site</a:t>
+            </a:r>
+          </a:p>
+        </p:txBody>
+      </p:sp>
+      <p:sp>
+        <p:nvSpPr>
+          <p:cNvPr id="26" name="TextBox 25"/>
+          <p:cNvSpPr txBox="1"/>
+          <p:nvPr/>
+        </p:nvSpPr>
+        <p:spPr>
+          <a:xfrm>
+            <a:off x="5715000" y="5056631"/>
+            <a:ext cx="5760720" cy="420624"/>
+          </a:xfrm>
+          <a:prstGeom prst="rect">
+            <a:avLst/>
+          </a:prstGeom>
+          <a:noFill/>
+        </p:spPr>
+        <p:txBody>
+          <a:bodyPr wrap="square" lIns="0" rIns="0" tIns="0" bIns="0">
+            <a:spAutoFit/>
+          </a:bodyPr>
+          <a:lstStyle/>
+          <a:p>
+            <a:pPr algn="l"/>
+            <a:r>
+              <a:rPr sz="1000" b="0">
                 <a:solidFill>
                   <a:srgbClr val="6B7280"/>
                 </a:solidFill>
                 <a:latin typeface="Segoe UI"/>
               </a:rPr>
-              <a:t>baseline</a:t>
-            </a:r>
-          </a:p>
-        </p:txBody>
-      </p:sp>
-      <p:sp>
-        <p:nvSpPr>
-          <p:cNvPr id="16" name="TextBox 15"/>
-          <p:cNvSpPr txBox="1"/>
-          <p:nvPr/>
-        </p:nvSpPr>
-        <p:spPr>
-          <a:xfrm>
-            <a:off x="9528048" y="2926079"/>
-            <a:ext cx="960120" cy="274320"/>
-          </a:xfrm>
-          <a:prstGeom prst="rect">
-            <a:avLst/>
-          </a:prstGeom>
-          <a:noFill/>
-        </p:spPr>
-        <p:txBody>
-          <a:bodyPr wrap="square" lIns="0" rIns="0" tIns="0" bIns="0">
-            <a:spAutoFit/>
-          </a:bodyPr>
-          <a:lstStyle/>
-          <a:p>
-            <a:pPr algn="r"/>
-            <a:r>
-              <a:rPr sz="1300" b="1">
-                <a:solidFill>
-                  <a:srgbClr val="1A1F2E"/>
-                </a:solidFill>
-                <a:latin typeface="Segoe UI"/>
-              </a:rPr>
-              <a:t>.794</a:t>
-            </a:r>
-          </a:p>
-        </p:txBody>
-      </p:sp>
-      <p:sp>
-        <p:nvSpPr>
-          <p:cNvPr id="17" name="TextBox 16"/>
-          <p:cNvSpPr txBox="1"/>
-          <p:nvPr/>
-        </p:nvSpPr>
-        <p:spPr>
-          <a:xfrm>
-            <a:off x="10533888" y="2926079"/>
-            <a:ext cx="960120" cy="274320"/>
-          </a:xfrm>
-          <a:prstGeom prst="rect">
-            <a:avLst/>
-          </a:prstGeom>
-          <a:noFill/>
-        </p:spPr>
-        <p:txBody>
-          <a:bodyPr wrap="square" lIns="0" rIns="0" tIns="0" bIns="0">
-            <a:spAutoFit/>
-          </a:bodyPr>
-          <a:lstStyle/>
-          <a:p>
-            <a:pPr algn="r"/>
-            <a:r>
-              <a:rPr sz="1300" b="1">
-                <a:solidFill>
-                  <a:srgbClr val="1A1F2E"/>
-                </a:solidFill>
-                <a:latin typeface="Segoe UI"/>
-              </a:rPr>
-              <a:t>.600</a:t>
-            </a:r>
-          </a:p>
-        </p:txBody>
-      </p:sp>
-      <p:sp>
-        <p:nvSpPr>
-          <p:cNvPr id="18" name="Rectangle 17"/>
+              <a:t>each spike placed 4–25 samples (0.13–0.83 ms) from a real resident's spike, so the two waveforms physically overlap</a:t>
+            </a:r>
+          </a:p>
+        </p:txBody>
+      </p:sp>
+      <p:sp>
+        <p:nvSpPr>
+          <p:cNvPr id="27" name="Rectangle 26"/>
           <p:cNvSpPr/>
           <p:nvPr/>
         </p:nvSpPr>
         <p:spPr>
           <a:xfrm>
-            <a:off x="786384" y="3337560"/>
+            <a:off x="786384" y="5449824"/>
             <a:ext cx="10625328" cy="11887"/>
           </a:xfrm>
           <a:prstGeom prst="rect">
@@ -3869,14 +4201,14 @@
       </p:sp>
       <p:sp>
         <p:nvSpPr>
-          <p:cNvPr id="19" name="TextBox 18"/>
-          <p:cNvSpPr txBox="1"/>
-          <p:nvPr/>
-        </p:nvSpPr>
-        <p:spPr>
-          <a:xfrm>
-            <a:off x="786384" y="3401568"/>
-            <a:ext cx="3063240" cy="457200"/>
+          <p:cNvPr id="28" name="TextBox 27"/>
+          <p:cNvSpPr txBox="1"/>
+          <p:nvPr/>
+        </p:nvSpPr>
+        <p:spPr>
+          <a:xfrm>
+            <a:off x="786384" y="5504688"/>
+            <a:ext cx="1188720" cy="274320"/>
           </a:xfrm>
           <a:prstGeom prst="rect">
             <a:avLst/>
@@ -3891,27 +4223,27 @@
           <a:p>
             <a:pPr algn="l"/>
             <a:r>
-              <a:rPr sz="1150" b="1">
+              <a:rPr sz="1200" b="1">
                 <a:solidFill>
                   <a:srgbClr val="1A1F2E"/>
                 </a:solidFill>
                 <a:latin typeface="Segoe UI"/>
               </a:rPr>
-              <a:t>+ Wavelet sub-sample alignment</a:t>
-            </a:r>
-          </a:p>
-        </p:txBody>
-      </p:sp>
-      <p:sp>
-        <p:nvSpPr>
-          <p:cNvPr id="20" name="TextBox 19"/>
-          <p:cNvSpPr txBox="1"/>
-          <p:nvPr/>
-        </p:nvSpPr>
-        <p:spPr>
-          <a:xfrm>
-            <a:off x="3977639" y="3392423"/>
-            <a:ext cx="5349240" cy="493776"/>
+              <a:t>pair</a:t>
+            </a:r>
+          </a:p>
+        </p:txBody>
+      </p:sp>
+      <p:sp>
+        <p:nvSpPr>
+          <p:cNvPr id="29" name="TextBox 28"/>
+          <p:cNvSpPr txBox="1"/>
+          <p:nvPr/>
+        </p:nvSpPr>
+        <p:spPr>
+          <a:xfrm>
+            <a:off x="1975104" y="5513832"/>
+            <a:ext cx="822960" cy="274320"/>
           </a:xfrm>
           <a:prstGeom prst="rect">
             <a:avLst/>
@@ -3926,96 +4258,96 @@
           <a:p>
             <a:pPr algn="l"/>
             <a:r>
-              <a:rPr sz="950" b="0">
+              <a:rPr sz="1050" b="0">
+                <a:solidFill>
+                  <a:srgbClr val="1A1F2E"/>
+                </a:solidFill>
+                <a:latin typeface="Segoe UI"/>
+              </a:rPr>
+              <a:t>2 pairs</a:t>
+            </a:r>
+          </a:p>
+        </p:txBody>
+      </p:sp>
+      <p:sp>
+        <p:nvSpPr>
+          <p:cNvPr id="30" name="TextBox 29"/>
+          <p:cNvSpPr txBox="1"/>
+          <p:nvPr/>
+        </p:nvSpPr>
+        <p:spPr>
+          <a:xfrm>
+            <a:off x="2926080" y="5513832"/>
+            <a:ext cx="2697480" cy="365760"/>
+          </a:xfrm>
+          <a:prstGeom prst="rect">
+            <a:avLst/>
+          </a:prstGeom>
+          <a:noFill/>
+        </p:spPr>
+        <p:txBody>
+          <a:bodyPr wrap="square" lIns="0" rIns="0" tIns="0" bIns="0">
+            <a:spAutoFit/>
+          </a:bodyPr>
+          <a:lstStyle/>
+          <a:p>
+            <a:pPr algn="l"/>
+            <a:r>
+              <a:rPr sz="1000" b="0">
+                <a:solidFill>
+                  <a:srgbClr val="1A1F2E"/>
+                </a:solidFill>
+                <a:latin typeface="Segoe UI"/>
+              </a:rPr>
+              <a:t>quiet sites, 3 channels apart</a:t>
+            </a:r>
+          </a:p>
+        </p:txBody>
+      </p:sp>
+      <p:sp>
+        <p:nvSpPr>
+          <p:cNvPr id="31" name="TextBox 30"/>
+          <p:cNvSpPr txBox="1"/>
+          <p:nvPr/>
+        </p:nvSpPr>
+        <p:spPr>
+          <a:xfrm>
+            <a:off x="5715000" y="5495544"/>
+            <a:ext cx="5760720" cy="420624"/>
+          </a:xfrm>
+          <a:prstGeom prst="rect">
+            <a:avLst/>
+          </a:prstGeom>
+          <a:noFill/>
+        </p:spPr>
+        <p:txBody>
+          <a:bodyPr wrap="square" lIns="0" rIns="0" tIns="0" bIns="0">
+            <a:spAutoFit/>
+          </a:bodyPr>
+          <a:lstStyle/>
+          <a:p>
+            <a:pPr algn="l"/>
+            <a:r>
+              <a:rPr sz="1000" b="0">
                 <a:solidFill>
                   <a:srgbClr val="6B7280"/>
                 </a:solidFill>
                 <a:latin typeface="Segoe UI"/>
               </a:rPr>
-              <a:t>Morlet-wavelet phase places each spike to a fraction of a sample, so a template is not an average of smeared spikes</a:t>
-            </a:r>
-          </a:p>
-        </p:txBody>
-      </p:sp>
-      <p:sp>
-        <p:nvSpPr>
-          <p:cNvPr id="21" name="TextBox 20"/>
-          <p:cNvSpPr txBox="1"/>
-          <p:nvPr/>
-        </p:nvSpPr>
-        <p:spPr>
-          <a:xfrm>
-            <a:off x="9528048" y="3401568"/>
-            <a:ext cx="960120" cy="274320"/>
-          </a:xfrm>
-          <a:prstGeom prst="rect">
-            <a:avLst/>
-          </a:prstGeom>
-          <a:noFill/>
-        </p:spPr>
-        <p:txBody>
-          <a:bodyPr wrap="square" lIns="0" rIns="0" tIns="0" bIns="0">
-            <a:spAutoFit/>
-          </a:bodyPr>
-          <a:lstStyle/>
-          <a:p>
-            <a:pPr algn="r"/>
-            <a:r>
-              <a:rPr sz="1250" b="1">
-                <a:solidFill>
-                  <a:srgbClr val="6B7280"/>
-                </a:solidFill>
-                <a:latin typeface="Segoe UI"/>
-              </a:rPr>
-              <a:t>n.s.</a:t>
-            </a:r>
-          </a:p>
-        </p:txBody>
-      </p:sp>
-      <p:sp>
-        <p:nvSpPr>
-          <p:cNvPr id="22" name="TextBox 21"/>
-          <p:cNvSpPr txBox="1"/>
-          <p:nvPr/>
-        </p:nvSpPr>
-        <p:spPr>
-          <a:xfrm>
-            <a:off x="10533888" y="3401568"/>
-            <a:ext cx="960120" cy="274320"/>
-          </a:xfrm>
-          <a:prstGeom prst="rect">
-            <a:avLst/>
-          </a:prstGeom>
-          <a:noFill/>
-        </p:spPr>
-        <p:txBody>
-          <a:bodyPr wrap="square" lIns="0" rIns="0" tIns="0" bIns="0">
-            <a:spAutoFit/>
-          </a:bodyPr>
-          <a:lstStyle/>
-          <a:p>
-            <a:pPr algn="r"/>
-            <a:r>
-              <a:rPr sz="1250" b="1">
-                <a:solidFill>
-                  <a:srgbClr val="6B7280"/>
-                </a:solidFill>
-                <a:latin typeface="Segoe UI"/>
-              </a:rPr>
-              <a:t>n.s.</a:t>
-            </a:r>
-          </a:p>
-        </p:txBody>
-      </p:sp>
-      <p:sp>
-        <p:nvSpPr>
-          <p:cNvPr id="23" name="Rectangle 22"/>
+              <a:t>two donors put side by side — they must be told apart from each other. Remote in the real recording (181–242 µm, similarity 0.000), so they cannot be one split cell</a:t>
+            </a:r>
+          </a:p>
+        </p:txBody>
+      </p:sp>
+      <p:sp>
+        <p:nvSpPr>
+          <p:cNvPr id="32" name="Rectangle 31"/>
           <p:cNvSpPr/>
           <p:nvPr/>
         </p:nvSpPr>
         <p:spPr>
           <a:xfrm>
-            <a:off x="786384" y="3813048"/>
+            <a:off x="786384" y="5888736"/>
             <a:ext cx="10625328" cy="11887"/>
           </a:xfrm>
           <a:prstGeom prst="rect">
@@ -4053,160 +4385,22 @@
       </p:sp>
       <p:sp>
         <p:nvSpPr>
-          <p:cNvPr id="24" name="TextBox 23"/>
-          <p:cNvSpPr txBox="1"/>
-          <p:nvPr/>
-        </p:nvSpPr>
-        <p:spPr>
-          <a:xfrm>
-            <a:off x="786384" y="3877055"/>
-            <a:ext cx="3063240" cy="457200"/>
-          </a:xfrm>
-          <a:prstGeom prst="rect">
-            <a:avLst/>
-          </a:prstGeom>
-          <a:noFill/>
-        </p:spPr>
-        <p:txBody>
-          <a:bodyPr wrap="square" lIns="0" rIns="0" tIns="0" bIns="0">
-            <a:spAutoFit/>
-          </a:bodyPr>
-          <a:lstStyle/>
-          <a:p>
-            <a:pPr algn="l"/>
-            <a:r>
-              <a:rPr sz="1150" b="1">
-                <a:solidFill>
-                  <a:srgbClr val="1A1F2E"/>
-                </a:solidFill>
-                <a:latin typeface="Segoe UI"/>
-              </a:rPr>
-              <a:t>+ AR(4) temporal precision matrix</a:t>
-            </a:r>
-          </a:p>
-        </p:txBody>
-      </p:sp>
-      <p:sp>
-        <p:nvSpPr>
-          <p:cNvPr id="25" name="TextBox 24"/>
-          <p:cNvSpPr txBox="1"/>
-          <p:nvPr/>
-        </p:nvSpPr>
-        <p:spPr>
-          <a:xfrm>
-            <a:off x="3977639" y="3867911"/>
-            <a:ext cx="5349240" cy="493776"/>
-          </a:xfrm>
-          <a:prstGeom prst="rect">
-            <a:avLst/>
-          </a:prstGeom>
-          <a:noFill/>
-        </p:spPr>
-        <p:txBody>
-          <a:bodyPr wrap="square" lIns="0" rIns="0" tIns="0" bIns="0">
-            <a:spAutoFit/>
-          </a:bodyPr>
-          <a:lstStyle/>
-          <a:p>
-            <a:pPr algn="l"/>
-            <a:r>
-              <a:rPr sz="950" b="0">
-                <a:solidFill>
-                  <a:srgbClr val="6B7280"/>
-                </a:solidFill>
-                <a:latin typeface="Segoe UI"/>
-              </a:rPr>
-              <a:t>Kilosort whitens channel×channel only; this models noise correlation in TIME   (tested post-hoc, not inside KS)</a:t>
-            </a:r>
-          </a:p>
-        </p:txBody>
-      </p:sp>
-      <p:sp>
-        <p:nvSpPr>
-          <p:cNvPr id="26" name="TextBox 25"/>
-          <p:cNvSpPr txBox="1"/>
-          <p:nvPr/>
-        </p:nvSpPr>
-        <p:spPr>
-          <a:xfrm>
-            <a:off x="9528048" y="3877055"/>
-            <a:ext cx="960120" cy="274320"/>
-          </a:xfrm>
-          <a:prstGeom prst="rect">
-            <a:avLst/>
-          </a:prstGeom>
-          <a:noFill/>
-        </p:spPr>
-        <p:txBody>
-          <a:bodyPr wrap="square" lIns="0" rIns="0" tIns="0" bIns="0">
-            <a:spAutoFit/>
-          </a:bodyPr>
-          <a:lstStyle/>
-          <a:p>
-            <a:pPr algn="r"/>
-            <a:r>
-              <a:rPr sz="1250" b="1">
-                <a:solidFill>
-                  <a:srgbClr val="6B7280"/>
-                </a:solidFill>
-                <a:latin typeface="Segoe UI"/>
-              </a:rPr>
-              <a:t>+1.7</a:t>
-            </a:r>
-          </a:p>
-        </p:txBody>
-      </p:sp>
-      <p:sp>
-        <p:nvSpPr>
-          <p:cNvPr id="27" name="TextBox 26"/>
-          <p:cNvSpPr txBox="1"/>
-          <p:nvPr/>
-        </p:nvSpPr>
-        <p:spPr>
-          <a:xfrm>
-            <a:off x="10533888" y="3877055"/>
-            <a:ext cx="960120" cy="274320"/>
-          </a:xfrm>
-          <a:prstGeom prst="rect">
-            <a:avLst/>
-          </a:prstGeom>
-          <a:noFill/>
-        </p:spPr>
-        <p:txBody>
-          <a:bodyPr wrap="square" lIns="0" rIns="0" tIns="0" bIns="0">
-            <a:spAutoFit/>
-          </a:bodyPr>
-          <a:lstStyle/>
-          <a:p>
-            <a:pPr algn="r"/>
-            <a:r>
-              <a:rPr sz="1250" b="1">
-                <a:solidFill>
-                  <a:srgbClr val="B3261E"/>
-                </a:solidFill>
-                <a:latin typeface="Segoe UI"/>
-              </a:rPr>
-              <a:t>−4.3</a:t>
-            </a:r>
-          </a:p>
-        </p:txBody>
-      </p:sp>
-      <p:sp>
-        <p:nvSpPr>
-          <p:cNvPr id="28" name="Rectangle 27"/>
+          <p:cNvPr id="33" name="Rounded Rectangle 32"/>
           <p:cNvSpPr/>
           <p:nvPr/>
         </p:nvSpPr>
         <p:spPr>
           <a:xfrm>
-            <a:off x="786384" y="4288536"/>
-            <a:ext cx="10625328" cy="11887"/>
-          </a:xfrm>
-          <a:prstGeom prst="rect">
-            <a:avLst/>
+            <a:off x="566928" y="5888736"/>
+            <a:ext cx="11064240" cy="438912"/>
+          </a:xfrm>
+          <a:prstGeom prst="roundRect">
+            <a:avLst>
+              <a:gd name="adj" fmla="val 3500"/>
+            </a:avLst>
           </a:prstGeom>
           <a:solidFill>
-            <a:srgbClr val="D7DBE0"/>
+            <a:srgbClr val="F7F2F2"/>
           </a:solidFill>
           <a:ln>
             <a:noFill/>
@@ -4237,14 +4431,14 @@
       </p:sp>
       <p:sp>
         <p:nvSpPr>
-          <p:cNvPr id="29" name="TextBox 28"/>
-          <p:cNvSpPr txBox="1"/>
-          <p:nvPr/>
-        </p:nvSpPr>
-        <p:spPr>
-          <a:xfrm>
-            <a:off x="786384" y="4352544"/>
-            <a:ext cx="3063240" cy="457200"/>
+          <p:cNvPr id="34" name="TextBox 33"/>
+          <p:cNvSpPr txBox="1"/>
+          <p:nvPr/>
+        </p:nvSpPr>
+        <p:spPr>
+          <a:xfrm>
+            <a:off x="786384" y="5943600"/>
+            <a:ext cx="1188720" cy="274320"/>
           </a:xfrm>
           <a:prstGeom prst="rect">
             <a:avLst/>
@@ -4259,27 +4453,62 @@
           <a:p>
             <a:pPr algn="l"/>
             <a:r>
-              <a:rPr sz="1150" b="1">
+              <a:rPr sz="1200" b="1">
+                <a:solidFill>
+                  <a:srgbClr val="B3261E"/>
+                </a:solidFill>
+                <a:latin typeface="Segoe UI"/>
+              </a:rPr>
+              <a:t>hard</a:t>
+            </a:r>
+          </a:p>
+        </p:txBody>
+      </p:sp>
+      <p:sp>
+        <p:nvSpPr>
+          <p:cNvPr id="35" name="TextBox 34"/>
+          <p:cNvSpPr txBox="1"/>
+          <p:nvPr/>
+        </p:nvSpPr>
+        <p:spPr>
+          <a:xfrm>
+            <a:off x="1975104" y="5952744"/>
+            <a:ext cx="822960" cy="274320"/>
+          </a:xfrm>
+          <a:prstGeom prst="rect">
+            <a:avLst/>
+          </a:prstGeom>
+          <a:noFill/>
+        </p:spPr>
+        <p:txBody>
+          <a:bodyPr wrap="square" lIns="0" rIns="0" tIns="0" bIns="0">
+            <a:spAutoFit/>
+          </a:bodyPr>
+          <a:lstStyle/>
+          <a:p>
+            <a:pPr algn="l"/>
+            <a:r>
+              <a:rPr sz="1050" b="0">
                 <a:solidFill>
                   <a:srgbClr val="1A1F2E"/>
                 </a:solidFill>
                 <a:latin typeface="Segoe UI"/>
               </a:rPr>
-              <a:t>+ Amplitude normalisation</a:t>
-            </a:r>
-          </a:p>
-        </p:txBody>
-      </p:sp>
-      <p:sp>
-        <p:nvSpPr>
-          <p:cNvPr id="30" name="TextBox 29"/>
-          <p:cNvSpPr txBox="1"/>
-          <p:nvPr/>
-        </p:nvSpPr>
-        <p:spPr>
-          <a:xfrm>
-            <a:off x="3977639" y="4343400"/>
-            <a:ext cx="5349240" cy="493776"/>
+              <a:t>3</a:t>
+            </a:r>
+          </a:p>
+        </p:txBody>
+      </p:sp>
+      <p:sp>
+        <p:nvSpPr>
+          <p:cNvPr id="36" name="TextBox 35"/>
+          <p:cNvSpPr txBox="1"/>
+          <p:nvPr/>
+        </p:nvSpPr>
+        <p:spPr>
+          <a:xfrm>
+            <a:off x="2926080" y="5952744"/>
+            <a:ext cx="2697480" cy="365760"/>
           </a:xfrm>
           <a:prstGeom prst="rect">
             <a:avLst/>
@@ -4294,529 +4523,92 @@
           <a:p>
             <a:pPr algn="l"/>
             <a:r>
-              <a:rPr sz="950" b="0">
+              <a:rPr sz="1000" b="0">
+                <a:solidFill>
+                  <a:srgbClr val="1A1F2E"/>
+                </a:solidFill>
+                <a:latin typeface="Segoe UI"/>
+              </a:rPr>
+              <a:t>loud site, 223–466 µV neighbours</a:t>
+            </a:r>
+          </a:p>
+        </p:txBody>
+      </p:sp>
+      <p:sp>
+        <p:nvSpPr>
+          <p:cNvPr id="37" name="TextBox 36"/>
+          <p:cNvSpPr txBox="1"/>
+          <p:nvPr/>
+        </p:nvSpPr>
+        <p:spPr>
+          <a:xfrm>
+            <a:off x="5715000" y="5934456"/>
+            <a:ext cx="5760720" cy="420624"/>
+          </a:xfrm>
+          <a:prstGeom prst="rect">
+            <a:avLst/>
+          </a:prstGeom>
+          <a:noFill/>
+        </p:spPr>
+        <p:txBody>
+          <a:bodyPr wrap="square" lIns="0" rIns="0" tIns="0" bIns="0">
+            <a:spAutoFit/>
+          </a:bodyPr>
+          <a:lstStyle/>
+          <a:p>
+            <a:pPr algn="l"/>
+            <a:r>
+              <a:rPr sz="1000" b="0">
                 <a:solidFill>
                   <a:srgbClr val="6B7280"/>
                 </a:solidFill>
                 <a:latin typeface="Segoe UI"/>
               </a:rPr>
-              <a:t>divide out each spike's own amplitude before clustering</a:t>
-            </a:r>
-          </a:p>
-        </p:txBody>
-      </p:sp>
-      <p:sp>
-        <p:nvSpPr>
-          <p:cNvPr id="31" name="TextBox 30"/>
-          <p:cNvSpPr txBox="1"/>
-          <p:nvPr/>
-        </p:nvSpPr>
-        <p:spPr>
-          <a:xfrm>
-            <a:off x="9528048" y="4352544"/>
-            <a:ext cx="960120" cy="274320"/>
-          </a:xfrm>
-          <a:prstGeom prst="rect">
-            <a:avLst/>
-          </a:prstGeom>
-          <a:noFill/>
-        </p:spPr>
-        <p:txBody>
-          <a:bodyPr wrap="square" lIns="0" rIns="0" tIns="0" bIns="0">
-            <a:spAutoFit/>
-          </a:bodyPr>
-          <a:lstStyle/>
-          <a:p>
-            <a:pPr algn="r"/>
-            <a:r>
-              <a:rPr sz="1250" b="1">
-                <a:solidFill>
-                  <a:srgbClr val="B3261E"/>
-                </a:solidFill>
-                <a:latin typeface="Segoe UI"/>
-              </a:rPr>
-              <a:t>−3.4</a:t>
-            </a:r>
-          </a:p>
-        </p:txBody>
-      </p:sp>
-      <p:sp>
-        <p:nvSpPr>
-          <p:cNvPr id="32" name="TextBox 31"/>
-          <p:cNvSpPr txBox="1"/>
-          <p:nvPr/>
-        </p:nvSpPr>
-        <p:spPr>
-          <a:xfrm>
-            <a:off x="10533888" y="4352544"/>
-            <a:ext cx="960120" cy="274320"/>
-          </a:xfrm>
-          <a:prstGeom prst="rect">
-            <a:avLst/>
-          </a:prstGeom>
-          <a:noFill/>
-        </p:spPr>
-        <p:txBody>
-          <a:bodyPr wrap="square" lIns="0" rIns="0" tIns="0" bIns="0">
-            <a:spAutoFit/>
-          </a:bodyPr>
-          <a:lstStyle/>
-          <a:p>
-            <a:pPr algn="r"/>
-            <a:r>
-              <a:rPr sz="1250" b="1">
+              <a:t>a large neighbour dominates the channel</a:t>
+            </a:r>
+          </a:p>
+        </p:txBody>
+      </p:sp>
+      <p:sp>
+        <p:nvSpPr>
+          <p:cNvPr id="38" name="TextBox 37"/>
+          <p:cNvSpPr txBox="1"/>
+          <p:nvPr/>
+        </p:nvSpPr>
+        <p:spPr>
+          <a:xfrm>
+            <a:off x="566928" y="6437376"/>
+            <a:ext cx="11064240" cy="274320"/>
+          </a:xfrm>
+          <a:prstGeom prst="rect">
+            <a:avLst/>
+          </a:prstGeom>
+          <a:noFill/>
+        </p:spPr>
+        <p:txBody>
+          <a:bodyPr wrap="square" lIns="0" rIns="0" tIns="0" bIns="0">
+            <a:spAutoFit/>
+          </a:bodyPr>
+          <a:lstStyle/>
+          <a:p>
+            <a:pPr algn="l"/>
+            <a:r>
+              <a:rPr sz="1050" b="1">
+                <a:solidFill>
+                  <a:srgbClr val="1A1F2E"/>
+                </a:solidFill>
+                <a:latin typeface="Segoe UI"/>
+              </a:rPr>
+              <a:t>52 placements · 15,086 ground-truth spikes.  </a:t>
+            </a:r>
+            <a:r>
+              <a:rPr sz="1050" b="0">
                 <a:solidFill>
                   <a:srgbClr val="6B7280"/>
                 </a:solidFill>
                 <a:latin typeface="Segoe UI"/>
               </a:rPr>
-              <a:t>n.s.</a:t>
-            </a:r>
-          </a:p>
-        </p:txBody>
-      </p:sp>
-      <p:sp>
-        <p:nvSpPr>
-          <p:cNvPr id="33" name="Rectangle 32"/>
-          <p:cNvSpPr/>
-          <p:nvPr/>
-        </p:nvSpPr>
-        <p:spPr>
-          <a:xfrm>
-            <a:off x="786384" y="4764024"/>
-            <a:ext cx="10625328" cy="11887"/>
-          </a:xfrm>
-          <a:prstGeom prst="rect">
-            <a:avLst/>
-          </a:prstGeom>
-          <a:solidFill>
-            <a:srgbClr val="D7DBE0"/>
-          </a:solidFill>
-          <a:ln>
-            <a:noFill/>
-          </a:ln>
-          <a:effectLst/>
-        </p:spPr>
-        <p:style>
-          <a:lnRef idx="1">
-            <a:schemeClr val="accent1"/>
-          </a:lnRef>
-          <a:fillRef idx="3">
-            <a:schemeClr val="accent1"/>
-          </a:fillRef>
-          <a:effectRef idx="2">
-            <a:schemeClr val="accent1"/>
-          </a:effectRef>
-          <a:fontRef idx="minor">
-            <a:schemeClr val="lt1"/>
-          </a:fontRef>
-        </p:style>
-        <p:txBody>
-          <a:bodyPr rtlCol="0" anchor="ctr"/>
-          <a:lstStyle/>
-          <a:p>
-            <a:pPr algn="ctr"/>
-          </a:p>
-        </p:txBody>
-      </p:sp>
-      <p:sp>
-        <p:nvSpPr>
-          <p:cNvPr id="34" name="TextBox 33"/>
-          <p:cNvSpPr txBox="1"/>
-          <p:nvPr/>
-        </p:nvSpPr>
-        <p:spPr>
-          <a:xfrm>
-            <a:off x="786384" y="4828031"/>
-            <a:ext cx="3063240" cy="457200"/>
-          </a:xfrm>
-          <a:prstGeom prst="rect">
-            <a:avLst/>
-          </a:prstGeom>
-          <a:noFill/>
-        </p:spPr>
-        <p:txBody>
-          <a:bodyPr wrap="square" lIns="0" rIns="0" tIns="0" bIns="0">
-            <a:spAutoFit/>
-          </a:bodyPr>
-          <a:lstStyle/>
-          <a:p>
-            <a:pPr algn="l"/>
-            <a:r>
-              <a:rPr sz="1150" b="1">
-                <a:solidFill>
-                  <a:srgbClr val="1A1F2E"/>
-                </a:solidFill>
-                <a:latin typeface="Segoe UI"/>
-              </a:rPr>
-              <a:t>+ Spatial footprint → graph, w3</a:t>
-            </a:r>
-          </a:p>
-        </p:txBody>
-      </p:sp>
-      <p:sp>
-        <p:nvSpPr>
-          <p:cNvPr id="35" name="TextBox 34"/>
-          <p:cNvSpPr txBox="1"/>
-          <p:nvPr/>
-        </p:nvSpPr>
-        <p:spPr>
-          <a:xfrm>
-            <a:off x="3977639" y="4818888"/>
-            <a:ext cx="5349240" cy="493776"/>
-          </a:xfrm>
-          <a:prstGeom prst="rect">
-            <a:avLst/>
-          </a:prstGeom>
-          <a:noFill/>
-        </p:spPr>
-        <p:txBody>
-          <a:bodyPr wrap="square" lIns="0" rIns="0" tIns="0" bIns="0">
-            <a:spAutoFit/>
-          </a:bodyPr>
-          <a:lstStyle/>
-          <a:p>
-            <a:pPr algn="l"/>
-            <a:r>
-              <a:rPr sz="950" b="0">
-                <a:solidFill>
-                  <a:srgbClr val="6B7280"/>
-                </a:solidFill>
-                <a:latin typeface="Segoe UI"/>
-              </a:rPr>
-              <a:t>the per-channel amplitude pattern added as extra clustering dimensions, inside Kilosort's kNN graph</a:t>
-            </a:r>
-          </a:p>
-        </p:txBody>
-      </p:sp>
-      <p:sp>
-        <p:nvSpPr>
-          <p:cNvPr id="36" name="TextBox 35"/>
-          <p:cNvSpPr txBox="1"/>
-          <p:nvPr/>
-        </p:nvSpPr>
-        <p:spPr>
-          <a:xfrm>
-            <a:off x="9528048" y="4828031"/>
-            <a:ext cx="960120" cy="274320"/>
-          </a:xfrm>
-          <a:prstGeom prst="rect">
-            <a:avLst/>
-          </a:prstGeom>
-          <a:noFill/>
-        </p:spPr>
-        <p:txBody>
-          <a:bodyPr wrap="square" lIns="0" rIns="0" tIns="0" bIns="0">
-            <a:spAutoFit/>
-          </a:bodyPr>
-          <a:lstStyle/>
-          <a:p>
-            <a:pPr algn="r"/>
-            <a:r>
-              <a:rPr sz="1250" b="1">
-                <a:solidFill>
-                  <a:srgbClr val="1B6B3A"/>
-                </a:solidFill>
-                <a:latin typeface="Segoe UI"/>
-              </a:rPr>
-              <a:t>+4.8</a:t>
-            </a:r>
-          </a:p>
-        </p:txBody>
-      </p:sp>
-      <p:sp>
-        <p:nvSpPr>
-          <p:cNvPr id="37" name="TextBox 36"/>
-          <p:cNvSpPr txBox="1"/>
-          <p:nvPr/>
-        </p:nvSpPr>
-        <p:spPr>
-          <a:xfrm>
-            <a:off x="10533888" y="4828031"/>
-            <a:ext cx="960120" cy="274320"/>
-          </a:xfrm>
-          <a:prstGeom prst="rect">
-            <a:avLst/>
-          </a:prstGeom>
-          <a:noFill/>
-        </p:spPr>
-        <p:txBody>
-          <a:bodyPr wrap="square" lIns="0" rIns="0" tIns="0" bIns="0">
-            <a:spAutoFit/>
-          </a:bodyPr>
-          <a:lstStyle/>
-          <a:p>
-            <a:pPr algn="r"/>
-            <a:r>
-              <a:rPr sz="1250" b="1">
-                <a:solidFill>
-                  <a:srgbClr val="6B7280"/>
-                </a:solidFill>
-                <a:latin typeface="Segoe UI"/>
-              </a:rPr>
-              <a:t>−3.3</a:t>
-            </a:r>
-          </a:p>
-        </p:txBody>
-      </p:sp>
-      <p:sp>
-        <p:nvSpPr>
-          <p:cNvPr id="38" name="Rectangle 37"/>
-          <p:cNvSpPr/>
-          <p:nvPr/>
-        </p:nvSpPr>
-        <p:spPr>
-          <a:xfrm>
-            <a:off x="786384" y="5239512"/>
-            <a:ext cx="10625328" cy="11887"/>
-          </a:xfrm>
-          <a:prstGeom prst="rect">
-            <a:avLst/>
-          </a:prstGeom>
-          <a:solidFill>
-            <a:srgbClr val="D7DBE0"/>
-          </a:solidFill>
-          <a:ln>
-            <a:noFill/>
-          </a:ln>
-          <a:effectLst/>
-        </p:spPr>
-        <p:style>
-          <a:lnRef idx="1">
-            <a:schemeClr val="accent1"/>
-          </a:lnRef>
-          <a:fillRef idx="3">
-            <a:schemeClr val="accent1"/>
-          </a:fillRef>
-          <a:effectRef idx="2">
-            <a:schemeClr val="accent1"/>
-          </a:effectRef>
-          <a:fontRef idx="minor">
-            <a:schemeClr val="lt1"/>
-          </a:fontRef>
-        </p:style>
-        <p:txBody>
-          <a:bodyPr rtlCol="0" anchor="ctr"/>
-          <a:lstStyle/>
-          <a:p>
-            <a:pPr algn="ctr"/>
-          </a:p>
-        </p:txBody>
-      </p:sp>
-      <p:sp>
-        <p:nvSpPr>
-          <p:cNvPr id="39" name="TextBox 38"/>
-          <p:cNvSpPr txBox="1"/>
-          <p:nvPr/>
-        </p:nvSpPr>
-        <p:spPr>
-          <a:xfrm>
-            <a:off x="786384" y="5303519"/>
-            <a:ext cx="3063240" cy="457200"/>
-          </a:xfrm>
-          <a:prstGeom prst="rect">
-            <a:avLst/>
-          </a:prstGeom>
-          <a:noFill/>
-        </p:spPr>
-        <p:txBody>
-          <a:bodyPr wrap="square" lIns="0" rIns="0" tIns="0" bIns="0">
-            <a:spAutoFit/>
-          </a:bodyPr>
-          <a:lstStyle/>
-          <a:p>
-            <a:pPr algn="l"/>
-            <a:r>
-              <a:rPr sz="1150" b="1">
-                <a:solidFill>
-                  <a:srgbClr val="1A1F2E"/>
-                </a:solidFill>
-                <a:latin typeface="Segoe UI"/>
-              </a:rPr>
-              <a:t>+ Spatial footprint → graph+seed, w1</a:t>
-            </a:r>
-          </a:p>
-        </p:txBody>
-      </p:sp>
-      <p:sp>
-        <p:nvSpPr>
-          <p:cNvPr id="40" name="TextBox 39"/>
-          <p:cNvSpPr txBox="1"/>
-          <p:nvPr/>
-        </p:nvSpPr>
-        <p:spPr>
-          <a:xfrm>
-            <a:off x="3977639" y="5294375"/>
-            <a:ext cx="5349240" cy="493776"/>
-          </a:xfrm>
-          <a:prstGeom prst="rect">
-            <a:avLst/>
-          </a:prstGeom>
-          <a:noFill/>
-        </p:spPr>
-        <p:txBody>
-          <a:bodyPr wrap="square" lIns="0" rIns="0" tIns="0" bIns="0">
-            <a:spAutoFit/>
-          </a:bodyPr>
-          <a:lstStyle/>
-          <a:p>
-            <a:pPr algn="l"/>
-            <a:r>
-              <a:rPr sz="950" b="0">
-                <a:solidFill>
-                  <a:srgbClr val="6B7280"/>
-                </a:solidFill>
-                <a:latin typeface="Segoe UI"/>
-              </a:rPr>
-              <a:t>same feature at lower weight, also shown to the kmeans++ seeding</a:t>
-            </a:r>
-          </a:p>
-        </p:txBody>
-      </p:sp>
-      <p:sp>
-        <p:nvSpPr>
-          <p:cNvPr id="41" name="TextBox 40"/>
-          <p:cNvSpPr txBox="1"/>
-          <p:nvPr/>
-        </p:nvSpPr>
-        <p:spPr>
-          <a:xfrm>
-            <a:off x="9528048" y="5303519"/>
-            <a:ext cx="960120" cy="274320"/>
-          </a:xfrm>
-          <a:prstGeom prst="rect">
-            <a:avLst/>
-          </a:prstGeom>
-          <a:noFill/>
-        </p:spPr>
-        <p:txBody>
-          <a:bodyPr wrap="square" lIns="0" rIns="0" tIns="0" bIns="0">
-            <a:spAutoFit/>
-          </a:bodyPr>
-          <a:lstStyle/>
-          <a:p>
-            <a:pPr algn="r"/>
-            <a:r>
-              <a:rPr sz="1250" b="1">
-                <a:solidFill>
-                  <a:srgbClr val="6B7280"/>
-                </a:solidFill>
-                <a:latin typeface="Segoe UI"/>
-              </a:rPr>
-              <a:t>n.s.</a:t>
-            </a:r>
-          </a:p>
-        </p:txBody>
-      </p:sp>
-      <p:sp>
-        <p:nvSpPr>
-          <p:cNvPr id="42" name="TextBox 41"/>
-          <p:cNvSpPr txBox="1"/>
-          <p:nvPr/>
-        </p:nvSpPr>
-        <p:spPr>
-          <a:xfrm>
-            <a:off x="10533888" y="5303519"/>
-            <a:ext cx="960120" cy="274320"/>
-          </a:xfrm>
-          <a:prstGeom prst="rect">
-            <a:avLst/>
-          </a:prstGeom>
-          <a:noFill/>
-        </p:spPr>
-        <p:txBody>
-          <a:bodyPr wrap="square" lIns="0" rIns="0" tIns="0" bIns="0">
-            <a:spAutoFit/>
-          </a:bodyPr>
-          <a:lstStyle/>
-          <a:p>
-            <a:pPr algn="r"/>
-            <a:r>
-              <a:rPr sz="1250" b="1">
-                <a:solidFill>
-                  <a:srgbClr val="1B6B3A"/>
-                </a:solidFill>
-                <a:latin typeface="Segoe UI"/>
-              </a:rPr>
-              <a:t>+6.6</a:t>
-            </a:r>
-          </a:p>
-        </p:txBody>
-      </p:sp>
-      <p:sp>
-        <p:nvSpPr>
-          <p:cNvPr id="43" name="TextBox 42"/>
-          <p:cNvSpPr txBox="1"/>
-          <p:nvPr/>
-        </p:nvSpPr>
-        <p:spPr>
-          <a:xfrm>
-            <a:off x="566928" y="5852159"/>
-            <a:ext cx="11064240" cy="822960"/>
-          </a:xfrm>
-          <a:prstGeom prst="rect">
-            <a:avLst/>
-          </a:prstGeom>
-          <a:noFill/>
-        </p:spPr>
-        <p:txBody>
-          <a:bodyPr wrap="square" lIns="0" rIns="0" tIns="0" bIns="0">
-            <a:spAutoFit/>
-          </a:bodyPr>
-          <a:lstStyle/>
-          <a:p>
-            <a:pPr algn="l"/>
-            <a:r>
-              <a:rPr sz="950" b="0">
-                <a:solidFill>
-                  <a:srgbClr val="6B7280"/>
-                </a:solidFill>
-                <a:latin typeface="Segoe UI"/>
-              </a:rPr>
-              <a:t>Points vs stock, paired Wilcoxon on identical placements, easy+collision+pair only.  </a:t>
-            </a:r>
-            <a:r>
-              <a:rPr sz="950" b="1">
-                <a:solidFill>
-                  <a:srgbClr val="1A1F2E"/>
-                </a:solidFill>
-                <a:latin typeface="Segoe UI"/>
-              </a:rPr>
-              <a:t>Significant: footprint-graph-w3 recall p=0.001 (better in all four replicates) · footprint-w1 precision p=0.009 · amplitude normalisation p=0.012.  </a:t>
-            </a:r>
-            <a:r>
-              <a:rPr sz="950" b="0">
-                <a:solidFill>
-                  <a:srgbClr val="6B7280"/>
-                </a:solidFill>
-                <a:latin typeface="Segoe UI"/>
-              </a:rPr>
-              <a:t>n.s. = not distinguishable from stock. Hard tier excluded — two identical runs disagree by up to 0.444 recall.</a:t>
-            </a:r>
-          </a:p>
-          <a:p>
-            <a:pPr>
-              <a:spcBef>
-                <a:spcPts val="800"/>
-              </a:spcBef>
-            </a:pPr>
-            <a:r>
-              <a:rPr sz="950" b="1">
-                <a:solidFill>
-                  <a:srgbClr val="1A1F2E"/>
-                </a:solidFill>
-                <a:latin typeface="Segoe UI"/>
-              </a:rPr>
-              <a:t>These scores are for the single best-matching cluster per injected unit — 13 clusters of the ~238 a run produces.  </a:t>
-            </a:r>
-            <a:r>
-              <a:rPr sz="950" b="0">
-                <a:solidFill>
-                  <a:srgbClr val="6B7280"/>
-                </a:solidFill>
-                <a:latin typeface="Segoe UI"/>
-              </a:rPr>
-              <a:t>The other ~225 are the recording's own resident neurons, which have no ground truth and are never scored; injected units also sit in 1.27–1.38 substantial clusters on average, so a second fragment of the same unit is left out of these numbers too.</a:t>
+              <a:t>Stock Kilosort is also run twice as a configuration — the noise floor, and how we know the hard tier is unreliable.</a:t>
             </a:r>
           </a:p>
         </p:txBody>
@@ -4847,7 +4639,7 @@
         </p:nvSpPr>
         <p:spPr>
           <a:xfrm>
-            <a:off x="566928" y="384048"/>
+            <a:off x="566928" y="365760"/>
             <a:ext cx="11064240" cy="274320"/>
           </a:xfrm>
           <a:prstGeom prst="rect">
@@ -4869,7 +4661,7 @@
                 </a:solidFill>
                 <a:latin typeface="Segoe UI"/>
               </a:rPr>
-              <a:t>THE OBVIOUS FIX, TESTED AT THE ORACLE LEVEL</a:t>
+              <a:t>RESULTS · 52 PLACEMENTS, POOLED OVER 4 REPLICATES</a:t>
             </a:r>
           </a:p>
         </p:txBody>
@@ -4882,7 +4674,7 @@
         </p:nvSpPr>
         <p:spPr>
           <a:xfrm>
-            <a:off x="566928" y="658368"/>
+            <a:off x="566928" y="640080"/>
             <a:ext cx="11064240" cy="457200"/>
           </a:xfrm>
           <a:prstGeom prst="rect">
@@ -4904,7 +4696,7 @@
                 </a:solidFill>
                 <a:latin typeface="Segoe UI"/>
               </a:rPr>
-              <a:t>Why merging the fragments back together does not help</a:t>
+              <a:t>What each variant scored</a:t>
             </a:r>
           </a:p>
         </p:txBody>
@@ -4917,7 +4709,7 @@
         </p:nvSpPr>
         <p:spPr>
           <a:xfrm>
-            <a:off x="566928" y="1207008"/>
+            <a:off x="566928" y="1170432"/>
             <a:ext cx="11064240" cy="11887"/>
           </a:xfrm>
           <a:prstGeom prst="rect">
@@ -4961,8 +4753,8 @@
         </p:nvSpPr>
         <p:spPr>
           <a:xfrm>
-            <a:off x="566928" y="1463040"/>
-            <a:ext cx="11064240" cy="411480"/>
+            <a:off x="566928" y="1316736"/>
+            <a:ext cx="5486400" cy="237744"/>
           </a:xfrm>
           <a:prstGeom prst="rect">
             <a:avLst/>
@@ -4977,31 +4769,66 @@
           <a:p>
             <a:pPr algn="l"/>
             <a:r>
-              <a:rPr sz="1500" b="1">
-                <a:solidFill>
-                  <a:srgbClr val="1A1F2E"/>
-                </a:solidFill>
-                <a:latin typeface="Segoe UI"/>
-              </a:rPr>
-              <a:t>We merged while knowing the true fragments — the best any merge tool could ever do. It still trades down everywhere.</a:t>
-            </a:r>
-          </a:p>
-        </p:txBody>
-      </p:sp>
-      <p:sp>
-        <p:nvSpPr>
-          <p:cNvPr id="6" name="Rounded Rectangle 5"/>
+              <a:rPr sz="1250" b="1">
+                <a:solidFill>
+                  <a:srgbClr val="0F6E6E"/>
+                </a:solidFill>
+                <a:latin typeface="Segoe UI"/>
+              </a:rPr>
+              <a:t>Stock Kilosort4, by condition</a:t>
+            </a:r>
+          </a:p>
+        </p:txBody>
+      </p:sp>
+      <p:sp>
+        <p:nvSpPr>
+          <p:cNvPr id="6" name="TextBox 5"/>
+          <p:cNvSpPr txBox="1"/>
+          <p:nvPr/>
+        </p:nvSpPr>
+        <p:spPr>
+          <a:xfrm>
+            <a:off x="4572000" y="1344168"/>
+            <a:ext cx="7059168" cy="219456"/>
+          </a:xfrm>
+          <a:prstGeom prst="rect">
+            <a:avLst/>
+          </a:prstGeom>
+          <a:noFill/>
+        </p:spPr>
+        <p:txBody>
+          <a:bodyPr wrap="square" lIns="0" rIns="0" tIns="0" bIns="0">
+            <a:spAutoFit/>
+          </a:bodyPr>
+          <a:lstStyle/>
+          <a:p>
+            <a:pPr algn="r"/>
+            <a:r>
+              <a:rPr sz="1000" b="0">
+                <a:solidFill>
+                  <a:srgbClr val="6B7280"/>
+                </a:solidFill>
+                <a:latin typeface="Segoe UI"/>
+              </a:rPr>
+              <a:t>recall holds up everywhere · precision collapses where neurons sit close together</a:t>
+            </a:r>
+          </a:p>
+        </p:txBody>
+      </p:sp>
+      <p:sp>
+        <p:nvSpPr>
+          <p:cNvPr id="7" name="Rounded Rectangle 6"/>
           <p:cNvSpPr/>
           <p:nvPr/>
         </p:nvSpPr>
         <p:spPr>
           <a:xfrm>
-            <a:off x="566928" y="1993392"/>
-            <a:ext cx="11064240" cy="914400"/>
+            <a:off x="566928" y="1627632"/>
+            <a:ext cx="2615184" cy="786384"/>
           </a:xfrm>
           <a:prstGeom prst="roundRect">
             <a:avLst>
-              <a:gd name="adj" fmla="val 4000"/>
+              <a:gd name="adj" fmla="val 3500"/>
             </a:avLst>
           </a:prstGeom>
           <a:solidFill>
@@ -5036,14 +4863,14 @@
       </p:sp>
       <p:sp>
         <p:nvSpPr>
-          <p:cNvPr id="7" name="TextBox 6"/>
-          <p:cNvSpPr txBox="1"/>
-          <p:nvPr/>
-        </p:nvSpPr>
-        <p:spPr>
-          <a:xfrm>
-            <a:off x="804672" y="2139696"/>
-            <a:ext cx="365760" cy="365760"/>
+          <p:cNvPr id="8" name="TextBox 7"/>
+          <p:cNvSpPr txBox="1"/>
+          <p:nvPr/>
+        </p:nvSpPr>
+        <p:spPr>
+          <a:xfrm>
+            <a:off x="768096" y="1719072"/>
+            <a:ext cx="1188720" cy="237744"/>
           </a:xfrm>
           <a:prstGeom prst="rect">
             <a:avLst/>
@@ -5058,27 +4885,27 @@
           <a:p>
             <a:pPr algn="l"/>
             <a:r>
-              <a:rPr sz="1700" b="1">
-                <a:solidFill>
-                  <a:srgbClr val="0F6E6E"/>
-                </a:solidFill>
-                <a:latin typeface="Segoe UI"/>
-              </a:rPr>
-              <a:t>1</a:t>
-            </a:r>
-          </a:p>
-        </p:txBody>
-      </p:sp>
-      <p:sp>
-        <p:nvSpPr>
-          <p:cNvPr id="8" name="TextBox 7"/>
-          <p:cNvSpPr txBox="1"/>
-          <p:nvPr/>
-        </p:nvSpPr>
-        <p:spPr>
-          <a:xfrm>
-            <a:off x="1243584" y="2121408"/>
-            <a:ext cx="10149840" cy="749808"/>
+              <a:rPr sz="1150" b="1">
+                <a:solidFill>
+                  <a:srgbClr val="1A1F2E"/>
+                </a:solidFill>
+                <a:latin typeface="Segoe UI"/>
+              </a:rPr>
+              <a:t>easy</a:t>
+            </a:r>
+          </a:p>
+        </p:txBody>
+      </p:sp>
+      <p:sp>
+        <p:nvSpPr>
+          <p:cNvPr id="9" name="TextBox 8"/>
+          <p:cNvSpPr txBox="1"/>
+          <p:nvPr/>
+        </p:nvSpPr>
+        <p:spPr>
+          <a:xfrm>
+            <a:off x="768096" y="1938528"/>
+            <a:ext cx="1097280" cy="329184"/>
           </a:xfrm>
           <a:prstGeom prst="rect">
             <a:avLst/>
@@ -5093,51 +4920,158 @@
           <a:p>
             <a:pPr algn="l"/>
             <a:r>
-              <a:rPr sz="1250" b="1">
+              <a:rPr sz="2100" b="1">
                 <a:solidFill>
                   <a:srgbClr val="1A1F2E"/>
                 </a:solidFill>
                 <a:latin typeface="Segoe UI"/>
               </a:rPr>
-              <a:t>There is barely anything to merge.</a:t>
-            </a:r>
-          </a:p>
-          <a:p>
-            <a:pPr>
-              <a:spcBef>
-                <a:spcPts val="300"/>
-              </a:spcBef>
-            </a:pPr>
-            <a:r>
-              <a:rPr sz="1050" b="0">
+              <a:t>88</a:t>
+            </a:r>
+            <a:r>
+              <a:rPr sz="1200" b="1">
                 <a:solidFill>
                   <a:srgbClr val="6B7280"/>
                 </a:solidFill>
                 <a:latin typeface="Segoe UI"/>
               </a:rPr>
-              <a:t>67–77% of injected units already sit in ONE substantial cluster; the mean is 1.27–1.38 fragments and the maximum anywhere is 3. There is no three-way split waiting to be rejoined.</a:t>
-            </a:r>
-          </a:p>
-        </p:txBody>
-      </p:sp>
-      <p:sp>
-        <p:nvSpPr>
-          <p:cNvPr id="9" name="Rounded Rectangle 8"/>
+              <a:t>%</a:t>
+            </a:r>
+          </a:p>
+        </p:txBody>
+      </p:sp>
+      <p:sp>
+        <p:nvSpPr>
+          <p:cNvPr id="10" name="TextBox 9"/>
+          <p:cNvSpPr txBox="1"/>
+          <p:nvPr/>
+        </p:nvSpPr>
+        <p:spPr>
+          <a:xfrm>
+            <a:off x="768096" y="2231136"/>
+            <a:ext cx="1097280" cy="182880"/>
+          </a:xfrm>
+          <a:prstGeom prst="rect">
+            <a:avLst/>
+          </a:prstGeom>
+          <a:noFill/>
+        </p:spPr>
+        <p:txBody>
+          <a:bodyPr wrap="square" lIns="0" rIns="0" tIns="0" bIns="0">
+            <a:spAutoFit/>
+          </a:bodyPr>
+          <a:lstStyle/>
+          <a:p>
+            <a:pPr algn="l"/>
+            <a:r>
+              <a:rPr sz="900" b="0">
+                <a:solidFill>
+                  <a:srgbClr val="6B7280"/>
+                </a:solidFill>
+                <a:latin typeface="Segoe UI"/>
+              </a:rPr>
+              <a:t>recall</a:t>
+            </a:r>
+          </a:p>
+        </p:txBody>
+      </p:sp>
+      <p:sp>
+        <p:nvSpPr>
+          <p:cNvPr id="11" name="TextBox 10"/>
+          <p:cNvSpPr txBox="1"/>
+          <p:nvPr/>
+        </p:nvSpPr>
+        <p:spPr>
+          <a:xfrm>
+            <a:off x="1892807" y="1938528"/>
+            <a:ext cx="1097280" cy="329184"/>
+          </a:xfrm>
+          <a:prstGeom prst="rect">
+            <a:avLst/>
+          </a:prstGeom>
+          <a:noFill/>
+        </p:spPr>
+        <p:txBody>
+          <a:bodyPr wrap="square" lIns="0" rIns="0" tIns="0" bIns="0">
+            <a:spAutoFit/>
+          </a:bodyPr>
+          <a:lstStyle/>
+          <a:p>
+            <a:pPr algn="l"/>
+            <a:r>
+              <a:rPr sz="2100" b="1">
+                <a:solidFill>
+                  <a:srgbClr val="1A1F2E"/>
+                </a:solidFill>
+                <a:latin typeface="Segoe UI"/>
+              </a:rPr>
+              <a:t>76</a:t>
+            </a:r>
+            <a:r>
+              <a:rPr sz="1200" b="1">
+                <a:solidFill>
+                  <a:srgbClr val="6B7280"/>
+                </a:solidFill>
+                <a:latin typeface="Segoe UI"/>
+              </a:rPr>
+              <a:t>%</a:t>
+            </a:r>
+          </a:p>
+        </p:txBody>
+      </p:sp>
+      <p:sp>
+        <p:nvSpPr>
+          <p:cNvPr id="12" name="TextBox 11"/>
+          <p:cNvSpPr txBox="1"/>
+          <p:nvPr/>
+        </p:nvSpPr>
+        <p:spPr>
+          <a:xfrm>
+            <a:off x="1892807" y="2231136"/>
+            <a:ext cx="1097280" cy="182880"/>
+          </a:xfrm>
+          <a:prstGeom prst="rect">
+            <a:avLst/>
+          </a:prstGeom>
+          <a:noFill/>
+        </p:spPr>
+        <p:txBody>
+          <a:bodyPr wrap="square" lIns="0" rIns="0" tIns="0" bIns="0">
+            <a:spAutoFit/>
+          </a:bodyPr>
+          <a:lstStyle/>
+          <a:p>
+            <a:pPr algn="l"/>
+            <a:r>
+              <a:rPr sz="900" b="0">
+                <a:solidFill>
+                  <a:srgbClr val="6B7280"/>
+                </a:solidFill>
+                <a:latin typeface="Segoe UI"/>
+              </a:rPr>
+              <a:t>precision</a:t>
+            </a:r>
+          </a:p>
+        </p:txBody>
+      </p:sp>
+      <p:sp>
+        <p:nvSpPr>
+          <p:cNvPr id="13" name="Rounded Rectangle 12"/>
           <p:cNvSpPr/>
           <p:nvPr/>
         </p:nvSpPr>
         <p:spPr>
           <a:xfrm>
-            <a:off x="566928" y="2971800"/>
-            <a:ext cx="11064240" cy="914400"/>
+            <a:off x="3383280" y="1627632"/>
+            <a:ext cx="2615184" cy="786384"/>
           </a:xfrm>
           <a:prstGeom prst="roundRect">
             <a:avLst>
-              <a:gd name="adj" fmla="val 4000"/>
+              <a:gd name="adj" fmla="val 3500"/>
             </a:avLst>
           </a:prstGeom>
           <a:solidFill>
-            <a:srgbClr val="FFFFFF"/>
+            <a:srgbClr val="F4F6F8"/>
           </a:solidFill>
           <a:ln>
             <a:noFill/>
@@ -5168,14 +5102,14 @@
       </p:sp>
       <p:sp>
         <p:nvSpPr>
-          <p:cNvPr id="10" name="TextBox 9"/>
-          <p:cNvSpPr txBox="1"/>
-          <p:nvPr/>
-        </p:nvSpPr>
-        <p:spPr>
-          <a:xfrm>
-            <a:off x="804672" y="3118104"/>
-            <a:ext cx="365760" cy="365760"/>
+          <p:cNvPr id="14" name="TextBox 13"/>
+          <p:cNvSpPr txBox="1"/>
+          <p:nvPr/>
+        </p:nvSpPr>
+        <p:spPr>
+          <a:xfrm>
+            <a:off x="3584448" y="1719072"/>
+            <a:ext cx="1188720" cy="237744"/>
           </a:xfrm>
           <a:prstGeom prst="rect">
             <a:avLst/>
@@ -5190,27 +5124,27 @@
           <a:p>
             <a:pPr algn="l"/>
             <a:r>
-              <a:rPr sz="1700" b="1">
-                <a:solidFill>
-                  <a:srgbClr val="0F6E6E"/>
-                </a:solidFill>
-                <a:latin typeface="Segoe UI"/>
-              </a:rPr>
-              <a:t>2</a:t>
-            </a:r>
-          </a:p>
-        </p:txBody>
-      </p:sp>
-      <p:sp>
-        <p:nvSpPr>
-          <p:cNvPr id="11" name="TextBox 10"/>
-          <p:cNvSpPr txBox="1"/>
-          <p:nvPr/>
-        </p:nvSpPr>
-        <p:spPr>
-          <a:xfrm>
-            <a:off x="1243584" y="3099816"/>
-            <a:ext cx="10149840" cy="749808"/>
+              <a:rPr sz="1150" b="1">
+                <a:solidFill>
+                  <a:srgbClr val="1A1F2E"/>
+                </a:solidFill>
+                <a:latin typeface="Segoe UI"/>
+              </a:rPr>
+              <a:t>collision</a:t>
+            </a:r>
+          </a:p>
+        </p:txBody>
+      </p:sp>
+      <p:sp>
+        <p:nvSpPr>
+          <p:cNvPr id="15" name="TextBox 14"/>
+          <p:cNvSpPr txBox="1"/>
+          <p:nvPr/>
+        </p:nvSpPr>
+        <p:spPr>
+          <a:xfrm>
+            <a:off x="3584448" y="1938528"/>
+            <a:ext cx="1097280" cy="329184"/>
           </a:xfrm>
           <a:prstGeom prst="rect">
             <a:avLst/>
@@ -5225,47 +5159,154 @@
           <a:p>
             <a:pPr algn="l"/>
             <a:r>
-              <a:rPr sz="1250" b="1">
+              <a:rPr sz="2100" b="1">
                 <a:solidFill>
                   <a:srgbClr val="1A1F2E"/>
                 </a:solidFill>
                 <a:latin typeface="Segoe UI"/>
               </a:rPr>
-              <a:t>Combining loses in all 16 algorithm × tier cells.</a:t>
-            </a:r>
-          </a:p>
-          <a:p>
-            <a:pPr>
-              <a:spcBef>
-                <a:spcPts val="300"/>
-              </a:spcBef>
-            </a:pPr>
-            <a:r>
-              <a:rPr sz="1050" b="0">
+              <a:t>83</a:t>
+            </a:r>
+            <a:r>
+              <a:rPr sz="1200" b="1">
                 <a:solidFill>
                   <a:srgbClr val="6B7280"/>
                 </a:solidFill>
                 <a:latin typeface="Segoe UI"/>
               </a:rPr>
-              <a:t>+3 to +7 recall points bought for −4 to −22 precision. The best case anywhere, on the easiest tier, is +3.2 recall for −3.6 precision.</a:t>
-            </a:r>
-          </a:p>
-        </p:txBody>
-      </p:sp>
-      <p:sp>
-        <p:nvSpPr>
-          <p:cNvPr id="12" name="Rounded Rectangle 11"/>
+              <a:t>%</a:t>
+            </a:r>
+          </a:p>
+        </p:txBody>
+      </p:sp>
+      <p:sp>
+        <p:nvSpPr>
+          <p:cNvPr id="16" name="TextBox 15"/>
+          <p:cNvSpPr txBox="1"/>
+          <p:nvPr/>
+        </p:nvSpPr>
+        <p:spPr>
+          <a:xfrm>
+            <a:off x="3584448" y="2231136"/>
+            <a:ext cx="1097280" cy="182880"/>
+          </a:xfrm>
+          <a:prstGeom prst="rect">
+            <a:avLst/>
+          </a:prstGeom>
+          <a:noFill/>
+        </p:spPr>
+        <p:txBody>
+          <a:bodyPr wrap="square" lIns="0" rIns="0" tIns="0" bIns="0">
+            <a:spAutoFit/>
+          </a:bodyPr>
+          <a:lstStyle/>
+          <a:p>
+            <a:pPr algn="l"/>
+            <a:r>
+              <a:rPr sz="900" b="0">
+                <a:solidFill>
+                  <a:srgbClr val="6B7280"/>
+                </a:solidFill>
+                <a:latin typeface="Segoe UI"/>
+              </a:rPr>
+              <a:t>recall</a:t>
+            </a:r>
+          </a:p>
+        </p:txBody>
+      </p:sp>
+      <p:sp>
+        <p:nvSpPr>
+          <p:cNvPr id="17" name="TextBox 16"/>
+          <p:cNvSpPr txBox="1"/>
+          <p:nvPr/>
+        </p:nvSpPr>
+        <p:spPr>
+          <a:xfrm>
+            <a:off x="4709160" y="1938528"/>
+            <a:ext cx="1097280" cy="329184"/>
+          </a:xfrm>
+          <a:prstGeom prst="rect">
+            <a:avLst/>
+          </a:prstGeom>
+          <a:noFill/>
+        </p:spPr>
+        <p:txBody>
+          <a:bodyPr wrap="square" lIns="0" rIns="0" tIns="0" bIns="0">
+            <a:spAutoFit/>
+          </a:bodyPr>
+          <a:lstStyle/>
+          <a:p>
+            <a:pPr algn="l"/>
+            <a:r>
+              <a:rPr sz="2100" b="1">
+                <a:solidFill>
+                  <a:srgbClr val="1A1F2E"/>
+                </a:solidFill>
+                <a:latin typeface="Segoe UI"/>
+              </a:rPr>
+              <a:t>59</a:t>
+            </a:r>
+            <a:r>
+              <a:rPr sz="1200" b="1">
+                <a:solidFill>
+                  <a:srgbClr val="6B7280"/>
+                </a:solidFill>
+                <a:latin typeface="Segoe UI"/>
+              </a:rPr>
+              <a:t>%</a:t>
+            </a:r>
+          </a:p>
+        </p:txBody>
+      </p:sp>
+      <p:sp>
+        <p:nvSpPr>
+          <p:cNvPr id="18" name="TextBox 17"/>
+          <p:cNvSpPr txBox="1"/>
+          <p:nvPr/>
+        </p:nvSpPr>
+        <p:spPr>
+          <a:xfrm>
+            <a:off x="4709160" y="2231136"/>
+            <a:ext cx="1097280" cy="182880"/>
+          </a:xfrm>
+          <a:prstGeom prst="rect">
+            <a:avLst/>
+          </a:prstGeom>
+          <a:noFill/>
+        </p:spPr>
+        <p:txBody>
+          <a:bodyPr wrap="square" lIns="0" rIns="0" tIns="0" bIns="0">
+            <a:spAutoFit/>
+          </a:bodyPr>
+          <a:lstStyle/>
+          <a:p>
+            <a:pPr algn="l"/>
+            <a:r>
+              <a:rPr sz="900" b="0">
+                <a:solidFill>
+                  <a:srgbClr val="6B7280"/>
+                </a:solidFill>
+                <a:latin typeface="Segoe UI"/>
+              </a:rPr>
+              <a:t>precision</a:t>
+            </a:r>
+          </a:p>
+        </p:txBody>
+      </p:sp>
+      <p:sp>
+        <p:nvSpPr>
+          <p:cNvPr id="19" name="Rounded Rectangle 18"/>
           <p:cNvSpPr/>
           <p:nvPr/>
         </p:nvSpPr>
         <p:spPr>
           <a:xfrm>
-            <a:off x="566928" y="3950208"/>
-            <a:ext cx="11064240" cy="914400"/>
+            <a:off x="6199632" y="1627632"/>
+            <a:ext cx="2615184" cy="786384"/>
           </a:xfrm>
           <a:prstGeom prst="roundRect">
             <a:avLst>
-              <a:gd name="adj" fmla="val 4000"/>
+              <a:gd name="adj" fmla="val 3500"/>
             </a:avLst>
           </a:prstGeom>
           <a:solidFill>
@@ -5300,14 +5341,14 @@
       </p:sp>
       <p:sp>
         <p:nvSpPr>
-          <p:cNvPr id="13" name="TextBox 12"/>
-          <p:cNvSpPr txBox="1"/>
-          <p:nvPr/>
-        </p:nvSpPr>
-        <p:spPr>
-          <a:xfrm>
-            <a:off x="804672" y="4096512"/>
-            <a:ext cx="365760" cy="365760"/>
+          <p:cNvPr id="20" name="TextBox 19"/>
+          <p:cNvSpPr txBox="1"/>
+          <p:nvPr/>
+        </p:nvSpPr>
+        <p:spPr>
+          <a:xfrm>
+            <a:off x="6400800" y="1719072"/>
+            <a:ext cx="1188720" cy="237744"/>
           </a:xfrm>
           <a:prstGeom prst="rect">
             <a:avLst/>
@@ -5322,27 +5363,27 @@
           <a:p>
             <a:pPr algn="l"/>
             <a:r>
-              <a:rPr sz="1700" b="1">
-                <a:solidFill>
-                  <a:srgbClr val="0F6E6E"/>
-                </a:solidFill>
-                <a:latin typeface="Segoe UI"/>
-              </a:rPr>
-              <a:t>3</a:t>
-            </a:r>
-          </a:p>
-        </p:txBody>
-      </p:sp>
-      <p:sp>
-        <p:nvSpPr>
-          <p:cNvPr id="14" name="TextBox 13"/>
-          <p:cNvSpPr txBox="1"/>
-          <p:nvPr/>
-        </p:nvSpPr>
-        <p:spPr>
-          <a:xfrm>
-            <a:off x="1243584" y="4078224"/>
-            <a:ext cx="10149840" cy="749808"/>
+              <a:rPr sz="1150" b="1">
+                <a:solidFill>
+                  <a:srgbClr val="1A1F2E"/>
+                </a:solidFill>
+                <a:latin typeface="Segoe UI"/>
+              </a:rPr>
+              <a:t>pair</a:t>
+            </a:r>
+          </a:p>
+        </p:txBody>
+      </p:sp>
+      <p:sp>
+        <p:nvSpPr>
+          <p:cNvPr id="21" name="TextBox 20"/>
+          <p:cNvSpPr txBox="1"/>
+          <p:nvPr/>
+        </p:nvSpPr>
+        <p:spPr>
+          <a:xfrm>
+            <a:off x="6400800" y="1938528"/>
+            <a:ext cx="1097280" cy="329184"/>
           </a:xfrm>
           <a:prstGeom prst="rect">
             <a:avLst/>
@@ -5357,51 +5398,158 @@
           <a:p>
             <a:pPr algn="l"/>
             <a:r>
-              <a:rPr sz="1250" b="1">
+              <a:rPr sz="2100" b="1">
                 <a:solidFill>
                   <a:srgbClr val="1A1F2E"/>
                 </a:solidFill>
                 <a:latin typeface="Segoe UI"/>
               </a:rPr>
-              <a:t>What comes in with the extra spikes is not noise — it is other neurons.</a:t>
-            </a:r>
-          </a:p>
-          <a:p>
-            <a:pPr>
-              <a:spcBef>
-                <a:spcPts val="300"/>
-              </a:spcBef>
-            </a:pPr>
-            <a:r>
-              <a:rPr sz="1050" b="0">
+              <a:t>72</a:t>
+            </a:r>
+            <a:r>
+              <a:rPr sz="1200" b="1">
                 <a:solidFill>
                   <a:srgbClr val="6B7280"/>
                 </a:solidFill>
                 <a:latin typeface="Segoe UI"/>
               </a:rPr>
-              <a:t>80.6% of what counts against precision is a neighbouring resident neuron's REAL spike, against a measured chance rate of 3.9%. Merging a fragment imports a neighbour's spike train, so the cluster stops being one cell.</a:t>
-            </a:r>
-          </a:p>
-        </p:txBody>
-      </p:sp>
-      <p:sp>
-        <p:nvSpPr>
-          <p:cNvPr id="15" name="Rounded Rectangle 14"/>
+              <a:t>%</a:t>
+            </a:r>
+          </a:p>
+        </p:txBody>
+      </p:sp>
+      <p:sp>
+        <p:nvSpPr>
+          <p:cNvPr id="22" name="TextBox 21"/>
+          <p:cNvSpPr txBox="1"/>
+          <p:nvPr/>
+        </p:nvSpPr>
+        <p:spPr>
+          <a:xfrm>
+            <a:off x="6400800" y="2231136"/>
+            <a:ext cx="1097280" cy="182880"/>
+          </a:xfrm>
+          <a:prstGeom prst="rect">
+            <a:avLst/>
+          </a:prstGeom>
+          <a:noFill/>
+        </p:spPr>
+        <p:txBody>
+          <a:bodyPr wrap="square" lIns="0" rIns="0" tIns="0" bIns="0">
+            <a:spAutoFit/>
+          </a:bodyPr>
+          <a:lstStyle/>
+          <a:p>
+            <a:pPr algn="l"/>
+            <a:r>
+              <a:rPr sz="900" b="0">
+                <a:solidFill>
+                  <a:srgbClr val="6B7280"/>
+                </a:solidFill>
+                <a:latin typeface="Segoe UI"/>
+              </a:rPr>
+              <a:t>recall</a:t>
+            </a:r>
+          </a:p>
+        </p:txBody>
+      </p:sp>
+      <p:sp>
+        <p:nvSpPr>
+          <p:cNvPr id="23" name="TextBox 22"/>
+          <p:cNvSpPr txBox="1"/>
+          <p:nvPr/>
+        </p:nvSpPr>
+        <p:spPr>
+          <a:xfrm>
+            <a:off x="7525512" y="1938528"/>
+            <a:ext cx="1097280" cy="329184"/>
+          </a:xfrm>
+          <a:prstGeom prst="rect">
+            <a:avLst/>
+          </a:prstGeom>
+          <a:noFill/>
+        </p:spPr>
+        <p:txBody>
+          <a:bodyPr wrap="square" lIns="0" rIns="0" tIns="0" bIns="0">
+            <a:spAutoFit/>
+          </a:bodyPr>
+          <a:lstStyle/>
+          <a:p>
+            <a:pPr algn="l"/>
+            <a:r>
+              <a:rPr sz="2100" b="1">
+                <a:solidFill>
+                  <a:srgbClr val="1A1F2E"/>
+                </a:solidFill>
+                <a:latin typeface="Segoe UI"/>
+              </a:rPr>
+              <a:t>49</a:t>
+            </a:r>
+            <a:r>
+              <a:rPr sz="1200" b="1">
+                <a:solidFill>
+                  <a:srgbClr val="6B7280"/>
+                </a:solidFill>
+                <a:latin typeface="Segoe UI"/>
+              </a:rPr>
+              <a:t>%</a:t>
+            </a:r>
+          </a:p>
+        </p:txBody>
+      </p:sp>
+      <p:sp>
+        <p:nvSpPr>
+          <p:cNvPr id="24" name="TextBox 23"/>
+          <p:cNvSpPr txBox="1"/>
+          <p:nvPr/>
+        </p:nvSpPr>
+        <p:spPr>
+          <a:xfrm>
+            <a:off x="7525512" y="2231136"/>
+            <a:ext cx="1097280" cy="182880"/>
+          </a:xfrm>
+          <a:prstGeom prst="rect">
+            <a:avLst/>
+          </a:prstGeom>
+          <a:noFill/>
+        </p:spPr>
+        <p:txBody>
+          <a:bodyPr wrap="square" lIns="0" rIns="0" tIns="0" bIns="0">
+            <a:spAutoFit/>
+          </a:bodyPr>
+          <a:lstStyle/>
+          <a:p>
+            <a:pPr algn="l"/>
+            <a:r>
+              <a:rPr sz="900" b="0">
+                <a:solidFill>
+                  <a:srgbClr val="6B7280"/>
+                </a:solidFill>
+                <a:latin typeface="Segoe UI"/>
+              </a:rPr>
+              <a:t>precision</a:t>
+            </a:r>
+          </a:p>
+        </p:txBody>
+      </p:sp>
+      <p:sp>
+        <p:nvSpPr>
+          <p:cNvPr id="25" name="Rounded Rectangle 24"/>
           <p:cNvSpPr/>
           <p:nvPr/>
         </p:nvSpPr>
         <p:spPr>
           <a:xfrm>
-            <a:off x="566928" y="4928616"/>
-            <a:ext cx="11064240" cy="914400"/>
+            <a:off x="9015984" y="1627632"/>
+            <a:ext cx="2615184" cy="786384"/>
           </a:xfrm>
           <a:prstGeom prst="roundRect">
             <a:avLst>
-              <a:gd name="adj" fmla="val 4000"/>
+              <a:gd name="adj" fmla="val 3500"/>
             </a:avLst>
           </a:prstGeom>
           <a:solidFill>
-            <a:srgbClr val="FFFFFF"/>
+            <a:srgbClr val="F7F2F2"/>
           </a:solidFill>
           <a:ln>
             <a:noFill/>
@@ -5432,14 +5580,14 @@
       </p:sp>
       <p:sp>
         <p:nvSpPr>
-          <p:cNvPr id="16" name="TextBox 15"/>
-          <p:cNvSpPr txBox="1"/>
-          <p:nvPr/>
-        </p:nvSpPr>
-        <p:spPr>
-          <a:xfrm>
-            <a:off x="804672" y="5074920"/>
-            <a:ext cx="365760" cy="365760"/>
+          <p:cNvPr id="26" name="TextBox 25"/>
+          <p:cNvSpPr txBox="1"/>
+          <p:nvPr/>
+        </p:nvSpPr>
+        <p:spPr>
+          <a:xfrm>
+            <a:off x="9217152" y="1719072"/>
+            <a:ext cx="1188720" cy="237744"/>
           </a:xfrm>
           <a:prstGeom prst="rect">
             <a:avLst/>
@@ -5454,27 +5602,27 @@
           <a:p>
             <a:pPr algn="l"/>
             <a:r>
-              <a:rPr sz="1700" b="1">
-                <a:solidFill>
-                  <a:srgbClr val="0F6E6E"/>
-                </a:solidFill>
-                <a:latin typeface="Segoe UI"/>
-              </a:rPr>
-              <a:t>4</a:t>
-            </a:r>
-          </a:p>
-        </p:txBody>
-      </p:sp>
-      <p:sp>
-        <p:nvSpPr>
-          <p:cNvPr id="17" name="TextBox 16"/>
-          <p:cNvSpPr txBox="1"/>
-          <p:nvPr/>
-        </p:nvSpPr>
-        <p:spPr>
-          <a:xfrm>
-            <a:off x="1243584" y="5056632"/>
-            <a:ext cx="10149840" cy="749808"/>
+              <a:rPr sz="1150" b="1">
+                <a:solidFill>
+                  <a:srgbClr val="B3261E"/>
+                </a:solidFill>
+                <a:latin typeface="Segoe UI"/>
+              </a:rPr>
+              <a:t>hard</a:t>
+            </a:r>
+          </a:p>
+        </p:txBody>
+      </p:sp>
+      <p:sp>
+        <p:nvSpPr>
+          <p:cNvPr id="27" name="TextBox 26"/>
+          <p:cNvSpPr txBox="1"/>
+          <p:nvPr/>
+        </p:nvSpPr>
+        <p:spPr>
+          <a:xfrm>
+            <a:off x="9217152" y="1956816"/>
+            <a:ext cx="2286000" cy="365760"/>
           </a:xfrm>
           <a:prstGeom prst="rect">
             <a:avLst/>
@@ -5489,51 +5637,33 @@
           <a:p>
             <a:pPr algn="l"/>
             <a:r>
-              <a:rPr sz="1250" b="1">
-                <a:solidFill>
-                  <a:srgbClr val="1A1F2E"/>
-                </a:solidFill>
-                <a:latin typeface="Segoe UI"/>
-              </a:rPr>
-              <a:t>A perfect merge tool makes every variant the same.</a:t>
-            </a:r>
-          </a:p>
-          <a:p>
-            <a:pPr>
-              <a:spcBef>
-                <a:spcPts val="300"/>
-              </a:spcBef>
-            </a:pPr>
-            <a:r>
-              <a:rPr sz="1050" b="0">
-                <a:solidFill>
-                  <a:srgbClr val="6B7280"/>
-                </a:solidFill>
-                <a:latin typeface="Segoe UI"/>
-              </a:rPr>
-              <a:t>All configurations converge to ≈ .78 recall / .46 precision once merged, so merging cannot separate the algorithms — and it erases the footprint gain that is the project's one real win.</a:t>
-            </a:r>
-          </a:p>
-        </p:txBody>
-      </p:sp>
-      <p:sp>
-        <p:nvSpPr>
-          <p:cNvPr id="18" name="Rounded Rectangle 17"/>
+              <a:rPr sz="950" b="0">
+                <a:solidFill>
+                  <a:srgbClr val="B3261E"/>
+                </a:solidFill>
+                <a:latin typeface="Segoe UI"/>
+              </a:rPr>
+              <a:t>not reproducible — never quote it</a:t>
+            </a:r>
+          </a:p>
+        </p:txBody>
+      </p:sp>
+      <p:sp>
+        <p:nvSpPr>
+          <p:cNvPr id="28" name="Rectangle 27"/>
           <p:cNvSpPr/>
           <p:nvPr/>
         </p:nvSpPr>
         <p:spPr>
           <a:xfrm>
-            <a:off x="566928" y="5980176"/>
-            <a:ext cx="11064240" cy="603504"/>
-          </a:xfrm>
-          <a:prstGeom prst="roundRect">
-            <a:avLst>
-              <a:gd name="adj" fmla="val 4000"/>
-            </a:avLst>
+            <a:off x="566928" y="2670048"/>
+            <a:ext cx="11064240" cy="14630"/>
+          </a:xfrm>
+          <a:prstGeom prst="rect">
+            <a:avLst/>
           </a:prstGeom>
           <a:solidFill>
-            <a:srgbClr val="E8F1F1"/>
+            <a:srgbClr val="1A1F2E"/>
           </a:solidFill>
           <a:ln>
             <a:noFill/>
@@ -5564,14 +5694,1965 @@
       </p:sp>
       <p:sp>
         <p:nvSpPr>
+          <p:cNvPr id="29" name="TextBox 28"/>
+          <p:cNvSpPr txBox="1"/>
+          <p:nvPr/>
+        </p:nvSpPr>
+        <p:spPr>
+          <a:xfrm>
+            <a:off x="786384" y="2743200"/>
+            <a:ext cx="1920240" cy="201168"/>
+          </a:xfrm>
+          <a:prstGeom prst="rect">
+            <a:avLst/>
+          </a:prstGeom>
+          <a:noFill/>
+        </p:spPr>
+        <p:txBody>
+          <a:bodyPr wrap="square" lIns="0" rIns="0" tIns="0" bIns="0">
+            <a:spAutoFit/>
+          </a:bodyPr>
+          <a:lstStyle/>
+          <a:p>
+            <a:pPr algn="l"/>
+            <a:r>
+              <a:rPr sz="900" b="1">
+                <a:solidFill>
+                  <a:srgbClr val="6B7280"/>
+                </a:solidFill>
+                <a:latin typeface="Segoe UI"/>
+              </a:rPr>
+              <a:t>ALGORITHM</a:t>
+            </a:r>
+          </a:p>
+        </p:txBody>
+      </p:sp>
+      <p:sp>
+        <p:nvSpPr>
+          <p:cNvPr id="30" name="TextBox 29"/>
+          <p:cNvSpPr txBox="1"/>
+          <p:nvPr/>
+        </p:nvSpPr>
+        <p:spPr>
+          <a:xfrm>
+            <a:off x="2743200" y="2743200"/>
+            <a:ext cx="4297680" cy="201168"/>
+          </a:xfrm>
+          <a:prstGeom prst="rect">
+            <a:avLst/>
+          </a:prstGeom>
+          <a:noFill/>
+        </p:spPr>
+        <p:txBody>
+          <a:bodyPr wrap="square" lIns="0" rIns="0" tIns="0" bIns="0">
+            <a:spAutoFit/>
+          </a:bodyPr>
+          <a:lstStyle/>
+          <a:p>
+            <a:pPr algn="l"/>
+            <a:r>
+              <a:rPr sz="900" b="1">
+                <a:solidFill>
+                  <a:srgbClr val="6B7280"/>
+                </a:solidFill>
+                <a:latin typeface="Segoe UI"/>
+              </a:rPr>
+              <a:t>WHAT IT CHANGES</a:t>
+            </a:r>
+          </a:p>
+        </p:txBody>
+      </p:sp>
+      <p:sp>
+        <p:nvSpPr>
+          <p:cNvPr id="31" name="TextBox 30"/>
+          <p:cNvSpPr txBox="1"/>
+          <p:nvPr/>
+        </p:nvSpPr>
+        <p:spPr>
+          <a:xfrm>
+            <a:off x="7187184" y="2743200"/>
+            <a:ext cx="1005840" cy="201168"/>
+          </a:xfrm>
+          <a:prstGeom prst="rect">
+            <a:avLst/>
+          </a:prstGeom>
+          <a:noFill/>
+        </p:spPr>
+        <p:txBody>
+          <a:bodyPr wrap="square" lIns="0" rIns="0" tIns="0" bIns="0">
+            <a:spAutoFit/>
+          </a:bodyPr>
+          <a:lstStyle/>
+          <a:p>
+            <a:pPr algn="r"/>
+            <a:r>
+              <a:rPr sz="900" b="1">
+                <a:solidFill>
+                  <a:srgbClr val="6B7280"/>
+                </a:solidFill>
+                <a:latin typeface="Segoe UI"/>
+              </a:rPr>
+              <a:t>RECALL</a:t>
+            </a:r>
+          </a:p>
+        </p:txBody>
+      </p:sp>
+      <p:sp>
+        <p:nvSpPr>
+          <p:cNvPr id="32" name="TextBox 31"/>
+          <p:cNvSpPr txBox="1"/>
+          <p:nvPr/>
+        </p:nvSpPr>
+        <p:spPr>
+          <a:xfrm>
+            <a:off x="8284464" y="2743200"/>
+            <a:ext cx="1005840" cy="201168"/>
+          </a:xfrm>
+          <a:prstGeom prst="rect">
+            <a:avLst/>
+          </a:prstGeom>
+          <a:noFill/>
+        </p:spPr>
+        <p:txBody>
+          <a:bodyPr wrap="square" lIns="0" rIns="0" tIns="0" bIns="0">
+            <a:spAutoFit/>
+          </a:bodyPr>
+          <a:lstStyle/>
+          <a:p>
+            <a:pPr algn="r"/>
+            <a:r>
+              <a:rPr sz="900" b="1">
+                <a:solidFill>
+                  <a:srgbClr val="6B7280"/>
+                </a:solidFill>
+                <a:latin typeface="Segoe UI"/>
+              </a:rPr>
+              <a:t>PRECISION</a:t>
+            </a:r>
+          </a:p>
+        </p:txBody>
+      </p:sp>
+      <p:sp>
+        <p:nvSpPr>
+          <p:cNvPr id="33" name="TextBox 32"/>
+          <p:cNvSpPr txBox="1"/>
+          <p:nvPr/>
+        </p:nvSpPr>
+        <p:spPr>
+          <a:xfrm>
+            <a:off x="9473184" y="2743200"/>
+            <a:ext cx="2157984" cy="201168"/>
+          </a:xfrm>
+          <a:prstGeom prst="rect">
+            <a:avLst/>
+          </a:prstGeom>
+          <a:noFill/>
+        </p:spPr>
+        <p:txBody>
+          <a:bodyPr wrap="square" lIns="0" rIns="0" tIns="0" bIns="0">
+            <a:spAutoFit/>
+          </a:bodyPr>
+          <a:lstStyle/>
+          <a:p>
+            <a:pPr algn="r"/>
+            <a:r>
+              <a:rPr sz="900" b="1">
+                <a:solidFill>
+                  <a:srgbClr val="6B7280"/>
+                </a:solidFill>
+                <a:latin typeface="Segoe UI"/>
+              </a:rPr>
+              <a:t>VS STOCK</a:t>
+            </a:r>
+          </a:p>
+        </p:txBody>
+      </p:sp>
+      <p:sp>
+        <p:nvSpPr>
+          <p:cNvPr id="34" name="Rounded Rectangle 33"/>
+          <p:cNvSpPr/>
+          <p:nvPr/>
+        </p:nvSpPr>
+        <p:spPr>
+          <a:xfrm>
+            <a:off x="566928" y="2971800"/>
+            <a:ext cx="11064240" cy="694944"/>
+          </a:xfrm>
+          <a:prstGeom prst="roundRect">
+            <a:avLst>
+              <a:gd name="adj" fmla="val 3500"/>
+            </a:avLst>
+          </a:prstGeom>
+          <a:solidFill>
+            <a:srgbClr val="ECEFF2"/>
+          </a:solidFill>
+          <a:ln>
+            <a:noFill/>
+          </a:ln>
+          <a:effectLst/>
+        </p:spPr>
+        <p:style>
+          <a:lnRef idx="1">
+            <a:schemeClr val="accent1"/>
+          </a:lnRef>
+          <a:fillRef idx="3">
+            <a:schemeClr val="accent1"/>
+          </a:fillRef>
+          <a:effectRef idx="2">
+            <a:schemeClr val="accent1"/>
+          </a:effectRef>
+          <a:fontRef idx="minor">
+            <a:schemeClr val="lt1"/>
+          </a:fontRef>
+        </p:style>
+        <p:txBody>
+          <a:bodyPr rtlCol="0" anchor="ctr"/>
+          <a:lstStyle/>
+          <a:p>
+            <a:pPr algn="ctr"/>
+          </a:p>
+        </p:txBody>
+      </p:sp>
+      <p:sp>
+        <p:nvSpPr>
+          <p:cNvPr id="35" name="TextBox 34"/>
+          <p:cNvSpPr txBox="1"/>
+          <p:nvPr/>
+        </p:nvSpPr>
+        <p:spPr>
+          <a:xfrm>
+            <a:off x="786384" y="3072384"/>
+            <a:ext cx="1920240" cy="274320"/>
+          </a:xfrm>
+          <a:prstGeom prst="rect">
+            <a:avLst/>
+          </a:prstGeom>
+          <a:noFill/>
+        </p:spPr>
+        <p:txBody>
+          <a:bodyPr wrap="square" lIns="0" rIns="0" tIns="0" bIns="0">
+            <a:spAutoFit/>
+          </a:bodyPr>
+          <a:lstStyle/>
+          <a:p>
+            <a:pPr algn="l"/>
+            <a:r>
+              <a:rPr sz="1250" b="1">
+                <a:solidFill>
+                  <a:srgbClr val="1A1F2E"/>
+                </a:solidFill>
+                <a:latin typeface="Segoe UI"/>
+              </a:rPr>
+              <a:t>Stock Kilosort4</a:t>
+            </a:r>
+          </a:p>
+        </p:txBody>
+      </p:sp>
+      <p:sp>
+        <p:nvSpPr>
+          <p:cNvPr id="36" name="TextBox 35"/>
+          <p:cNvSpPr txBox="1"/>
+          <p:nvPr/>
+        </p:nvSpPr>
+        <p:spPr>
+          <a:xfrm>
+            <a:off x="2743200" y="3054096"/>
+            <a:ext cx="4297680" cy="603504"/>
+          </a:xfrm>
+          <a:prstGeom prst="rect">
+            <a:avLst/>
+          </a:prstGeom>
+          <a:noFill/>
+        </p:spPr>
+        <p:txBody>
+          <a:bodyPr wrap="square" lIns="0" rIns="0" tIns="0" bIns="0">
+            <a:spAutoFit/>
+          </a:bodyPr>
+          <a:lstStyle/>
+          <a:p>
+            <a:pPr algn="l"/>
+            <a:r>
+              <a:rPr sz="950" b="0">
+                <a:solidFill>
+                  <a:srgbClr val="6B7280"/>
+                </a:solidFill>
+                <a:latin typeface="Segoe UI"/>
+              </a:rPr>
+              <a:t>the baseline</a:t>
+            </a:r>
+          </a:p>
+        </p:txBody>
+      </p:sp>
+      <p:sp>
+        <p:nvSpPr>
+          <p:cNvPr id="37" name="TextBox 36"/>
+          <p:cNvSpPr txBox="1"/>
+          <p:nvPr/>
+        </p:nvSpPr>
+        <p:spPr>
+          <a:xfrm>
+            <a:off x="7187184" y="3072384"/>
+            <a:ext cx="1005840" cy="310896"/>
+          </a:xfrm>
+          <a:prstGeom prst="rect">
+            <a:avLst/>
+          </a:prstGeom>
+          <a:noFill/>
+        </p:spPr>
+        <p:txBody>
+          <a:bodyPr wrap="square" lIns="0" rIns="0" tIns="0" bIns="0">
+            <a:spAutoFit/>
+          </a:bodyPr>
+          <a:lstStyle/>
+          <a:p>
+            <a:pPr algn="r"/>
+            <a:r>
+              <a:rPr sz="1700" b="1">
+                <a:solidFill>
+                  <a:srgbClr val="1A1F2E"/>
+                </a:solidFill>
+                <a:latin typeface="Segoe UI"/>
+              </a:rPr>
+              <a:t>79.4</a:t>
+            </a:r>
+            <a:r>
+              <a:rPr sz="1050" b="1">
+                <a:solidFill>
+                  <a:srgbClr val="6B7280"/>
+                </a:solidFill>
+                <a:latin typeface="Segoe UI"/>
+              </a:rPr>
+              <a:t>%</a:t>
+            </a:r>
+          </a:p>
+        </p:txBody>
+      </p:sp>
+      <p:sp>
+        <p:nvSpPr>
+          <p:cNvPr id="38" name="TextBox 37"/>
+          <p:cNvSpPr txBox="1"/>
+          <p:nvPr/>
+        </p:nvSpPr>
+        <p:spPr>
+          <a:xfrm>
+            <a:off x="8284464" y="3072384"/>
+            <a:ext cx="1005840" cy="310896"/>
+          </a:xfrm>
+          <a:prstGeom prst="rect">
+            <a:avLst/>
+          </a:prstGeom>
+          <a:noFill/>
+        </p:spPr>
+        <p:txBody>
+          <a:bodyPr wrap="square" lIns="0" rIns="0" tIns="0" bIns="0">
+            <a:spAutoFit/>
+          </a:bodyPr>
+          <a:lstStyle/>
+          <a:p>
+            <a:pPr algn="r"/>
+            <a:r>
+              <a:rPr sz="1700" b="1">
+                <a:solidFill>
+                  <a:srgbClr val="1A1F2E"/>
+                </a:solidFill>
+                <a:latin typeface="Segoe UI"/>
+              </a:rPr>
+              <a:t>60.0</a:t>
+            </a:r>
+            <a:r>
+              <a:rPr sz="1050" b="1">
+                <a:solidFill>
+                  <a:srgbClr val="6B7280"/>
+                </a:solidFill>
+                <a:latin typeface="Segoe UI"/>
+              </a:rPr>
+              <a:t>%</a:t>
+            </a:r>
+          </a:p>
+        </p:txBody>
+      </p:sp>
+      <p:sp>
+        <p:nvSpPr>
+          <p:cNvPr id="39" name="TextBox 38"/>
+          <p:cNvSpPr txBox="1"/>
+          <p:nvPr/>
+        </p:nvSpPr>
+        <p:spPr>
+          <a:xfrm>
+            <a:off x="9473184" y="3108960"/>
+            <a:ext cx="2157984" cy="457200"/>
+          </a:xfrm>
+          <a:prstGeom prst="rect">
+            <a:avLst/>
+          </a:prstGeom>
+          <a:noFill/>
+        </p:spPr>
+        <p:txBody>
+          <a:bodyPr wrap="square" lIns="0" rIns="0" tIns="0" bIns="0">
+            <a:spAutoFit/>
+          </a:bodyPr>
+          <a:lstStyle/>
+          <a:p>
+            <a:pPr algn="r"/>
+            <a:r>
+              <a:rPr sz="950" b="1">
+                <a:solidFill>
+                  <a:srgbClr val="6B7280"/>
+                </a:solidFill>
+                <a:latin typeface="Segoe UI"/>
+              </a:rPr>
+              <a:t/>
+            </a:r>
+          </a:p>
+        </p:txBody>
+      </p:sp>
+      <p:sp>
+        <p:nvSpPr>
+          <p:cNvPr id="40" name="TextBox 39"/>
+          <p:cNvSpPr txBox="1"/>
+          <p:nvPr/>
+        </p:nvSpPr>
+        <p:spPr>
+          <a:xfrm>
+            <a:off x="786384" y="3767327"/>
+            <a:ext cx="1920240" cy="274320"/>
+          </a:xfrm>
+          <a:prstGeom prst="rect">
+            <a:avLst/>
+          </a:prstGeom>
+          <a:noFill/>
+        </p:spPr>
+        <p:txBody>
+          <a:bodyPr wrap="square" lIns="0" rIns="0" tIns="0" bIns="0">
+            <a:spAutoFit/>
+          </a:bodyPr>
+          <a:lstStyle/>
+          <a:p>
+            <a:pPr algn="l"/>
+            <a:r>
+              <a:rPr sz="1250" b="1">
+                <a:solidFill>
+                  <a:srgbClr val="1A1F2E"/>
+                </a:solidFill>
+                <a:latin typeface="Segoe UI"/>
+              </a:rPr>
+              <a:t>Coarse + fine timing</a:t>
+            </a:r>
+          </a:p>
+        </p:txBody>
+      </p:sp>
+      <p:sp>
+        <p:nvSpPr>
+          <p:cNvPr id="41" name="TextBox 40"/>
+          <p:cNvSpPr txBox="1"/>
+          <p:nvPr/>
+        </p:nvSpPr>
+        <p:spPr>
+          <a:xfrm>
+            <a:off x="2743200" y="3749039"/>
+            <a:ext cx="4297680" cy="603504"/>
+          </a:xfrm>
+          <a:prstGeom prst="rect">
+            <a:avLst/>
+          </a:prstGeom>
+          <a:noFill/>
+        </p:spPr>
+        <p:txBody>
+          <a:bodyPr wrap="square" lIns="0" rIns="0" tIns="0" bIns="0">
+            <a:spAutoFit/>
+          </a:bodyPr>
+          <a:lstStyle/>
+          <a:p>
+            <a:pPr algn="l"/>
+            <a:r>
+              <a:rPr sz="950" b="0">
+                <a:solidFill>
+                  <a:srgbClr val="6B7280"/>
+                </a:solidFill>
+                <a:latin typeface="Segoe UI"/>
+              </a:rPr>
+              <a:t>slide the snippet ±6 whole samples against the average spike shape, then correct the leftover sub-sample error from wavelet phase</a:t>
+            </a:r>
+          </a:p>
+        </p:txBody>
+      </p:sp>
+      <p:sp>
+        <p:nvSpPr>
+          <p:cNvPr id="42" name="TextBox 41"/>
+          <p:cNvSpPr txBox="1"/>
+          <p:nvPr/>
+        </p:nvSpPr>
+        <p:spPr>
+          <a:xfrm>
+            <a:off x="7187184" y="3767327"/>
+            <a:ext cx="1005840" cy="310896"/>
+          </a:xfrm>
+          <a:prstGeom prst="rect">
+            <a:avLst/>
+          </a:prstGeom>
+          <a:noFill/>
+        </p:spPr>
+        <p:txBody>
+          <a:bodyPr wrap="square" lIns="0" rIns="0" tIns="0" bIns="0">
+            <a:spAutoFit/>
+          </a:bodyPr>
+          <a:lstStyle/>
+          <a:p>
+            <a:pPr algn="r"/>
+            <a:r>
+              <a:rPr sz="1700" b="1">
+                <a:solidFill>
+                  <a:srgbClr val="1A1F2E"/>
+                </a:solidFill>
+                <a:latin typeface="Segoe UI"/>
+              </a:rPr>
+              <a:t>77.1</a:t>
+            </a:r>
+            <a:r>
+              <a:rPr sz="1050" b="1">
+                <a:solidFill>
+                  <a:srgbClr val="6B7280"/>
+                </a:solidFill>
+                <a:latin typeface="Segoe UI"/>
+              </a:rPr>
+              <a:t>%</a:t>
+            </a:r>
+          </a:p>
+        </p:txBody>
+      </p:sp>
+      <p:sp>
+        <p:nvSpPr>
+          <p:cNvPr id="43" name="TextBox 42"/>
+          <p:cNvSpPr txBox="1"/>
+          <p:nvPr/>
+        </p:nvSpPr>
+        <p:spPr>
+          <a:xfrm>
+            <a:off x="8284464" y="3767327"/>
+            <a:ext cx="1005840" cy="310896"/>
+          </a:xfrm>
+          <a:prstGeom prst="rect">
+            <a:avLst/>
+          </a:prstGeom>
+          <a:noFill/>
+        </p:spPr>
+        <p:txBody>
+          <a:bodyPr wrap="square" lIns="0" rIns="0" tIns="0" bIns="0">
+            <a:spAutoFit/>
+          </a:bodyPr>
+          <a:lstStyle/>
+          <a:p>
+            <a:pPr algn="r"/>
+            <a:r>
+              <a:rPr sz="1700" b="1">
+                <a:solidFill>
+                  <a:srgbClr val="1A1F2E"/>
+                </a:solidFill>
+                <a:latin typeface="Segoe UI"/>
+              </a:rPr>
+              <a:t>58.4</a:t>
+            </a:r>
+            <a:r>
+              <a:rPr sz="1050" b="1">
+                <a:solidFill>
+                  <a:srgbClr val="6B7280"/>
+                </a:solidFill>
+                <a:latin typeface="Segoe UI"/>
+              </a:rPr>
+              <a:t>%</a:t>
+            </a:r>
+          </a:p>
+        </p:txBody>
+      </p:sp>
+      <p:sp>
+        <p:nvSpPr>
+          <p:cNvPr id="44" name="TextBox 43"/>
+          <p:cNvSpPr txBox="1"/>
+          <p:nvPr/>
+        </p:nvSpPr>
+        <p:spPr>
+          <a:xfrm>
+            <a:off x="9473184" y="3803903"/>
+            <a:ext cx="2157984" cy="457200"/>
+          </a:xfrm>
+          <a:prstGeom prst="rect">
+            <a:avLst/>
+          </a:prstGeom>
+          <a:noFill/>
+        </p:spPr>
+        <p:txBody>
+          <a:bodyPr wrap="square" lIns="0" rIns="0" tIns="0" bIns="0">
+            <a:spAutoFit/>
+          </a:bodyPr>
+          <a:lstStyle/>
+          <a:p>
+            <a:pPr algn="r"/>
+            <a:r>
+              <a:rPr sz="950" b="1">
+                <a:solidFill>
+                  <a:srgbClr val="6B7280"/>
+                </a:solidFill>
+                <a:latin typeface="Segoe UI"/>
+              </a:rPr>
+              <a:t>no gain on either</a:t>
+            </a:r>
+          </a:p>
+        </p:txBody>
+      </p:sp>
+      <p:sp>
+        <p:nvSpPr>
+          <p:cNvPr id="45" name="Rectangle 44"/>
+          <p:cNvSpPr/>
+          <p:nvPr/>
+        </p:nvSpPr>
+        <p:spPr>
+          <a:xfrm>
+            <a:off x="786384" y="4361688"/>
+            <a:ext cx="10625328" cy="11887"/>
+          </a:xfrm>
+          <a:prstGeom prst="rect">
+            <a:avLst/>
+          </a:prstGeom>
+          <a:solidFill>
+            <a:srgbClr val="D7DBE0"/>
+          </a:solidFill>
+          <a:ln>
+            <a:noFill/>
+          </a:ln>
+          <a:effectLst/>
+        </p:spPr>
+        <p:style>
+          <a:lnRef idx="1">
+            <a:schemeClr val="accent1"/>
+          </a:lnRef>
+          <a:fillRef idx="3">
+            <a:schemeClr val="accent1"/>
+          </a:fillRef>
+          <a:effectRef idx="2">
+            <a:schemeClr val="accent1"/>
+          </a:effectRef>
+          <a:fontRef idx="minor">
+            <a:schemeClr val="lt1"/>
+          </a:fontRef>
+        </p:style>
+        <p:txBody>
+          <a:bodyPr rtlCol="0" anchor="ctr"/>
+          <a:lstStyle/>
+          <a:p>
+            <a:pPr algn="ctr"/>
+          </a:p>
+        </p:txBody>
+      </p:sp>
+      <p:sp>
+        <p:nvSpPr>
+          <p:cNvPr id="46" name="TextBox 45"/>
+          <p:cNvSpPr txBox="1"/>
+          <p:nvPr/>
+        </p:nvSpPr>
+        <p:spPr>
+          <a:xfrm>
+            <a:off x="786384" y="4462271"/>
+            <a:ext cx="1920240" cy="274320"/>
+          </a:xfrm>
+          <a:prstGeom prst="rect">
+            <a:avLst/>
+          </a:prstGeom>
+          <a:noFill/>
+        </p:spPr>
+        <p:txBody>
+          <a:bodyPr wrap="square" lIns="0" rIns="0" tIns="0" bIns="0">
+            <a:spAutoFit/>
+          </a:bodyPr>
+          <a:lstStyle/>
+          <a:p>
+            <a:pPr algn="l"/>
+            <a:r>
+              <a:rPr sz="1250" b="1">
+                <a:solidFill>
+                  <a:srgbClr val="1A1F2E"/>
+                </a:solidFill>
+                <a:latin typeface="Segoe UI"/>
+              </a:rPr>
+              <a:t>Footprint ×1</a:t>
+            </a:r>
+          </a:p>
+        </p:txBody>
+      </p:sp>
+      <p:sp>
+        <p:nvSpPr>
+          <p:cNvPr id="47" name="TextBox 46"/>
+          <p:cNvSpPr txBox="1"/>
+          <p:nvPr/>
+        </p:nvSpPr>
+        <p:spPr>
+          <a:xfrm>
+            <a:off x="2743200" y="4443983"/>
+            <a:ext cx="4297680" cy="603504"/>
+          </a:xfrm>
+          <a:prstGeom prst="rect">
+            <a:avLst/>
+          </a:prstGeom>
+          <a:noFill/>
+        </p:spPr>
+        <p:txBody>
+          <a:bodyPr wrap="square" lIns="0" rIns="0" tIns="0" bIns="0">
+            <a:spAutoFit/>
+          </a:bodyPr>
+          <a:lstStyle/>
+          <a:p>
+            <a:pPr algn="l"/>
+            <a:r>
+              <a:rPr sz="950" b="0">
+                <a:solidFill>
+                  <a:srgbClr val="6B7280"/>
+                </a:solidFill>
+                <a:latin typeface="Segoe UI"/>
+              </a:rPr>
+              <a:t>add the spike's spatial footprint — its pattern of amplitude across nearby channels — to what the clustering sees, weighted equal to the waveform</a:t>
+            </a:r>
+          </a:p>
+        </p:txBody>
+      </p:sp>
+      <p:sp>
+        <p:nvSpPr>
+          <p:cNvPr id="48" name="TextBox 47"/>
+          <p:cNvSpPr txBox="1"/>
+          <p:nvPr/>
+        </p:nvSpPr>
+        <p:spPr>
+          <a:xfrm>
+            <a:off x="7187184" y="4462271"/>
+            <a:ext cx="1005840" cy="310896"/>
+          </a:xfrm>
+          <a:prstGeom prst="rect">
+            <a:avLst/>
+          </a:prstGeom>
+          <a:noFill/>
+        </p:spPr>
+        <p:txBody>
+          <a:bodyPr wrap="square" lIns="0" rIns="0" tIns="0" bIns="0">
+            <a:spAutoFit/>
+          </a:bodyPr>
+          <a:lstStyle/>
+          <a:p>
+            <a:pPr algn="r"/>
+            <a:r>
+              <a:rPr sz="1700" b="1">
+                <a:solidFill>
+                  <a:srgbClr val="1A1F2E"/>
+                </a:solidFill>
+                <a:latin typeface="Segoe UI"/>
+              </a:rPr>
+              <a:t>77.1</a:t>
+            </a:r>
+            <a:r>
+              <a:rPr sz="1050" b="1">
+                <a:solidFill>
+                  <a:srgbClr val="6B7280"/>
+                </a:solidFill>
+                <a:latin typeface="Segoe UI"/>
+              </a:rPr>
+              <a:t>%</a:t>
+            </a:r>
+          </a:p>
+        </p:txBody>
+      </p:sp>
+      <p:sp>
+        <p:nvSpPr>
+          <p:cNvPr id="49" name="TextBox 48"/>
+          <p:cNvSpPr txBox="1"/>
+          <p:nvPr/>
+        </p:nvSpPr>
+        <p:spPr>
+          <a:xfrm>
+            <a:off x="8284464" y="4462271"/>
+            <a:ext cx="1005840" cy="310896"/>
+          </a:xfrm>
+          <a:prstGeom prst="rect">
+            <a:avLst/>
+          </a:prstGeom>
+          <a:noFill/>
+        </p:spPr>
+        <p:txBody>
+          <a:bodyPr wrap="square" lIns="0" rIns="0" tIns="0" bIns="0">
+            <a:spAutoFit/>
+          </a:bodyPr>
+          <a:lstStyle/>
+          <a:p>
+            <a:pPr algn="r"/>
+            <a:r>
+              <a:rPr sz="1700" b="1">
+                <a:solidFill>
+                  <a:srgbClr val="1A1F2E"/>
+                </a:solidFill>
+                <a:latin typeface="Segoe UI"/>
+              </a:rPr>
+              <a:t>65.4</a:t>
+            </a:r>
+            <a:r>
+              <a:rPr sz="1050" b="1">
+                <a:solidFill>
+                  <a:srgbClr val="6B7280"/>
+                </a:solidFill>
+                <a:latin typeface="Segoe UI"/>
+              </a:rPr>
+              <a:t>%</a:t>
+            </a:r>
+          </a:p>
+        </p:txBody>
+      </p:sp>
+      <p:sp>
+        <p:nvSpPr>
+          <p:cNvPr id="50" name="TextBox 49"/>
+          <p:cNvSpPr txBox="1"/>
+          <p:nvPr/>
+        </p:nvSpPr>
+        <p:spPr>
+          <a:xfrm>
+            <a:off x="9473184" y="4498847"/>
+            <a:ext cx="2157984" cy="457200"/>
+          </a:xfrm>
+          <a:prstGeom prst="rect">
+            <a:avLst/>
+          </a:prstGeom>
+          <a:noFill/>
+        </p:spPr>
+        <p:txBody>
+          <a:bodyPr wrap="square" lIns="0" rIns="0" tIns="0" bIns="0">
+            <a:spAutoFit/>
+          </a:bodyPr>
+          <a:lstStyle/>
+          <a:p>
+            <a:pPr algn="r"/>
+            <a:r>
+              <a:rPr sz="950" b="1">
+                <a:solidFill>
+                  <a:srgbClr val="1B6B3A"/>
+                </a:solidFill>
+                <a:latin typeface="Segoe UI"/>
+              </a:rPr>
+              <a:t>precision +5.4  (p = 0.010)</a:t>
+            </a:r>
+          </a:p>
+        </p:txBody>
+      </p:sp>
+      <p:sp>
+        <p:nvSpPr>
+          <p:cNvPr id="51" name="Rectangle 50"/>
+          <p:cNvSpPr/>
+          <p:nvPr/>
+        </p:nvSpPr>
+        <p:spPr>
+          <a:xfrm>
+            <a:off x="786384" y="5056631"/>
+            <a:ext cx="10625328" cy="11887"/>
+          </a:xfrm>
+          <a:prstGeom prst="rect">
+            <a:avLst/>
+          </a:prstGeom>
+          <a:solidFill>
+            <a:srgbClr val="D7DBE0"/>
+          </a:solidFill>
+          <a:ln>
+            <a:noFill/>
+          </a:ln>
+          <a:effectLst/>
+        </p:spPr>
+        <p:style>
+          <a:lnRef idx="1">
+            <a:schemeClr val="accent1"/>
+          </a:lnRef>
+          <a:fillRef idx="3">
+            <a:schemeClr val="accent1"/>
+          </a:fillRef>
+          <a:effectRef idx="2">
+            <a:schemeClr val="accent1"/>
+          </a:effectRef>
+          <a:fontRef idx="minor">
+            <a:schemeClr val="lt1"/>
+          </a:fontRef>
+        </p:style>
+        <p:txBody>
+          <a:bodyPr rtlCol="0" anchor="ctr"/>
+          <a:lstStyle/>
+          <a:p>
+            <a:pPr algn="ctr"/>
+          </a:p>
+        </p:txBody>
+      </p:sp>
+      <p:sp>
+        <p:nvSpPr>
+          <p:cNvPr id="52" name="TextBox 51"/>
+          <p:cNvSpPr txBox="1"/>
+          <p:nvPr/>
+        </p:nvSpPr>
+        <p:spPr>
+          <a:xfrm>
+            <a:off x="786384" y="5157215"/>
+            <a:ext cx="1920240" cy="274320"/>
+          </a:xfrm>
+          <a:prstGeom prst="rect">
+            <a:avLst/>
+          </a:prstGeom>
+          <a:noFill/>
+        </p:spPr>
+        <p:txBody>
+          <a:bodyPr wrap="square" lIns="0" rIns="0" tIns="0" bIns="0">
+            <a:spAutoFit/>
+          </a:bodyPr>
+          <a:lstStyle/>
+          <a:p>
+            <a:pPr algn="l"/>
+            <a:r>
+              <a:rPr sz="1250" b="1">
+                <a:solidFill>
+                  <a:srgbClr val="1A1F2E"/>
+                </a:solidFill>
+                <a:latin typeface="Segoe UI"/>
+              </a:rPr>
+              <a:t>Footprint ×3</a:t>
+            </a:r>
+          </a:p>
+        </p:txBody>
+      </p:sp>
+      <p:sp>
+        <p:nvSpPr>
+          <p:cNvPr id="53" name="TextBox 52"/>
+          <p:cNvSpPr txBox="1"/>
+          <p:nvPr/>
+        </p:nvSpPr>
+        <p:spPr>
+          <a:xfrm>
+            <a:off x="2743200" y="5138927"/>
+            <a:ext cx="4297680" cy="603504"/>
+          </a:xfrm>
+          <a:prstGeom prst="rect">
+            <a:avLst/>
+          </a:prstGeom>
+          <a:noFill/>
+        </p:spPr>
+        <p:txBody>
+          <a:bodyPr wrap="square" lIns="0" rIns="0" tIns="0" bIns="0">
+            <a:spAutoFit/>
+          </a:bodyPr>
+          <a:lstStyle/>
+          <a:p>
+            <a:pPr algn="l"/>
+            <a:r>
+              <a:rPr sz="950" b="0">
+                <a:solidFill>
+                  <a:srgbClr val="6B7280"/>
+                </a:solidFill>
+                <a:latin typeface="Segoe UI"/>
+              </a:rPr>
+              <a:t>the same feature weighted three times as strongly, so footprint dominates the waveform</a:t>
+            </a:r>
+          </a:p>
+        </p:txBody>
+      </p:sp>
+      <p:sp>
+        <p:nvSpPr>
+          <p:cNvPr id="54" name="TextBox 53"/>
+          <p:cNvSpPr txBox="1"/>
+          <p:nvPr/>
+        </p:nvSpPr>
+        <p:spPr>
+          <a:xfrm>
+            <a:off x="7187184" y="5157215"/>
+            <a:ext cx="1005840" cy="310896"/>
+          </a:xfrm>
+          <a:prstGeom prst="rect">
+            <a:avLst/>
+          </a:prstGeom>
+          <a:noFill/>
+        </p:spPr>
+        <p:txBody>
+          <a:bodyPr wrap="square" lIns="0" rIns="0" tIns="0" bIns="0">
+            <a:spAutoFit/>
+          </a:bodyPr>
+          <a:lstStyle/>
+          <a:p>
+            <a:pPr algn="r"/>
+            <a:r>
+              <a:rPr sz="1700" b="1">
+                <a:solidFill>
+                  <a:srgbClr val="1A1F2E"/>
+                </a:solidFill>
+                <a:latin typeface="Segoe UI"/>
+              </a:rPr>
+              <a:t>81.2</a:t>
+            </a:r>
+            <a:r>
+              <a:rPr sz="1050" b="1">
+                <a:solidFill>
+                  <a:srgbClr val="6B7280"/>
+                </a:solidFill>
+                <a:latin typeface="Segoe UI"/>
+              </a:rPr>
+              <a:t>%</a:t>
+            </a:r>
+          </a:p>
+        </p:txBody>
+      </p:sp>
+      <p:sp>
+        <p:nvSpPr>
+          <p:cNvPr id="55" name="TextBox 54"/>
+          <p:cNvSpPr txBox="1"/>
+          <p:nvPr/>
+        </p:nvSpPr>
+        <p:spPr>
+          <a:xfrm>
+            <a:off x="8284464" y="5157215"/>
+            <a:ext cx="1005840" cy="310896"/>
+          </a:xfrm>
+          <a:prstGeom prst="rect">
+            <a:avLst/>
+          </a:prstGeom>
+          <a:noFill/>
+        </p:spPr>
+        <p:txBody>
+          <a:bodyPr wrap="square" lIns="0" rIns="0" tIns="0" bIns="0">
+            <a:spAutoFit/>
+          </a:bodyPr>
+          <a:lstStyle/>
+          <a:p>
+            <a:pPr algn="r"/>
+            <a:r>
+              <a:rPr sz="1700" b="1">
+                <a:solidFill>
+                  <a:srgbClr val="1A1F2E"/>
+                </a:solidFill>
+                <a:latin typeface="Segoe UI"/>
+              </a:rPr>
+              <a:t>62.1</a:t>
+            </a:r>
+            <a:r>
+              <a:rPr sz="1050" b="1">
+                <a:solidFill>
+                  <a:srgbClr val="6B7280"/>
+                </a:solidFill>
+                <a:latin typeface="Segoe UI"/>
+              </a:rPr>
+              <a:t>%</a:t>
+            </a:r>
+          </a:p>
+        </p:txBody>
+      </p:sp>
+      <p:sp>
+        <p:nvSpPr>
+          <p:cNvPr id="56" name="TextBox 55"/>
+          <p:cNvSpPr txBox="1"/>
+          <p:nvPr/>
+        </p:nvSpPr>
+        <p:spPr>
+          <a:xfrm>
+            <a:off x="9473184" y="5193791"/>
+            <a:ext cx="2157984" cy="457200"/>
+          </a:xfrm>
+          <a:prstGeom prst="rect">
+            <a:avLst/>
+          </a:prstGeom>
+          <a:noFill/>
+        </p:spPr>
+        <p:txBody>
+          <a:bodyPr wrap="square" lIns="0" rIns="0" tIns="0" bIns="0">
+            <a:spAutoFit/>
+          </a:bodyPr>
+          <a:lstStyle/>
+          <a:p>
+            <a:pPr algn="r"/>
+            <a:r>
+              <a:rPr sz="950" b="1">
+                <a:solidFill>
+                  <a:srgbClr val="1B6B3A"/>
+                </a:solidFill>
+                <a:latin typeface="Segoe UI"/>
+              </a:rPr>
+              <a:t>recall +1.8, precision +2.2</a:t>
+            </a:r>
+          </a:p>
+          <a:p>
+            <a:pPr algn="r"/>
+            <a:r>
+              <a:rPr sz="950" b="1">
+                <a:solidFill>
+                  <a:srgbClr val="1B6B3A"/>
+                </a:solidFill>
+                <a:latin typeface="Segoe UI"/>
+              </a:rPr>
+              <a:t>pair recall 72→80 (p = 0.038)</a:t>
+            </a:r>
+          </a:p>
+        </p:txBody>
+      </p:sp>
+      <p:sp>
+        <p:nvSpPr>
+          <p:cNvPr id="57" name="Rectangle 56"/>
+          <p:cNvSpPr/>
+          <p:nvPr/>
+        </p:nvSpPr>
+        <p:spPr>
+          <a:xfrm>
+            <a:off x="786384" y="5751575"/>
+            <a:ext cx="10625328" cy="11887"/>
+          </a:xfrm>
+          <a:prstGeom prst="rect">
+            <a:avLst/>
+          </a:prstGeom>
+          <a:solidFill>
+            <a:srgbClr val="D7DBE0"/>
+          </a:solidFill>
+          <a:ln>
+            <a:noFill/>
+          </a:ln>
+          <a:effectLst/>
+        </p:spPr>
+        <p:style>
+          <a:lnRef idx="1">
+            <a:schemeClr val="accent1"/>
+          </a:lnRef>
+          <a:fillRef idx="3">
+            <a:schemeClr val="accent1"/>
+          </a:fillRef>
+          <a:effectRef idx="2">
+            <a:schemeClr val="accent1"/>
+          </a:effectRef>
+          <a:fontRef idx="minor">
+            <a:schemeClr val="lt1"/>
+          </a:fontRef>
+        </p:style>
+        <p:txBody>
+          <a:bodyPr rtlCol="0" anchor="ctr"/>
+          <a:lstStyle/>
+          <a:p>
+            <a:pPr algn="ctr"/>
+          </a:p>
+        </p:txBody>
+      </p:sp>
+      <p:sp>
+        <p:nvSpPr>
+          <p:cNvPr id="58" name="Rounded Rectangle 57"/>
+          <p:cNvSpPr/>
+          <p:nvPr/>
+        </p:nvSpPr>
+        <p:spPr>
+          <a:xfrm>
+            <a:off x="566928" y="5852159"/>
+            <a:ext cx="11064240" cy="475488"/>
+          </a:xfrm>
+          <a:prstGeom prst="roundRect">
+            <a:avLst>
+              <a:gd name="adj" fmla="val 3500"/>
+            </a:avLst>
+          </a:prstGeom>
+          <a:solidFill>
+            <a:srgbClr val="E8F1F1"/>
+          </a:solidFill>
+          <a:ln>
+            <a:noFill/>
+          </a:ln>
+          <a:effectLst/>
+        </p:spPr>
+        <p:style>
+          <a:lnRef idx="1">
+            <a:schemeClr val="accent1"/>
+          </a:lnRef>
+          <a:fillRef idx="3">
+            <a:schemeClr val="accent1"/>
+          </a:fillRef>
+          <a:effectRef idx="2">
+            <a:schemeClr val="accent1"/>
+          </a:effectRef>
+          <a:fontRef idx="minor">
+            <a:schemeClr val="lt1"/>
+          </a:fontRef>
+        </p:style>
+        <p:txBody>
+          <a:bodyPr rtlCol="0" anchor="ctr"/>
+          <a:lstStyle/>
+          <a:p>
+            <a:pPr algn="ctr"/>
+          </a:p>
+        </p:txBody>
+      </p:sp>
+      <p:sp>
+        <p:nvSpPr>
+          <p:cNvPr id="59" name="TextBox 58"/>
+          <p:cNvSpPr txBox="1"/>
+          <p:nvPr/>
+        </p:nvSpPr>
+        <p:spPr>
+          <a:xfrm>
+            <a:off x="804672" y="5961887"/>
+            <a:ext cx="10607040" cy="274320"/>
+          </a:xfrm>
+          <a:prstGeom prst="rect">
+            <a:avLst/>
+          </a:prstGeom>
+          <a:noFill/>
+        </p:spPr>
+        <p:txBody>
+          <a:bodyPr wrap="square" lIns="0" rIns="0" tIns="0" bIns="0">
+            <a:spAutoFit/>
+          </a:bodyPr>
+          <a:lstStyle/>
+          <a:p>
+            <a:pPr algn="l"/>
+            <a:r>
+              <a:rPr sz="1100" b="1">
+                <a:solidFill>
+                  <a:srgbClr val="0F6E6E"/>
+                </a:solidFill>
+                <a:latin typeface="Segoe UI"/>
+              </a:rPr>
+              <a:t>Why footprint appears twice:  </a:t>
+            </a:r>
+            <a:r>
+              <a:rPr sz="1100" b="0">
+                <a:solidFill>
+                  <a:srgbClr val="1A1F2E"/>
+                </a:solidFill>
+                <a:latin typeface="Segoe UI"/>
+              </a:rPr>
+              <a:t>it is one idea at two strengths, and the weight was the experiment. ×1 buys purity, ×3 buys completeness — neither wins both, so the choice depends on what the analysis needs.</a:t>
+            </a:r>
+          </a:p>
+        </p:txBody>
+      </p:sp>
+      <p:sp>
+        <p:nvSpPr>
+          <p:cNvPr id="60" name="TextBox 59"/>
+          <p:cNvSpPr txBox="1"/>
+          <p:nvPr/>
+        </p:nvSpPr>
+        <p:spPr>
+          <a:xfrm>
+            <a:off x="566928" y="6419087"/>
+            <a:ext cx="11064240" cy="457200"/>
+          </a:xfrm>
+          <a:prstGeom prst="rect">
+            <a:avLst/>
+          </a:prstGeom>
+          <a:noFill/>
+        </p:spPr>
+        <p:txBody>
+          <a:bodyPr wrap="square" lIns="0" rIns="0" tIns="0" bIns="0">
+            <a:spAutoFit/>
+          </a:bodyPr>
+          <a:lstStyle/>
+          <a:p>
+            <a:pPr algn="l"/>
+            <a:r>
+              <a:rPr sz="950" b="0">
+                <a:solidFill>
+                  <a:srgbClr val="6B7280"/>
+                </a:solidFill>
+                <a:latin typeface="Segoe UI"/>
+              </a:rPr>
+              <a:t>Pooled over all four tiers, as in the Shamir Sorting Audit. Noise floor: stock run twice differs by 0.9 recall / 1.6 precision, all of it on the hard tier.</a:t>
+            </a:r>
+          </a:p>
+          <a:p>
+            <a:pPr>
+              <a:spcBef>
+                <a:spcPts val="500"/>
+              </a:spcBef>
+            </a:pPr>
+            <a:r>
+              <a:rPr sz="950" b="1">
+                <a:solidFill>
+                  <a:srgbClr val="1A1F2E"/>
+                </a:solidFill>
+                <a:latin typeface="Segoe UI"/>
+              </a:rPr>
+              <a:t>Scores are for the one best-matching cluster per injected unit — 13 of the ~200 clusters a run produces.  </a:t>
+            </a:r>
+            <a:r>
+              <a:rPr sz="950" b="0">
+                <a:solidFill>
+                  <a:srgbClr val="6B7280"/>
+                </a:solidFill>
+                <a:latin typeface="Segoe UI"/>
+              </a:rPr>
+              <a:t>The rest are the recording's own neurons, which have no ground truth and are never scored.</a:t>
+            </a:r>
+          </a:p>
+        </p:txBody>
+      </p:sp>
+    </p:spTree>
+  </p:cSld>
+  <p:clrMapOvr>
+    <a:masterClrMapping/>
+  </p:clrMapOvr>
+</p:sld>
+</file>
+
+<file path=ppt/slides/slide3.xml><?xml version="1.0" encoding="utf-8"?>
+<p:sld xmlns:a="http://schemas.openxmlformats.org/drawingml/2006/main" xmlns:p="http://schemas.openxmlformats.org/presentationml/2006/main" xmlns:r="http://schemas.openxmlformats.org/officeDocument/2006/relationships">
+  <p:cSld>
+    <p:spTree>
+      <p:nvGrpSpPr>
+        <p:cNvPr id="1" name=""/>
+        <p:cNvGrpSpPr/>
+        <p:nvPr/>
+      </p:nvGrpSpPr>
+      <p:grpSpPr/>
+      <p:sp>
+        <p:nvSpPr>
+          <p:cNvPr id="2" name="TextBox 1"/>
+          <p:cNvSpPr txBox="1"/>
+          <p:nvPr/>
+        </p:nvSpPr>
+        <p:spPr>
+          <a:xfrm>
+            <a:off x="566928" y="365760"/>
+            <a:ext cx="11064240" cy="274320"/>
+          </a:xfrm>
+          <a:prstGeom prst="rect">
+            <a:avLst/>
+          </a:prstGeom>
+          <a:noFill/>
+        </p:spPr>
+        <p:txBody>
+          <a:bodyPr wrap="square" lIns="0" rIns="0" tIns="0" bIns="0">
+            <a:spAutoFit/>
+          </a:bodyPr>
+          <a:lstStyle/>
+          <a:p>
+            <a:pPr algn="l"/>
+            <a:r>
+              <a:rPr sz="1050" b="1" spc="120">
+                <a:solidFill>
+                  <a:srgbClr val="0F6E6E"/>
+                </a:solidFill>
+                <a:latin typeface="Segoe UI"/>
+              </a:rPr>
+              <a:t>THE OBVIOUS FIX</a:t>
+            </a:r>
+          </a:p>
+        </p:txBody>
+      </p:sp>
+      <p:sp>
+        <p:nvSpPr>
+          <p:cNvPr id="3" name="TextBox 2"/>
+          <p:cNvSpPr txBox="1"/>
+          <p:nvPr/>
+        </p:nvSpPr>
+        <p:spPr>
+          <a:xfrm>
+            <a:off x="566928" y="640080"/>
+            <a:ext cx="11064240" cy="457200"/>
+          </a:xfrm>
+          <a:prstGeom prst="rect">
+            <a:avLst/>
+          </a:prstGeom>
+          <a:noFill/>
+        </p:spPr>
+        <p:txBody>
+          <a:bodyPr wrap="square" lIns="0" rIns="0" tIns="0" bIns="0">
+            <a:spAutoFit/>
+          </a:bodyPr>
+          <a:lstStyle/>
+          <a:p>
+            <a:pPr algn="l"/>
+            <a:r>
+              <a:rPr sz="2600" b="1">
+                <a:solidFill>
+                  <a:srgbClr val="1A1F2E"/>
+                </a:solidFill>
+                <a:latin typeface="Segoe UI"/>
+              </a:rPr>
+              <a:t>Why merging the pieces back together does not help</a:t>
+            </a:r>
+          </a:p>
+        </p:txBody>
+      </p:sp>
+      <p:sp>
+        <p:nvSpPr>
+          <p:cNvPr id="4" name="Rectangle 3"/>
+          <p:cNvSpPr/>
+          <p:nvPr/>
+        </p:nvSpPr>
+        <p:spPr>
+          <a:xfrm>
+            <a:off x="566928" y="1170432"/>
+            <a:ext cx="11064240" cy="11887"/>
+          </a:xfrm>
+          <a:prstGeom prst="rect">
+            <a:avLst/>
+          </a:prstGeom>
+          <a:solidFill>
+            <a:srgbClr val="D7DBE0"/>
+          </a:solidFill>
+          <a:ln>
+            <a:noFill/>
+          </a:ln>
+          <a:effectLst/>
+        </p:spPr>
+        <p:style>
+          <a:lnRef idx="1">
+            <a:schemeClr val="accent1"/>
+          </a:lnRef>
+          <a:fillRef idx="3">
+            <a:schemeClr val="accent1"/>
+          </a:fillRef>
+          <a:effectRef idx="2">
+            <a:schemeClr val="accent1"/>
+          </a:effectRef>
+          <a:fontRef idx="minor">
+            <a:schemeClr val="lt1"/>
+          </a:fontRef>
+        </p:style>
+        <p:txBody>
+          <a:bodyPr rtlCol="0" anchor="ctr"/>
+          <a:lstStyle/>
+          <a:p>
+            <a:pPr algn="ctr"/>
+          </a:p>
+        </p:txBody>
+      </p:sp>
+      <p:sp>
+        <p:nvSpPr>
+          <p:cNvPr id="5" name="TextBox 4"/>
+          <p:cNvSpPr txBox="1"/>
+          <p:nvPr/>
+        </p:nvSpPr>
+        <p:spPr>
+          <a:xfrm>
+            <a:off x="566928" y="1371600"/>
+            <a:ext cx="11064240" cy="365760"/>
+          </a:xfrm>
+          <a:prstGeom prst="rect">
+            <a:avLst/>
+          </a:prstGeom>
+          <a:noFill/>
+        </p:spPr>
+        <p:txBody>
+          <a:bodyPr wrap="square" lIns="0" rIns="0" tIns="0" bIns="0">
+            <a:spAutoFit/>
+          </a:bodyPr>
+          <a:lstStyle/>
+          <a:p>
+            <a:pPr algn="l"/>
+            <a:r>
+              <a:rPr sz="1600" b="1">
+                <a:solidFill>
+                  <a:srgbClr val="1A1F2E"/>
+                </a:solidFill>
+                <a:latin typeface="Segoe UI"/>
+              </a:rPr>
+              <a:t>We merged while being told the right answer — the best any merge tool could ever do.</a:t>
+            </a:r>
+          </a:p>
+        </p:txBody>
+      </p:sp>
+      <p:sp>
+        <p:nvSpPr>
+          <p:cNvPr id="6" name="Rounded Rectangle 5"/>
+          <p:cNvSpPr/>
+          <p:nvPr/>
+        </p:nvSpPr>
+        <p:spPr>
+          <a:xfrm>
+            <a:off x="566928" y="1938528"/>
+            <a:ext cx="3611880" cy="1389888"/>
+          </a:xfrm>
+          <a:prstGeom prst="roundRect">
+            <a:avLst>
+              <a:gd name="adj" fmla="val 3500"/>
+            </a:avLst>
+          </a:prstGeom>
+          <a:solidFill>
+            <a:srgbClr val="F4F6F8"/>
+          </a:solidFill>
+          <a:ln>
+            <a:noFill/>
+          </a:ln>
+          <a:effectLst/>
+        </p:spPr>
+        <p:style>
+          <a:lnRef idx="1">
+            <a:schemeClr val="accent1"/>
+          </a:lnRef>
+          <a:fillRef idx="3">
+            <a:schemeClr val="accent1"/>
+          </a:fillRef>
+          <a:effectRef idx="2">
+            <a:schemeClr val="accent1"/>
+          </a:effectRef>
+          <a:fontRef idx="minor">
+            <a:schemeClr val="lt1"/>
+          </a:fontRef>
+        </p:style>
+        <p:txBody>
+          <a:bodyPr rtlCol="0" anchor="ctr"/>
+          <a:lstStyle/>
+          <a:p>
+            <a:pPr algn="ctr"/>
+          </a:p>
+        </p:txBody>
+      </p:sp>
+      <p:sp>
+        <p:nvSpPr>
+          <p:cNvPr id="7" name="TextBox 6"/>
+          <p:cNvSpPr txBox="1"/>
+          <p:nvPr/>
+        </p:nvSpPr>
+        <p:spPr>
+          <a:xfrm>
+            <a:off x="841247" y="2084831"/>
+            <a:ext cx="3108960" cy="457200"/>
+          </a:xfrm>
+          <a:prstGeom prst="rect">
+            <a:avLst/>
+          </a:prstGeom>
+          <a:noFill/>
+        </p:spPr>
+        <p:txBody>
+          <a:bodyPr wrap="square" lIns="0" rIns="0" tIns="0" bIns="0">
+            <a:spAutoFit/>
+          </a:bodyPr>
+          <a:lstStyle/>
+          <a:p>
+            <a:pPr algn="l"/>
+            <a:r>
+              <a:rPr sz="3400" b="1">
+                <a:solidFill>
+                  <a:srgbClr val="0F6E6E"/>
+                </a:solidFill>
+                <a:latin typeface="Segoe UI"/>
+              </a:rPr>
+              <a:t>0 of 16</a:t>
+            </a:r>
+          </a:p>
+        </p:txBody>
+      </p:sp>
+      <p:sp>
+        <p:nvSpPr>
+          <p:cNvPr id="8" name="TextBox 7"/>
+          <p:cNvSpPr txBox="1"/>
+          <p:nvPr/>
+        </p:nvSpPr>
+        <p:spPr>
+          <a:xfrm>
+            <a:off x="841247" y="2615184"/>
+            <a:ext cx="3108960" cy="274320"/>
+          </a:xfrm>
+          <a:prstGeom prst="rect">
+            <a:avLst/>
+          </a:prstGeom>
+          <a:noFill/>
+        </p:spPr>
+        <p:txBody>
+          <a:bodyPr wrap="square" lIns="0" rIns="0" tIns="0" bIns="0">
+            <a:spAutoFit/>
+          </a:bodyPr>
+          <a:lstStyle/>
+          <a:p>
+            <a:pPr algn="l"/>
+            <a:r>
+              <a:rPr sz="1150" b="1">
+                <a:solidFill>
+                  <a:srgbClr val="1A1F2E"/>
+                </a:solidFill>
+                <a:latin typeface="Segoe UI"/>
+              </a:rPr>
+              <a:t>algorithm × tier cells where merging won</a:t>
+            </a:r>
+          </a:p>
+        </p:txBody>
+      </p:sp>
+      <p:sp>
+        <p:nvSpPr>
+          <p:cNvPr id="9" name="TextBox 8"/>
+          <p:cNvSpPr txBox="1"/>
+          <p:nvPr/>
+        </p:nvSpPr>
+        <p:spPr>
+          <a:xfrm>
+            <a:off x="841247" y="2907792"/>
+            <a:ext cx="3108960" cy="274320"/>
+          </a:xfrm>
+          <a:prstGeom prst="rect">
+            <a:avLst/>
+          </a:prstGeom>
+          <a:noFill/>
+        </p:spPr>
+        <p:txBody>
+          <a:bodyPr wrap="square" lIns="0" rIns="0" tIns="0" bIns="0">
+            <a:spAutoFit/>
+          </a:bodyPr>
+          <a:lstStyle/>
+          <a:p>
+            <a:pPr algn="l"/>
+            <a:r>
+              <a:rPr sz="1000" b="0">
+                <a:solidFill>
+                  <a:srgbClr val="6B7280"/>
+                </a:solidFill>
+                <a:latin typeface="Segoe UI"/>
+              </a:rPr>
+              <a:t>it lost in every one</a:t>
+            </a:r>
+          </a:p>
+        </p:txBody>
+      </p:sp>
+      <p:sp>
+        <p:nvSpPr>
+          <p:cNvPr id="10" name="Rounded Rectangle 9"/>
+          <p:cNvSpPr/>
+          <p:nvPr/>
+        </p:nvSpPr>
+        <p:spPr>
+          <a:xfrm>
+            <a:off x="4398264" y="1938528"/>
+            <a:ext cx="3611880" cy="1389888"/>
+          </a:xfrm>
+          <a:prstGeom prst="roundRect">
+            <a:avLst>
+              <a:gd name="adj" fmla="val 3500"/>
+            </a:avLst>
+          </a:prstGeom>
+          <a:solidFill>
+            <a:srgbClr val="F4F6F8"/>
+          </a:solidFill>
+          <a:ln>
+            <a:noFill/>
+          </a:ln>
+          <a:effectLst/>
+        </p:spPr>
+        <p:style>
+          <a:lnRef idx="1">
+            <a:schemeClr val="accent1"/>
+          </a:lnRef>
+          <a:fillRef idx="3">
+            <a:schemeClr val="accent1"/>
+          </a:fillRef>
+          <a:effectRef idx="2">
+            <a:schemeClr val="accent1"/>
+          </a:effectRef>
+          <a:fontRef idx="minor">
+            <a:schemeClr val="lt1"/>
+          </a:fontRef>
+        </p:style>
+        <p:txBody>
+          <a:bodyPr rtlCol="0" anchor="ctr"/>
+          <a:lstStyle/>
+          <a:p>
+            <a:pPr algn="ctr"/>
+          </a:p>
+        </p:txBody>
+      </p:sp>
+      <p:sp>
+        <p:nvSpPr>
+          <p:cNvPr id="11" name="TextBox 10"/>
+          <p:cNvSpPr txBox="1"/>
+          <p:nvPr/>
+        </p:nvSpPr>
+        <p:spPr>
+          <a:xfrm>
+            <a:off x="4672584" y="2084831"/>
+            <a:ext cx="3108960" cy="457200"/>
+          </a:xfrm>
+          <a:prstGeom prst="rect">
+            <a:avLst/>
+          </a:prstGeom>
+          <a:noFill/>
+        </p:spPr>
+        <p:txBody>
+          <a:bodyPr wrap="square" lIns="0" rIns="0" tIns="0" bIns="0">
+            <a:spAutoFit/>
+          </a:bodyPr>
+          <a:lstStyle/>
+          <a:p>
+            <a:pPr algn="l"/>
+            <a:r>
+              <a:rPr sz="3400" b="1">
+                <a:solidFill>
+                  <a:srgbClr val="0F6E6E"/>
+                </a:solidFill>
+                <a:latin typeface="Segoe UI"/>
+              </a:rPr>
+              <a:t>+5 / −12</a:t>
+            </a:r>
+          </a:p>
+        </p:txBody>
+      </p:sp>
+      <p:sp>
+        <p:nvSpPr>
+          <p:cNvPr id="12" name="TextBox 11"/>
+          <p:cNvSpPr txBox="1"/>
+          <p:nvPr/>
+        </p:nvSpPr>
+        <p:spPr>
+          <a:xfrm>
+            <a:off x="4672584" y="2615184"/>
+            <a:ext cx="3108960" cy="274320"/>
+          </a:xfrm>
+          <a:prstGeom prst="rect">
+            <a:avLst/>
+          </a:prstGeom>
+          <a:noFill/>
+        </p:spPr>
+        <p:txBody>
+          <a:bodyPr wrap="square" lIns="0" rIns="0" tIns="0" bIns="0">
+            <a:spAutoFit/>
+          </a:bodyPr>
+          <a:lstStyle/>
+          <a:p>
+            <a:pPr algn="l"/>
+            <a:r>
+              <a:rPr sz="1150" b="1">
+                <a:solidFill>
+                  <a:srgbClr val="1A1F2E"/>
+                </a:solidFill>
+                <a:latin typeface="Segoe UI"/>
+              </a:rPr>
+              <a:t>typical recall gained / precision lost</a:t>
+            </a:r>
+          </a:p>
+        </p:txBody>
+      </p:sp>
+      <p:sp>
+        <p:nvSpPr>
+          <p:cNvPr id="13" name="TextBox 12"/>
+          <p:cNvSpPr txBox="1"/>
+          <p:nvPr/>
+        </p:nvSpPr>
+        <p:spPr>
+          <a:xfrm>
+            <a:off x="4672584" y="2907792"/>
+            <a:ext cx="3108960" cy="274320"/>
+          </a:xfrm>
+          <a:prstGeom prst="rect">
+            <a:avLst/>
+          </a:prstGeom>
+          <a:noFill/>
+        </p:spPr>
+        <p:txBody>
+          <a:bodyPr wrap="square" lIns="0" rIns="0" tIns="0" bIns="0">
+            <a:spAutoFit/>
+          </a:bodyPr>
+          <a:lstStyle/>
+          <a:p>
+            <a:pPr algn="l"/>
+            <a:r>
+              <a:rPr sz="1000" b="0">
+                <a:solidFill>
+                  <a:srgbClr val="6B7280"/>
+                </a:solidFill>
+                <a:latin typeface="Segoe UI"/>
+              </a:rPr>
+              <a:t>best case anywhere: +3.2 / −3.6</a:t>
+            </a:r>
+          </a:p>
+        </p:txBody>
+      </p:sp>
+      <p:sp>
+        <p:nvSpPr>
+          <p:cNvPr id="14" name="Rounded Rectangle 13"/>
+          <p:cNvSpPr/>
+          <p:nvPr/>
+        </p:nvSpPr>
+        <p:spPr>
+          <a:xfrm>
+            <a:off x="8229600" y="1938528"/>
+            <a:ext cx="3611880" cy="1389888"/>
+          </a:xfrm>
+          <a:prstGeom prst="roundRect">
+            <a:avLst>
+              <a:gd name="adj" fmla="val 3500"/>
+            </a:avLst>
+          </a:prstGeom>
+          <a:solidFill>
+            <a:srgbClr val="F4F6F8"/>
+          </a:solidFill>
+          <a:ln>
+            <a:noFill/>
+          </a:ln>
+          <a:effectLst/>
+        </p:spPr>
+        <p:style>
+          <a:lnRef idx="1">
+            <a:schemeClr val="accent1"/>
+          </a:lnRef>
+          <a:fillRef idx="3">
+            <a:schemeClr val="accent1"/>
+          </a:fillRef>
+          <a:effectRef idx="2">
+            <a:schemeClr val="accent1"/>
+          </a:effectRef>
+          <a:fontRef idx="minor">
+            <a:schemeClr val="lt1"/>
+          </a:fontRef>
+        </p:style>
+        <p:txBody>
+          <a:bodyPr rtlCol="0" anchor="ctr"/>
+          <a:lstStyle/>
+          <a:p>
+            <a:pPr algn="ctr"/>
+          </a:p>
+        </p:txBody>
+      </p:sp>
+      <p:sp>
+        <p:nvSpPr>
+          <p:cNvPr id="15" name="TextBox 14"/>
+          <p:cNvSpPr txBox="1"/>
+          <p:nvPr/>
+        </p:nvSpPr>
+        <p:spPr>
+          <a:xfrm>
+            <a:off x="8503920" y="2084831"/>
+            <a:ext cx="3108960" cy="457200"/>
+          </a:xfrm>
+          <a:prstGeom prst="rect">
+            <a:avLst/>
+          </a:prstGeom>
+          <a:noFill/>
+        </p:spPr>
+        <p:txBody>
+          <a:bodyPr wrap="square" lIns="0" rIns="0" tIns="0" bIns="0">
+            <a:spAutoFit/>
+          </a:bodyPr>
+          <a:lstStyle/>
+          <a:p>
+            <a:pPr algn="l"/>
+            <a:r>
+              <a:rPr sz="3400" b="1">
+                <a:solidFill>
+                  <a:srgbClr val="0F6E6E"/>
+                </a:solidFill>
+                <a:latin typeface="Segoe UI"/>
+              </a:rPr>
+              <a:t>80.6%</a:t>
+            </a:r>
+          </a:p>
+        </p:txBody>
+      </p:sp>
+      <p:sp>
+        <p:nvSpPr>
+          <p:cNvPr id="16" name="TextBox 15"/>
+          <p:cNvSpPr txBox="1"/>
+          <p:nvPr/>
+        </p:nvSpPr>
+        <p:spPr>
+          <a:xfrm>
+            <a:off x="8503920" y="2615184"/>
+            <a:ext cx="3108960" cy="274320"/>
+          </a:xfrm>
+          <a:prstGeom prst="rect">
+            <a:avLst/>
+          </a:prstGeom>
+          <a:noFill/>
+        </p:spPr>
+        <p:txBody>
+          <a:bodyPr wrap="square" lIns="0" rIns="0" tIns="0" bIns="0">
+            <a:spAutoFit/>
+          </a:bodyPr>
+          <a:lstStyle/>
+          <a:p>
+            <a:pPr algn="l"/>
+            <a:r>
+              <a:rPr sz="1150" b="1">
+                <a:solidFill>
+                  <a:srgbClr val="1A1F2E"/>
+                </a:solidFill>
+                <a:latin typeface="Segoe UI"/>
+              </a:rPr>
+              <a:t>of what comes in is another neuron</a:t>
+            </a:r>
+          </a:p>
+        </p:txBody>
+      </p:sp>
+      <p:sp>
+        <p:nvSpPr>
+          <p:cNvPr id="17" name="TextBox 16"/>
+          <p:cNvSpPr txBox="1"/>
+          <p:nvPr/>
+        </p:nvSpPr>
+        <p:spPr>
+          <a:xfrm>
+            <a:off x="8503920" y="2907792"/>
+            <a:ext cx="3108960" cy="274320"/>
+          </a:xfrm>
+          <a:prstGeom prst="rect">
+            <a:avLst/>
+          </a:prstGeom>
+          <a:noFill/>
+        </p:spPr>
+        <p:txBody>
+          <a:bodyPr wrap="square" lIns="0" rIns="0" tIns="0" bIns="0">
+            <a:spAutoFit/>
+          </a:bodyPr>
+          <a:lstStyle/>
+          <a:p>
+            <a:pPr algn="l"/>
+            <a:r>
+              <a:rPr sz="1000" b="0">
+                <a:solidFill>
+                  <a:srgbClr val="6B7280"/>
+                </a:solidFill>
+                <a:latin typeface="Segoe UI"/>
+              </a:rPr>
+              <a:t>a real spike, not noise — chance is 3.9%</a:t>
+            </a:r>
+          </a:p>
+        </p:txBody>
+      </p:sp>
+      <p:sp>
+        <p:nvSpPr>
+          <p:cNvPr id="18" name="TextBox 17"/>
+          <p:cNvSpPr txBox="1"/>
+          <p:nvPr/>
+        </p:nvSpPr>
+        <p:spPr>
+          <a:xfrm>
+            <a:off x="804672" y="3639312"/>
+            <a:ext cx="10607040" cy="310896"/>
+          </a:xfrm>
+          <a:prstGeom prst="rect">
+            <a:avLst/>
+          </a:prstGeom>
+          <a:noFill/>
+        </p:spPr>
+        <p:txBody>
+          <a:bodyPr wrap="square" lIns="0" rIns="0" tIns="0" bIns="0">
+            <a:spAutoFit/>
+          </a:bodyPr>
+          <a:lstStyle/>
+          <a:p>
+            <a:pPr algn="l"/>
+            <a:r>
+              <a:rPr sz="1400" b="1">
+                <a:solidFill>
+                  <a:srgbClr val="1A1F2E"/>
+                </a:solidFill>
+                <a:latin typeface="Segoe UI"/>
+              </a:rPr>
+              <a:t>There was little to merge in the first place. </a:t>
+            </a:r>
+            <a:r>
+              <a:rPr sz="1400" b="0">
+                <a:solidFill>
+                  <a:srgbClr val="6B7280"/>
+                </a:solidFill>
+                <a:latin typeface="Segoe UI"/>
+              </a:rPr>
+              <a:t>67–77% of units already sit in one cluster.</a:t>
+            </a:r>
+          </a:p>
+        </p:txBody>
+      </p:sp>
+      <p:sp>
+        <p:nvSpPr>
           <p:cNvPr id="19" name="TextBox 18"/>
           <p:cNvSpPr txBox="1"/>
           <p:nvPr/>
         </p:nvSpPr>
         <p:spPr>
           <a:xfrm>
-            <a:off x="804672" y="6108192"/>
-            <a:ext cx="10607040" cy="384048"/>
+            <a:off x="804672" y="4114800"/>
+            <a:ext cx="10607040" cy="310896"/>
           </a:xfrm>
           <a:prstGeom prst="rect">
             <a:avLst/>
@@ -5586,22 +7667,163 @@
           <a:p>
             <a:pPr algn="l"/>
             <a:r>
-              <a:rPr sz="1150" b="1">
+              <a:rPr sz="1400" b="1">
+                <a:solidFill>
+                  <a:srgbClr val="1A1F2E"/>
+                </a:solidFill>
+                <a:latin typeface="Segoe UI"/>
+              </a:rPr>
+              <a:t>Merging imports a neighbour's spike train, </a:t>
+            </a:r>
+            <a:r>
+              <a:rPr sz="1400" b="0">
+                <a:solidFill>
+                  <a:srgbClr val="6B7280"/>
+                </a:solidFill>
+                <a:latin typeface="Segoe UI"/>
+              </a:rPr>
+              <a:t>so the cluster stops being a single cell.</a:t>
+            </a:r>
+          </a:p>
+        </p:txBody>
+      </p:sp>
+      <p:sp>
+        <p:nvSpPr>
+          <p:cNvPr id="20" name="TextBox 19"/>
+          <p:cNvSpPr txBox="1"/>
+          <p:nvPr/>
+        </p:nvSpPr>
+        <p:spPr>
+          <a:xfrm>
+            <a:off x="804672" y="4590288"/>
+            <a:ext cx="10607040" cy="310896"/>
+          </a:xfrm>
+          <a:prstGeom prst="rect">
+            <a:avLst/>
+          </a:prstGeom>
+          <a:noFill/>
+        </p:spPr>
+        <p:txBody>
+          <a:bodyPr wrap="square" lIns="0" rIns="0" tIns="0" bIns="0">
+            <a:spAutoFit/>
+          </a:bodyPr>
+          <a:lstStyle/>
+          <a:p>
+            <a:pPr algn="l"/>
+            <a:r>
+              <a:rPr sz="1400" b="1">
+                <a:solidFill>
+                  <a:srgbClr val="1A1F2E"/>
+                </a:solidFill>
+                <a:latin typeface="Segoe UI"/>
+              </a:rPr>
+              <a:t>A perfect merge tool makes every variant identical, </a:t>
+            </a:r>
+            <a:r>
+              <a:rPr sz="1400" b="0">
+                <a:solidFill>
+                  <a:srgbClr val="6B7280"/>
+                </a:solidFill>
+                <a:latin typeface="Segoe UI"/>
+              </a:rPr>
+              <a:t>all converging to about 78% recall / 46% precision.</a:t>
+            </a:r>
+          </a:p>
+        </p:txBody>
+      </p:sp>
+      <p:sp>
+        <p:nvSpPr>
+          <p:cNvPr id="21" name="Rounded Rectangle 20"/>
+          <p:cNvSpPr/>
+          <p:nvPr/>
+        </p:nvSpPr>
+        <p:spPr>
+          <a:xfrm>
+            <a:off x="566928" y="5230367"/>
+            <a:ext cx="11064240" cy="932688"/>
+          </a:xfrm>
+          <a:prstGeom prst="roundRect">
+            <a:avLst>
+              <a:gd name="adj" fmla="val 3500"/>
+            </a:avLst>
+          </a:prstGeom>
+          <a:solidFill>
+            <a:srgbClr val="E8F1F1"/>
+          </a:solidFill>
+          <a:ln>
+            <a:noFill/>
+          </a:ln>
+          <a:effectLst/>
+        </p:spPr>
+        <p:style>
+          <a:lnRef idx="1">
+            <a:schemeClr val="accent1"/>
+          </a:lnRef>
+          <a:fillRef idx="3">
+            <a:schemeClr val="accent1"/>
+          </a:fillRef>
+          <a:effectRef idx="2">
+            <a:schemeClr val="accent1"/>
+          </a:effectRef>
+          <a:fontRef idx="minor">
+            <a:schemeClr val="lt1"/>
+          </a:fontRef>
+        </p:style>
+        <p:txBody>
+          <a:bodyPr rtlCol="0" anchor="ctr"/>
+          <a:lstStyle/>
+          <a:p>
+            <a:pPr algn="ctr"/>
+          </a:p>
+        </p:txBody>
+      </p:sp>
+      <p:sp>
+        <p:nvSpPr>
+          <p:cNvPr id="22" name="TextBox 21"/>
+          <p:cNvSpPr txBox="1"/>
+          <p:nvPr/>
+        </p:nvSpPr>
+        <p:spPr>
+          <a:xfrm>
+            <a:off x="868680" y="5394959"/>
+            <a:ext cx="10424160" cy="640080"/>
+          </a:xfrm>
+          <a:prstGeom prst="rect">
+            <a:avLst/>
+          </a:prstGeom>
+          <a:noFill/>
+        </p:spPr>
+        <p:txBody>
+          <a:bodyPr wrap="square" lIns="0" rIns="0" tIns="0" bIns="0">
+            <a:spAutoFit/>
+          </a:bodyPr>
+          <a:lstStyle/>
+          <a:p>
+            <a:pPr algn="l"/>
+            <a:r>
+              <a:rPr sz="1500" b="1">
                 <a:solidFill>
                   <a:srgbClr val="0F6E6E"/>
                 </a:solidFill>
                 <a:latin typeface="Segoe UI"/>
               </a:rPr>
-              <a:t>So the loss is not detection and not splitting.  </a:t>
-            </a:r>
-            <a:r>
-              <a:rPr sz="1150" b="0">
+              <a:t>So the failure is not detection and not splitting.</a:t>
+            </a:r>
+          </a:p>
+          <a:p>
+            <a:pPr>
+              <a:spcBef>
+                <a:spcPts val="600"/>
+              </a:spcBef>
+            </a:pPr>
+            <a:r>
+              <a:rPr sz="1300" b="0">
                 <a:solidFill>
                   <a:srgbClr val="1A1F2E"/>
                 </a:solidFill>
                 <a:latin typeface="Segoe UI"/>
               </a:rPr>
-              <a:t>94–96% of injected spikes do land in some cluster — the failure is which cluster each spike is assigned to. The live lead is the opposite operation: SPLITTING Kilosort's mixed clusters.</a:t>
+              <a:t>94–96% of injected spikes do land in some cluster. The problem is which cluster each spike goes to — so the lead is the opposite operation: splitting Kilosort's mixed clusters.</a:t>
             </a:r>
           </a:p>
         </p:txBody>

--- a/outputs/kilosort_variants_summary.pptx
+++ b/outputs/kilosort_variants_summary.pptx
@@ -3206,14 +3206,49 @@
       </p:sp>
       <p:sp>
         <p:nvSpPr>
-          <p:cNvPr id="5" name="Rounded Rectangle 4"/>
+          <p:cNvPr id="5" name="TextBox 4"/>
+          <p:cNvSpPr txBox="1"/>
+          <p:nvPr/>
+        </p:nvSpPr>
+        <p:spPr>
+          <a:xfrm>
+            <a:off x="566928" y="1389888"/>
+            <a:ext cx="11064240" cy="320040"/>
+          </a:xfrm>
+          <a:prstGeom prst="rect">
+            <a:avLst/>
+          </a:prstGeom>
+          <a:noFill/>
+        </p:spPr>
+        <p:txBody>
+          <a:bodyPr wrap="square" lIns="0" rIns="0" tIns="0" bIns="0">
+            <a:spAutoFit/>
+          </a:bodyPr>
+          <a:lstStyle/>
+          <a:p>
+            <a:pPr algn="l"/>
+            <a:r>
+              <a:rPr sz="1700" b="1">
+                <a:solidFill>
+                  <a:srgbClr val="1A1F2E"/>
+                </a:solidFill>
+                <a:latin typeface="Segoe UI"/>
+              </a:rPr>
+              <a:t>Real voltage, real neurons — plus donor neurons whose every spike time we chose.</a:t>
+            </a:r>
+          </a:p>
+        </p:txBody>
+      </p:sp>
+      <p:sp>
+        <p:nvSpPr>
+          <p:cNvPr id="6" name="Rounded Rectangle 5"/>
           <p:cNvSpPr/>
           <p:nvPr/>
         </p:nvSpPr>
         <p:spPr>
           <a:xfrm>
-            <a:off x="566928" y="1335024"/>
-            <a:ext cx="11064240" cy="475488"/>
+            <a:off x="566928" y="1828800"/>
+            <a:ext cx="3520440" cy="1225296"/>
           </a:xfrm>
           <a:prstGeom prst="roundRect">
             <a:avLst>
@@ -3221,7 +3256,7 @@
             </a:avLst>
           </a:prstGeom>
           <a:solidFill>
-            <a:srgbClr val="E8F1F1"/>
+            <a:srgbClr val="F4F6F8"/>
           </a:solidFill>
           <a:ln>
             <a:noFill/>
@@ -3252,14 +3287,14 @@
       </p:sp>
       <p:sp>
         <p:nvSpPr>
-          <p:cNvPr id="6" name="TextBox 5"/>
-          <p:cNvSpPr txBox="1"/>
-          <p:nvPr/>
-        </p:nvSpPr>
-        <p:spPr>
-          <a:xfrm>
-            <a:off x="804672" y="1463040"/>
-            <a:ext cx="10607040" cy="274320"/>
+          <p:cNvPr id="7" name="TextBox 6"/>
+          <p:cNvSpPr txBox="1"/>
+          <p:nvPr/>
+        </p:nvSpPr>
+        <p:spPr>
+          <a:xfrm>
+            <a:off x="822960" y="1975104"/>
+            <a:ext cx="3008376" cy="237744"/>
           </a:xfrm>
           <a:prstGeom prst="rect">
             <a:avLst/>
@@ -3276,393 +3311,68 @@
             <a:r>
               <a:rPr sz="1250" b="1">
                 <a:solidFill>
+                  <a:srgbClr val="0F6E6E"/>
+                </a:solidFill>
+                <a:latin typeface="Segoe UI"/>
+              </a:rPr>
+              <a:t>The donors</a:t>
+            </a:r>
+          </a:p>
+        </p:txBody>
+      </p:sp>
+      <p:sp>
+        <p:nvSpPr>
+          <p:cNvPr id="8" name="TextBox 7"/>
+          <p:cNvSpPr txBox="1"/>
+          <p:nvPr/>
+        </p:nvSpPr>
+        <p:spPr>
+          <a:xfrm>
+            <a:off x="822960" y="2267712"/>
+            <a:ext cx="3008376" cy="713232"/>
+          </a:xfrm>
+          <a:prstGeom prst="rect">
+            <a:avLst/>
+          </a:prstGeom>
+          <a:noFill/>
+        </p:spPr>
+        <p:txBody>
+          <a:bodyPr wrap="square" lIns="0" rIns="0" tIns="0" bIns="0">
+            <a:spAutoFit/>
+          </a:bodyPr>
+          <a:lstStyle/>
+          <a:p>
+            <a:pPr algn="l"/>
+            <a:r>
+              <a:rPr sz="1100" b="0">
+                <a:solidFill>
                   <a:srgbClr val="1A1F2E"/>
                 </a:solidFill>
                 <a:latin typeface="Segoe UI"/>
               </a:rPr>
-              <a:t>On a real recording nobody knows which neuron a spike came from.  </a:t>
-            </a:r>
-            <a:r>
-              <a:rPr sz="1250" b="0">
-                <a:solidFill>
-                  <a:srgbClr val="1A1F2E"/>
-                </a:solidFill>
-                <a:latin typeface="Segoe UI"/>
-              </a:rPr>
-              <a:t>So we built recordings where we do: real voltage with its real neurons still in it, plus a few donor neurons whose every spike time we chose ourselves.</a:t>
-            </a:r>
-          </a:p>
-        </p:txBody>
-      </p:sp>
-      <p:sp>
-        <p:nvSpPr>
-          <p:cNvPr id="7" name="TextBox 6"/>
-          <p:cNvSpPr txBox="1"/>
-          <p:nvPr/>
-        </p:nvSpPr>
-        <p:spPr>
-          <a:xfrm>
-            <a:off x="566928" y="2011680"/>
-            <a:ext cx="5257800" cy="237744"/>
-          </a:xfrm>
-          <a:prstGeom prst="rect">
-            <a:avLst/>
-          </a:prstGeom>
-          <a:noFill/>
-        </p:spPr>
-        <p:txBody>
-          <a:bodyPr wrap="square" lIns="0" rIns="0" tIns="0" bIns="0">
-            <a:spAutoFit/>
-          </a:bodyPr>
-          <a:lstStyle/>
-          <a:p>
-            <a:pPr algn="l"/>
-            <a:r>
-              <a:rPr sz="1200" b="1">
-                <a:solidFill>
-                  <a:srgbClr val="0F6E6E"/>
-                </a:solidFill>
-                <a:latin typeface="Segoe UI"/>
-              </a:rPr>
-              <a:t>1 · Choosing the donor neurons</a:t>
-            </a:r>
-          </a:p>
-        </p:txBody>
-      </p:sp>
-      <p:sp>
-        <p:nvSpPr>
-          <p:cNvPr id="8" name="TextBox 7"/>
-          <p:cNvSpPr txBox="1"/>
-          <p:nvPr/>
-        </p:nvSpPr>
-        <p:spPr>
-          <a:xfrm>
-            <a:off x="566928" y="2322576"/>
-            <a:ext cx="5257800" cy="914400"/>
-          </a:xfrm>
-          <a:prstGeom prst="rect">
-            <a:avLst/>
-          </a:prstGeom>
-          <a:noFill/>
-        </p:spPr>
-        <p:txBody>
-          <a:bodyPr wrap="square" lIns="0" rIns="0" tIns="0" bIns="0">
-            <a:spAutoFit/>
-          </a:bodyPr>
-          <a:lstStyle/>
-          <a:p>
-            <a:pPr algn="l"/>
-            <a:r>
-              <a:rPr sz="1050" b="1">
-                <a:solidFill>
-                  <a:srgbClr val="1A1F2E"/>
-                </a:solidFill>
-                <a:latin typeface="Segoe UI"/>
-              </a:rPr>
-              <a:t>Hand-reviewed.  </a:t>
-            </a:r>
-            <a:r>
-              <a:rPr sz="1050" b="0">
-                <a:solidFill>
-                  <a:srgbClr val="6B7280"/>
-                </a:solidFill>
-                <a:latin typeface="Segoe UI"/>
-              </a:rPr>
-              <a:t>Gil reviewed every candidate in the review tool; the 33 labelled good became the donor pool.</a:t>
-            </a:r>
-          </a:p>
-          <a:p>
-            <a:pPr>
-              <a:spcBef>
-                <a:spcPts val="600"/>
-              </a:spcBef>
-            </a:pPr>
-            <a:r>
-              <a:rPr sz="1050" b="1">
-                <a:solidFill>
-                  <a:srgbClr val="1A1F2E"/>
-                </a:solidFill>
-                <a:latin typeface="Segoe UI"/>
-              </a:rPr>
-              <a:t>Then filtered.  </a:t>
-            </a:r>
-            <a:r>
-              <a:rPr sz="1050" b="0">
-                <a:solidFill>
-                  <a:srgbClr val="6B7280"/>
-                </a:solidFill>
-                <a:latin typeface="Segoe UI"/>
-              </a:rPr>
-              <a:t>low contamination (clean refractory period), and a compact spatial footprint.</a:t>
-            </a:r>
-          </a:p>
-          <a:p>
-            <a:pPr>
-              <a:spcBef>
-                <a:spcPts val="600"/>
-              </a:spcBef>
-            </a:pPr>
-            <a:r>
-              <a:rPr sz="1050" b="1">
-                <a:solidFill>
-                  <a:srgbClr val="1A1F2E"/>
-                </a:solidFill>
-                <a:latin typeface="Segoe UI"/>
-              </a:rPr>
-              <a:t>Pairs checked separately.  </a:t>
-            </a:r>
-            <a:r>
-              <a:rPr sz="1050" b="0">
-                <a:solidFill>
-                  <a:srgbClr val="6B7280"/>
-                </a:solidFill>
-                <a:latin typeface="Segoe UI"/>
-              </a:rPr>
-              <a:t>a cross-correlogram refractory test confirms the two donors are really different cells, not one cell Kilosort had split.</a:t>
-            </a:r>
-          </a:p>
-          <a:p>
-            <a:pPr>
-              <a:spcBef>
-                <a:spcPts val="600"/>
-              </a:spcBef>
-            </a:pPr>
-            <a:r>
-              <a:rPr sz="1050" b="1">
-                <a:solidFill>
-                  <a:srgbClr val="1A1F2E"/>
-                </a:solidFill>
-                <a:latin typeface="Segoe UI"/>
-              </a:rPr>
-              <a:t>Real snippets, not templates.  </a:t>
-            </a:r>
-            <a:r>
-              <a:rPr sz="1050" b="0">
-                <a:solidFill>
-                  <a:srgbClr val="6B7280"/>
-                </a:solidFill>
-                <a:latin typeface="Segoe UI"/>
-              </a:rPr>
-              <a:t>we inject the neuron's own recorded spikes. A copied template is identical every time, which flatters any sorter — real spikes vary in shape and amplitude, and that variation is what makes sorting hard.</a:t>
-            </a:r>
-          </a:p>
-        </p:txBody>
-      </p:sp>
-      <p:sp>
-        <p:nvSpPr>
-          <p:cNvPr id="9" name="TextBox 8"/>
-          <p:cNvSpPr txBox="1"/>
-          <p:nvPr/>
-        </p:nvSpPr>
-        <p:spPr>
-          <a:xfrm>
-            <a:off x="6382512" y="2011680"/>
-            <a:ext cx="5248656" cy="237744"/>
-          </a:xfrm>
-          <a:prstGeom prst="rect">
-            <a:avLst/>
-          </a:prstGeom>
-          <a:noFill/>
-        </p:spPr>
-        <p:txBody>
-          <a:bodyPr wrap="square" lIns="0" rIns="0" tIns="0" bIns="0">
-            <a:spAutoFit/>
-          </a:bodyPr>
-          <a:lstStyle/>
-          <a:p>
-            <a:pPr algn="l"/>
-            <a:r>
-              <a:rPr sz="1200" b="1">
-                <a:solidFill>
-                  <a:srgbClr val="0F6E6E"/>
-                </a:solidFill>
-                <a:latin typeface="Segoe UI"/>
-              </a:rPr>
-              <a:t>2 · Choosing where to put them</a:t>
-            </a:r>
-          </a:p>
-        </p:txBody>
-      </p:sp>
-      <p:sp>
-        <p:nvSpPr>
-          <p:cNvPr id="10" name="TextBox 9"/>
-          <p:cNvSpPr txBox="1"/>
-          <p:nvPr/>
-        </p:nvSpPr>
-        <p:spPr>
-          <a:xfrm>
-            <a:off x="6382512" y="2322576"/>
-            <a:ext cx="5248656" cy="914400"/>
-          </a:xfrm>
-          <a:prstGeom prst="rect">
-            <a:avLst/>
-          </a:prstGeom>
-          <a:noFill/>
-        </p:spPr>
-        <p:txBody>
-          <a:bodyPr wrap="square" lIns="0" rIns="0" tIns="0" bIns="0">
-            <a:spAutoFit/>
-          </a:bodyPr>
-          <a:lstStyle/>
-          <a:p>
-            <a:pPr algn="l"/>
-            <a:r>
-              <a:rPr sz="1050" b="1">
-                <a:solidFill>
-                  <a:srgbClr val="1A1F2E"/>
-                </a:solidFill>
-                <a:latin typeface="Segoe UI"/>
-              </a:rPr>
-              <a:t>Sites ranked by their loudest resident.  </a:t>
-            </a:r>
-            <a:r>
-              <a:rPr sz="1050" b="0">
-                <a:solidFill>
-                  <a:srgbClr val="6B7280"/>
-                </a:solidFill>
-                <a:latin typeface="Segoe UI"/>
-              </a:rPr>
-              <a:t>every probe site scored by the amplitude of the biggest neuron already living there — 23 to 467 µV across this probe, a 20× contrast to build difficulty from.</a:t>
-            </a:r>
-          </a:p>
-          <a:p>
-            <a:pPr>
-              <a:spcBef>
-                <a:spcPts val="600"/>
-              </a:spcBef>
-            </a:pPr>
-            <a:r>
-              <a:rPr sz="1050" b="1">
-                <a:solidFill>
-                  <a:srgbClr val="1A1F2E"/>
-                </a:solidFill>
-                <a:latin typeface="Segoe UI"/>
-              </a:rPr>
-              <a:t>Spikes dodge the residents.  </a:t>
-            </a:r>
-            <a:r>
-              <a:rPr sz="1050" b="0">
-                <a:solidFill>
-                  <a:srgbClr val="6B7280"/>
-                </a:solidFill>
-                <a:latin typeface="Segoe UI"/>
-              </a:rPr>
-              <a:t>injection times keep a 75-sample guard from a resident neuron's own spikes — except on the collision tier, where the overlap is the point.</a:t>
-            </a:r>
-          </a:p>
-          <a:p>
-            <a:pPr>
-              <a:spcBef>
-                <a:spcPts val="600"/>
-              </a:spcBef>
-            </a:pPr>
-            <a:r>
-              <a:rPr sz="1050" b="1">
-                <a:solidFill>
-                  <a:srgbClr val="1A1F2E"/>
-                </a:solidFill>
-                <a:latin typeface="Segoe UI"/>
-              </a:rPr>
-              <a:t>Each unit rotates through tiers.  </a:t>
-            </a:r>
-            <a:r>
-              <a:rPr sz="1050" b="0">
-                <a:solidFill>
-                  <a:srgbClr val="6B7280"/>
-                </a:solidFill>
-                <a:latin typeface="Segoe UI"/>
-              </a:rPr>
-              <a:t>a donor appears at a different difficulty in each recording, so a tier difference is measured within a neuron rather than between neurons.</a:t>
-            </a:r>
-          </a:p>
-        </p:txBody>
-      </p:sp>
-      <p:sp>
-        <p:nvSpPr>
-          <p:cNvPr id="11" name="TextBox 10"/>
-          <p:cNvSpPr txBox="1"/>
-          <p:nvPr/>
-        </p:nvSpPr>
-        <p:spPr>
-          <a:xfrm>
-            <a:off x="566928" y="4005072"/>
-            <a:ext cx="6400800" cy="237744"/>
-          </a:xfrm>
-          <a:prstGeom prst="rect">
-            <a:avLst/>
-          </a:prstGeom>
-          <a:noFill/>
-        </p:spPr>
-        <p:txBody>
-          <a:bodyPr wrap="square" lIns="0" rIns="0" tIns="0" bIns="0">
-            <a:spAutoFit/>
-          </a:bodyPr>
-          <a:lstStyle/>
-          <a:p>
-            <a:pPr algn="l"/>
-            <a:r>
-              <a:rPr sz="1200" b="1">
-                <a:solidFill>
-                  <a:srgbClr val="0F6E6E"/>
-                </a:solidFill>
-                <a:latin typeface="Segoe UI"/>
-              </a:rPr>
-              <a:t>3 · The four conditions</a:t>
-            </a:r>
-          </a:p>
-        </p:txBody>
-      </p:sp>
-      <p:sp>
-        <p:nvSpPr>
-          <p:cNvPr id="12" name="TextBox 11"/>
-          <p:cNvSpPr txBox="1"/>
-          <p:nvPr/>
-        </p:nvSpPr>
-        <p:spPr>
-          <a:xfrm>
-            <a:off x="3931920" y="4023359"/>
-            <a:ext cx="7699248" cy="219456"/>
-          </a:xfrm>
-          <a:prstGeom prst="rect">
-            <a:avLst/>
-          </a:prstGeom>
-          <a:noFill/>
-        </p:spPr>
-        <p:txBody>
-          <a:bodyPr wrap="square" lIns="0" rIns="0" tIns="0" bIns="0">
-            <a:spAutoFit/>
-          </a:bodyPr>
-          <a:lstStyle/>
-          <a:p>
-            <a:pPr algn="r"/>
-            <a:r>
-              <a:rPr sz="1000" b="0">
-                <a:solidFill>
-                  <a:srgbClr val="6B7280"/>
-                </a:solidFill>
-                <a:latin typeface="Segoe UI"/>
-              </a:rPr>
-              <a:t>13 placements per recording · 4 recordings from different windows of the session · ~290 spikes each</a:t>
-            </a:r>
-          </a:p>
-        </p:txBody>
-      </p:sp>
-      <p:sp>
-        <p:nvSpPr>
-          <p:cNvPr id="13" name="Rectangle 12"/>
+              <a:t>33 units Gil labelled good, filtered for clean refractory and compact footprint. We inject their own recorded spikes — not copied templates, which flatter any sorter.</a:t>
+            </a:r>
+          </a:p>
+        </p:txBody>
+      </p:sp>
+      <p:sp>
+        <p:nvSpPr>
+          <p:cNvPr id="9" name="Rounded Rectangle 8"/>
           <p:cNvSpPr/>
           <p:nvPr/>
         </p:nvSpPr>
         <p:spPr>
           <a:xfrm>
-            <a:off x="566928" y="4279392"/>
-            <a:ext cx="11064240" cy="14630"/>
-          </a:xfrm>
-          <a:prstGeom prst="rect">
-            <a:avLst/>
+            <a:off x="4334256" y="1828800"/>
+            <a:ext cx="3520440" cy="1225296"/>
+          </a:xfrm>
+          <a:prstGeom prst="roundRect">
+            <a:avLst>
+              <a:gd name="adj" fmla="val 3500"/>
+            </a:avLst>
           </a:prstGeom>
           <a:solidFill>
-            <a:srgbClr val="1A1F2E"/>
+            <a:srgbClr val="F4F6F8"/>
           </a:solidFill>
           <a:ln>
             <a:noFill/>
@@ -3693,14 +3403,14 @@
       </p:sp>
       <p:sp>
         <p:nvSpPr>
-          <p:cNvPr id="14" name="TextBox 13"/>
-          <p:cNvSpPr txBox="1"/>
-          <p:nvPr/>
-        </p:nvSpPr>
-        <p:spPr>
-          <a:xfrm>
-            <a:off x="786384" y="4352544"/>
-            <a:ext cx="1188720" cy="201168"/>
+          <p:cNvPr id="10" name="TextBox 9"/>
+          <p:cNvSpPr txBox="1"/>
+          <p:nvPr/>
+        </p:nvSpPr>
+        <p:spPr>
+          <a:xfrm>
+            <a:off x="4590288" y="1975104"/>
+            <a:ext cx="3008376" cy="237744"/>
           </a:xfrm>
           <a:prstGeom prst="rect">
             <a:avLst/>
@@ -3715,27 +3425,27 @@
           <a:p>
             <a:pPr algn="l"/>
             <a:r>
-              <a:rPr sz="900" b="1">
-                <a:solidFill>
-                  <a:srgbClr val="6B7280"/>
-                </a:solidFill>
-                <a:latin typeface="Segoe UI"/>
-              </a:rPr>
-              <a:t>TIER</a:t>
-            </a:r>
-          </a:p>
-        </p:txBody>
-      </p:sp>
-      <p:sp>
-        <p:nvSpPr>
-          <p:cNvPr id="15" name="TextBox 14"/>
-          <p:cNvSpPr txBox="1"/>
-          <p:nvPr/>
-        </p:nvSpPr>
-        <p:spPr>
-          <a:xfrm>
-            <a:off x="1975104" y="4352544"/>
-            <a:ext cx="822960" cy="201168"/>
+              <a:rPr sz="1250" b="1">
+                <a:solidFill>
+                  <a:srgbClr val="0F6E6E"/>
+                </a:solidFill>
+                <a:latin typeface="Segoe UI"/>
+              </a:rPr>
+              <a:t>Where they go</a:t>
+            </a:r>
+          </a:p>
+        </p:txBody>
+      </p:sp>
+      <p:sp>
+        <p:nvSpPr>
+          <p:cNvPr id="11" name="TextBox 10"/>
+          <p:cNvSpPr txBox="1"/>
+          <p:nvPr/>
+        </p:nvSpPr>
+        <p:spPr>
+          <a:xfrm>
+            <a:off x="4590288" y="2267712"/>
+            <a:ext cx="3008376" cy="713232"/>
           </a:xfrm>
           <a:prstGeom prst="rect">
             <a:avLst/>
@@ -3750,243 +3460,35 @@
           <a:p>
             <a:pPr algn="l"/>
             <a:r>
-              <a:rPr sz="900" b="1">
-                <a:solidFill>
-                  <a:srgbClr val="6B7280"/>
-                </a:solidFill>
-                <a:latin typeface="Segoe UI"/>
-              </a:rPr>
-              <a:t>PER REC.</a:t>
-            </a:r>
-          </a:p>
-        </p:txBody>
-      </p:sp>
-      <p:sp>
-        <p:nvSpPr>
-          <p:cNvPr id="16" name="TextBox 15"/>
-          <p:cNvSpPr txBox="1"/>
-          <p:nvPr/>
-        </p:nvSpPr>
-        <p:spPr>
-          <a:xfrm>
-            <a:off x="2926080" y="4352544"/>
-            <a:ext cx="2651760" cy="201168"/>
-          </a:xfrm>
-          <a:prstGeom prst="rect">
-            <a:avLst/>
-          </a:prstGeom>
-          <a:noFill/>
-        </p:spPr>
-        <p:txBody>
-          <a:bodyPr wrap="square" lIns="0" rIns="0" tIns="0" bIns="0">
-            <a:spAutoFit/>
-          </a:bodyPr>
-          <a:lstStyle/>
-          <a:p>
-            <a:pPr algn="l"/>
-            <a:r>
-              <a:rPr sz="900" b="1">
-                <a:solidFill>
-                  <a:srgbClr val="6B7280"/>
-                </a:solidFill>
-                <a:latin typeface="Segoe UI"/>
-              </a:rPr>
-              <a:t>WHERE IT GOES</a:t>
-            </a:r>
-          </a:p>
-        </p:txBody>
-      </p:sp>
-      <p:sp>
-        <p:nvSpPr>
-          <p:cNvPr id="17" name="TextBox 16"/>
-          <p:cNvSpPr txBox="1"/>
-          <p:nvPr/>
-        </p:nvSpPr>
-        <p:spPr>
-          <a:xfrm>
-            <a:off x="5715000" y="4352544"/>
-            <a:ext cx="5760720" cy="201168"/>
-          </a:xfrm>
-          <a:prstGeom prst="rect">
-            <a:avLst/>
-          </a:prstGeom>
-          <a:noFill/>
-        </p:spPr>
-        <p:txBody>
-          <a:bodyPr wrap="square" lIns="0" rIns="0" tIns="0" bIns="0">
-            <a:spAutoFit/>
-          </a:bodyPr>
-          <a:lstStyle/>
-          <a:p>
-            <a:pPr algn="l"/>
-            <a:r>
-              <a:rPr sz="900" b="1">
-                <a:solidFill>
-                  <a:srgbClr val="6B7280"/>
-                </a:solidFill>
-                <a:latin typeface="Segoe UI"/>
-              </a:rPr>
-              <a:t>WHAT MAKES IT HARD</a:t>
-            </a:r>
-          </a:p>
-        </p:txBody>
-      </p:sp>
-      <p:sp>
-        <p:nvSpPr>
-          <p:cNvPr id="18" name="TextBox 17"/>
-          <p:cNvSpPr txBox="1"/>
-          <p:nvPr/>
-        </p:nvSpPr>
-        <p:spPr>
-          <a:xfrm>
-            <a:off x="786384" y="4626864"/>
-            <a:ext cx="1188720" cy="274320"/>
-          </a:xfrm>
-          <a:prstGeom prst="rect">
-            <a:avLst/>
-          </a:prstGeom>
-          <a:noFill/>
-        </p:spPr>
-        <p:txBody>
-          <a:bodyPr wrap="square" lIns="0" rIns="0" tIns="0" bIns="0">
-            <a:spAutoFit/>
-          </a:bodyPr>
-          <a:lstStyle/>
-          <a:p>
-            <a:pPr algn="l"/>
-            <a:r>
-              <a:rPr sz="1200" b="1">
+              <a:rPr sz="1100" b="0">
                 <a:solidFill>
                   <a:srgbClr val="1A1F2E"/>
                 </a:solidFill>
                 <a:latin typeface="Segoe UI"/>
               </a:rPr>
-              <a:t>easy</a:t>
-            </a:r>
-          </a:p>
-        </p:txBody>
-      </p:sp>
-      <p:sp>
-        <p:nvSpPr>
-          <p:cNvPr id="19" name="TextBox 18"/>
-          <p:cNvSpPr txBox="1"/>
-          <p:nvPr/>
-        </p:nvSpPr>
-        <p:spPr>
-          <a:xfrm>
-            <a:off x="1975104" y="4636008"/>
-            <a:ext cx="822960" cy="274320"/>
-          </a:xfrm>
-          <a:prstGeom prst="rect">
-            <a:avLst/>
-          </a:prstGeom>
-          <a:noFill/>
-        </p:spPr>
-        <p:txBody>
-          <a:bodyPr wrap="square" lIns="0" rIns="0" tIns="0" bIns="0">
-            <a:spAutoFit/>
-          </a:bodyPr>
-          <a:lstStyle/>
-          <a:p>
-            <a:pPr algn="l"/>
-            <a:r>
-              <a:rPr sz="1050" b="0">
-                <a:solidFill>
-                  <a:srgbClr val="1A1F2E"/>
-                </a:solidFill>
-                <a:latin typeface="Segoe UI"/>
-              </a:rPr>
-              <a:t>3</a:t>
-            </a:r>
-          </a:p>
-        </p:txBody>
-      </p:sp>
-      <p:sp>
-        <p:nvSpPr>
-          <p:cNvPr id="20" name="TextBox 19"/>
-          <p:cNvSpPr txBox="1"/>
-          <p:nvPr/>
-        </p:nvSpPr>
-        <p:spPr>
-          <a:xfrm>
-            <a:off x="2926080" y="4636008"/>
-            <a:ext cx="2697480" cy="365760"/>
-          </a:xfrm>
-          <a:prstGeom prst="rect">
-            <a:avLst/>
-          </a:prstGeom>
-          <a:noFill/>
-        </p:spPr>
-        <p:txBody>
-          <a:bodyPr wrap="square" lIns="0" rIns="0" tIns="0" bIns="0">
-            <a:spAutoFit/>
-          </a:bodyPr>
-          <a:lstStyle/>
-          <a:p>
-            <a:pPr algn="l"/>
-            <a:r>
-              <a:rPr sz="1000" b="0">
-                <a:solidFill>
-                  <a:srgbClr val="1A1F2E"/>
-                </a:solidFill>
-                <a:latin typeface="Segoe UI"/>
-              </a:rPr>
-              <a:t>quiet site, 23–70 µV neighbours</a:t>
-            </a:r>
-          </a:p>
-        </p:txBody>
-      </p:sp>
-      <p:sp>
-        <p:nvSpPr>
-          <p:cNvPr id="21" name="TextBox 20"/>
-          <p:cNvSpPr txBox="1"/>
-          <p:nvPr/>
-        </p:nvSpPr>
-        <p:spPr>
-          <a:xfrm>
-            <a:off x="5715000" y="4617720"/>
-            <a:ext cx="5760720" cy="420624"/>
-          </a:xfrm>
-          <a:prstGeom prst="rect">
-            <a:avLst/>
-          </a:prstGeom>
-          <a:noFill/>
-        </p:spPr>
-        <p:txBody>
-          <a:bodyPr wrap="square" lIns="0" rIns="0" tIns="0" bIns="0">
-            <a:spAutoFit/>
-          </a:bodyPr>
-          <a:lstStyle/>
-          <a:p>
-            <a:pPr algn="l"/>
-            <a:r>
-              <a:rPr sz="1000" b="0">
-                <a:solidFill>
-                  <a:srgbClr val="6B7280"/>
-                </a:solidFill>
-                <a:latin typeface="Segoe UI"/>
-              </a:rPr>
-              <a:t>nothing — this is the control</a:t>
-            </a:r>
-          </a:p>
-        </p:txBody>
-      </p:sp>
-      <p:sp>
-        <p:nvSpPr>
-          <p:cNvPr id="22" name="Rectangle 21"/>
+              <a:t>Every probe site ranked by the amplitude of the biggest neuron already living there: 23 to 467 µV, a 20× span to build difficulty from.</a:t>
+            </a:r>
+          </a:p>
+        </p:txBody>
+      </p:sp>
+      <p:sp>
+        <p:nvSpPr>
+          <p:cNvPr id="12" name="Rounded Rectangle 11"/>
           <p:cNvSpPr/>
           <p:nvPr/>
         </p:nvSpPr>
         <p:spPr>
           <a:xfrm>
-            <a:off x="786384" y="5010912"/>
-            <a:ext cx="10625328" cy="11887"/>
-          </a:xfrm>
-          <a:prstGeom prst="rect">
-            <a:avLst/>
+            <a:off x="8101583" y="1828800"/>
+            <a:ext cx="3520440" cy="1225296"/>
+          </a:xfrm>
+          <a:prstGeom prst="roundRect">
+            <a:avLst>
+              <a:gd name="adj" fmla="val 3500"/>
+            </a:avLst>
           </a:prstGeom>
           <a:solidFill>
-            <a:srgbClr val="D7DBE0"/>
+            <a:srgbClr val="F4F6F8"/>
           </a:solidFill>
           <a:ln>
             <a:noFill/>
@@ -4017,14 +3519,14 @@
       </p:sp>
       <p:sp>
         <p:nvSpPr>
-          <p:cNvPr id="23" name="TextBox 22"/>
-          <p:cNvSpPr txBox="1"/>
-          <p:nvPr/>
-        </p:nvSpPr>
-        <p:spPr>
-          <a:xfrm>
-            <a:off x="786384" y="5065775"/>
-            <a:ext cx="1188720" cy="274320"/>
+          <p:cNvPr id="13" name="TextBox 12"/>
+          <p:cNvSpPr txBox="1"/>
+          <p:nvPr/>
+        </p:nvSpPr>
+        <p:spPr>
+          <a:xfrm>
+            <a:off x="8357615" y="1975104"/>
+            <a:ext cx="3008376" cy="237744"/>
           </a:xfrm>
           <a:prstGeom prst="rect">
             <a:avLst/>
@@ -4039,27 +3541,62 @@
           <a:p>
             <a:pPr algn="l"/>
             <a:r>
-              <a:rPr sz="1200" b="1">
+              <a:rPr sz="1250" b="1">
+                <a:solidFill>
+                  <a:srgbClr val="0F6E6E"/>
+                </a:solidFill>
+                <a:latin typeface="Segoe UI"/>
+              </a:rPr>
+              <a:t>The scale</a:t>
+            </a:r>
+          </a:p>
+        </p:txBody>
+      </p:sp>
+      <p:sp>
+        <p:nvSpPr>
+          <p:cNvPr id="14" name="TextBox 13"/>
+          <p:cNvSpPr txBox="1"/>
+          <p:nvPr/>
+        </p:nvSpPr>
+        <p:spPr>
+          <a:xfrm>
+            <a:off x="8357615" y="2267712"/>
+            <a:ext cx="3008376" cy="713232"/>
+          </a:xfrm>
+          <a:prstGeom prst="rect">
+            <a:avLst/>
+          </a:prstGeom>
+          <a:noFill/>
+        </p:spPr>
+        <p:txBody>
+          <a:bodyPr wrap="square" lIns="0" rIns="0" tIns="0" bIns="0">
+            <a:spAutoFit/>
+          </a:bodyPr>
+          <a:lstStyle/>
+          <a:p>
+            <a:pPr algn="l"/>
+            <a:r>
+              <a:rPr sz="1100" b="0">
                 <a:solidFill>
                   <a:srgbClr val="1A1F2E"/>
                 </a:solidFill>
                 <a:latin typeface="Segoe UI"/>
               </a:rPr>
-              <a:t>collision</a:t>
-            </a:r>
-          </a:p>
-        </p:txBody>
-      </p:sp>
-      <p:sp>
-        <p:nvSpPr>
-          <p:cNvPr id="24" name="TextBox 23"/>
-          <p:cNvSpPr txBox="1"/>
-          <p:nvPr/>
-        </p:nvSpPr>
-        <p:spPr>
-          <a:xfrm>
-            <a:off x="1975104" y="5074920"/>
-            <a:ext cx="822960" cy="274320"/>
+              <a:t>13 placements × 4 recordings from different windows of the session. 52 placements, 15,086 ground-truth spikes, ~290 per unit.</a:t>
+            </a:r>
+          </a:p>
+        </p:txBody>
+      </p:sp>
+      <p:sp>
+        <p:nvSpPr>
+          <p:cNvPr id="15" name="TextBox 14"/>
+          <p:cNvSpPr txBox="1"/>
+          <p:nvPr/>
+        </p:nvSpPr>
+        <p:spPr>
+          <a:xfrm>
+            <a:off x="566928" y="3218688"/>
+            <a:ext cx="6400800" cy="274320"/>
           </a:xfrm>
           <a:prstGeom prst="rect">
             <a:avLst/>
@@ -4074,103 +3611,33 @@
           <a:p>
             <a:pPr algn="l"/>
             <a:r>
-              <a:rPr sz="1050" b="0">
-                <a:solidFill>
-                  <a:srgbClr val="1A1F2E"/>
-                </a:solidFill>
-                <a:latin typeface="Segoe UI"/>
-              </a:rPr>
-              <a:t>3</a:t>
-            </a:r>
-          </a:p>
-        </p:txBody>
-      </p:sp>
-      <p:sp>
-        <p:nvSpPr>
-          <p:cNvPr id="25" name="TextBox 24"/>
-          <p:cNvSpPr txBox="1"/>
-          <p:nvPr/>
-        </p:nvSpPr>
-        <p:spPr>
-          <a:xfrm>
-            <a:off x="2926080" y="5074920"/>
-            <a:ext cx="2697480" cy="365760"/>
-          </a:xfrm>
-          <a:prstGeom prst="rect">
-            <a:avLst/>
-          </a:prstGeom>
-          <a:noFill/>
-        </p:spPr>
-        <p:txBody>
-          <a:bodyPr wrap="square" lIns="0" rIns="0" tIns="0" bIns="0">
-            <a:spAutoFit/>
-          </a:bodyPr>
-          <a:lstStyle/>
-          <a:p>
-            <a:pPr algn="l"/>
-            <a:r>
-              <a:rPr sz="1000" b="0">
-                <a:solidFill>
-                  <a:srgbClr val="1A1F2E"/>
-                </a:solidFill>
-                <a:latin typeface="Segoe UI"/>
-              </a:rPr>
-              <a:t>quiet site</a:t>
-            </a:r>
-          </a:p>
-        </p:txBody>
-      </p:sp>
-      <p:sp>
-        <p:nvSpPr>
-          <p:cNvPr id="26" name="TextBox 25"/>
-          <p:cNvSpPr txBox="1"/>
-          <p:nvPr/>
-        </p:nvSpPr>
-        <p:spPr>
-          <a:xfrm>
-            <a:off x="5715000" y="5056631"/>
-            <a:ext cx="5760720" cy="420624"/>
-          </a:xfrm>
-          <a:prstGeom prst="rect">
-            <a:avLst/>
-          </a:prstGeom>
-          <a:noFill/>
-        </p:spPr>
-        <p:txBody>
-          <a:bodyPr wrap="square" lIns="0" rIns="0" tIns="0" bIns="0">
-            <a:spAutoFit/>
-          </a:bodyPr>
-          <a:lstStyle/>
-          <a:p>
-            <a:pPr algn="l"/>
-            <a:r>
-              <a:rPr sz="1000" b="0">
-                <a:solidFill>
-                  <a:srgbClr val="6B7280"/>
-                </a:solidFill>
-                <a:latin typeface="Segoe UI"/>
-              </a:rPr>
-              <a:t>each spike placed 4–25 samples (0.13–0.83 ms) from a real resident's spike, so the two waveforms physically overlap</a:t>
-            </a:r>
-          </a:p>
-        </p:txBody>
-      </p:sp>
-      <p:sp>
-        <p:nvSpPr>
-          <p:cNvPr id="27" name="Rectangle 26"/>
+              <a:rPr sz="1500" b="1">
+                <a:solidFill>
+                  <a:srgbClr val="0F6E6E"/>
+                </a:solidFill>
+                <a:latin typeface="Segoe UI"/>
+              </a:rPr>
+              <a:t>The four conditions</a:t>
+            </a:r>
+          </a:p>
+        </p:txBody>
+      </p:sp>
+      <p:sp>
+        <p:nvSpPr>
+          <p:cNvPr id="16" name="Rectangle 15"/>
           <p:cNvSpPr/>
           <p:nvPr/>
         </p:nvSpPr>
         <p:spPr>
           <a:xfrm>
-            <a:off x="786384" y="5449824"/>
-            <a:ext cx="10625328" cy="11887"/>
+            <a:off x="566928" y="3529584"/>
+            <a:ext cx="11064240" cy="14630"/>
           </a:xfrm>
           <a:prstGeom prst="rect">
             <a:avLst/>
           </a:prstGeom>
           <a:solidFill>
-            <a:srgbClr val="D7DBE0"/>
+            <a:srgbClr val="1A1F2E"/>
           </a:solidFill>
           <a:ln>
             <a:noFill/>
@@ -4201,14 +3668,14 @@
       </p:sp>
       <p:sp>
         <p:nvSpPr>
-          <p:cNvPr id="28" name="TextBox 27"/>
-          <p:cNvSpPr txBox="1"/>
-          <p:nvPr/>
-        </p:nvSpPr>
-        <p:spPr>
-          <a:xfrm>
-            <a:off x="786384" y="5504688"/>
-            <a:ext cx="1188720" cy="274320"/>
+          <p:cNvPr id="17" name="TextBox 16"/>
+          <p:cNvSpPr txBox="1"/>
+          <p:nvPr/>
+        </p:nvSpPr>
+        <p:spPr>
+          <a:xfrm>
+            <a:off x="786384" y="3611879"/>
+            <a:ext cx="1463040" cy="201168"/>
           </a:xfrm>
           <a:prstGeom prst="rect">
             <a:avLst/>
@@ -4223,27 +3690,132 @@
           <a:p>
             <a:pPr algn="l"/>
             <a:r>
-              <a:rPr sz="1200" b="1">
+              <a:rPr sz="900" b="1">
+                <a:solidFill>
+                  <a:srgbClr val="6B7280"/>
+                </a:solidFill>
+                <a:latin typeface="Segoe UI"/>
+              </a:rPr>
+              <a:t>TIER</a:t>
+            </a:r>
+          </a:p>
+        </p:txBody>
+      </p:sp>
+      <p:sp>
+        <p:nvSpPr>
+          <p:cNvPr id="18" name="TextBox 17"/>
+          <p:cNvSpPr txBox="1"/>
+          <p:nvPr/>
+        </p:nvSpPr>
+        <p:spPr>
+          <a:xfrm>
+            <a:off x="2423160" y="3611879"/>
+            <a:ext cx="3291840" cy="201168"/>
+          </a:xfrm>
+          <a:prstGeom prst="rect">
+            <a:avLst/>
+          </a:prstGeom>
+          <a:noFill/>
+        </p:spPr>
+        <p:txBody>
+          <a:bodyPr wrap="square" lIns="0" rIns="0" tIns="0" bIns="0">
+            <a:spAutoFit/>
+          </a:bodyPr>
+          <a:lstStyle/>
+          <a:p>
+            <a:pPr algn="l"/>
+            <a:r>
+              <a:rPr sz="900" b="1">
+                <a:solidFill>
+                  <a:srgbClr val="6B7280"/>
+                </a:solidFill>
+                <a:latin typeface="Segoe UI"/>
+              </a:rPr>
+              <a:t>WHERE IT GOES</a:t>
+            </a:r>
+          </a:p>
+        </p:txBody>
+      </p:sp>
+      <p:sp>
+        <p:nvSpPr>
+          <p:cNvPr id="19" name="TextBox 18"/>
+          <p:cNvSpPr txBox="1"/>
+          <p:nvPr/>
+        </p:nvSpPr>
+        <p:spPr>
+          <a:xfrm>
+            <a:off x="5943600" y="3611879"/>
+            <a:ext cx="5577840" cy="201168"/>
+          </a:xfrm>
+          <a:prstGeom prst="rect">
+            <a:avLst/>
+          </a:prstGeom>
+          <a:noFill/>
+        </p:spPr>
+        <p:txBody>
+          <a:bodyPr wrap="square" lIns="0" rIns="0" tIns="0" bIns="0">
+            <a:spAutoFit/>
+          </a:bodyPr>
+          <a:lstStyle/>
+          <a:p>
+            <a:pPr algn="l"/>
+            <a:r>
+              <a:rPr sz="900" b="1">
+                <a:solidFill>
+                  <a:srgbClr val="6B7280"/>
+                </a:solidFill>
+                <a:latin typeface="Segoe UI"/>
+              </a:rPr>
+              <a:t>WHAT MAKES IT HARD</a:t>
+            </a:r>
+          </a:p>
+        </p:txBody>
+      </p:sp>
+      <p:sp>
+        <p:nvSpPr>
+          <p:cNvPr id="20" name="TextBox 19"/>
+          <p:cNvSpPr txBox="1"/>
+          <p:nvPr/>
+        </p:nvSpPr>
+        <p:spPr>
+          <a:xfrm>
+            <a:off x="786384" y="3986783"/>
+            <a:ext cx="1554480" cy="274320"/>
+          </a:xfrm>
+          <a:prstGeom prst="rect">
+            <a:avLst/>
+          </a:prstGeom>
+          <a:noFill/>
+        </p:spPr>
+        <p:txBody>
+          <a:bodyPr wrap="square" lIns="0" rIns="0" tIns="0" bIns="0">
+            <a:spAutoFit/>
+          </a:bodyPr>
+          <a:lstStyle/>
+          <a:p>
+            <a:pPr algn="l"/>
+            <a:r>
+              <a:rPr sz="1500" b="1">
                 <a:solidFill>
                   <a:srgbClr val="1A1F2E"/>
                 </a:solidFill>
                 <a:latin typeface="Segoe UI"/>
               </a:rPr>
-              <a:t>pair</a:t>
-            </a:r>
-          </a:p>
-        </p:txBody>
-      </p:sp>
-      <p:sp>
-        <p:nvSpPr>
-          <p:cNvPr id="29" name="TextBox 28"/>
-          <p:cNvSpPr txBox="1"/>
-          <p:nvPr/>
-        </p:nvSpPr>
-        <p:spPr>
-          <a:xfrm>
-            <a:off x="1975104" y="5513832"/>
-            <a:ext cx="822960" cy="274320"/>
+              <a:t>easy</a:t>
+            </a:r>
+          </a:p>
+        </p:txBody>
+      </p:sp>
+      <p:sp>
+        <p:nvSpPr>
+          <p:cNvPr id="21" name="TextBox 20"/>
+          <p:cNvSpPr txBox="1"/>
+          <p:nvPr/>
+        </p:nvSpPr>
+        <p:spPr>
+          <a:xfrm>
+            <a:off x="2423160" y="4023359"/>
+            <a:ext cx="3291840" cy="365760"/>
           </a:xfrm>
           <a:prstGeom prst="rect">
             <a:avLst/>
@@ -4258,27 +3830,27 @@
           <a:p>
             <a:pPr algn="l"/>
             <a:r>
-              <a:rPr sz="1050" b="0">
+              <a:rPr sz="1150" b="0">
                 <a:solidFill>
                   <a:srgbClr val="1A1F2E"/>
                 </a:solidFill>
                 <a:latin typeface="Segoe UI"/>
               </a:rPr>
-              <a:t>2 pairs</a:t>
-            </a:r>
-          </a:p>
-        </p:txBody>
-      </p:sp>
-      <p:sp>
-        <p:nvSpPr>
-          <p:cNvPr id="30" name="TextBox 29"/>
-          <p:cNvSpPr txBox="1"/>
-          <p:nvPr/>
-        </p:nvSpPr>
-        <p:spPr>
-          <a:xfrm>
-            <a:off x="2926080" y="5513832"/>
-            <a:ext cx="2697480" cy="365760"/>
+              <a:t>quiet site, 23–70 µV neighbours</a:t>
+            </a:r>
+          </a:p>
+        </p:txBody>
+      </p:sp>
+      <p:sp>
+        <p:nvSpPr>
+          <p:cNvPr id="22" name="TextBox 21"/>
+          <p:cNvSpPr txBox="1"/>
+          <p:nvPr/>
+        </p:nvSpPr>
+        <p:spPr>
+          <a:xfrm>
+            <a:off x="5943600" y="4023359"/>
+            <a:ext cx="5577840" cy="365760"/>
           </a:xfrm>
           <a:prstGeom prst="rect">
             <a:avLst/>
@@ -4293,61 +3865,26 @@
           <a:p>
             <a:pPr algn="l"/>
             <a:r>
-              <a:rPr sz="1000" b="0">
-                <a:solidFill>
-                  <a:srgbClr val="1A1F2E"/>
-                </a:solidFill>
-                <a:latin typeface="Segoe UI"/>
-              </a:rPr>
-              <a:t>quiet sites, 3 channels apart</a:t>
-            </a:r>
-          </a:p>
-        </p:txBody>
-      </p:sp>
-      <p:sp>
-        <p:nvSpPr>
-          <p:cNvPr id="31" name="TextBox 30"/>
-          <p:cNvSpPr txBox="1"/>
-          <p:nvPr/>
-        </p:nvSpPr>
-        <p:spPr>
-          <a:xfrm>
-            <a:off x="5715000" y="5495544"/>
-            <a:ext cx="5760720" cy="420624"/>
-          </a:xfrm>
-          <a:prstGeom prst="rect">
-            <a:avLst/>
-          </a:prstGeom>
-          <a:noFill/>
-        </p:spPr>
-        <p:txBody>
-          <a:bodyPr wrap="square" lIns="0" rIns="0" tIns="0" bIns="0">
-            <a:spAutoFit/>
-          </a:bodyPr>
-          <a:lstStyle/>
-          <a:p>
-            <a:pPr algn="l"/>
-            <a:r>
-              <a:rPr sz="1000" b="0">
+              <a:rPr sz="1150" b="0">
                 <a:solidFill>
                   <a:srgbClr val="6B7280"/>
                 </a:solidFill>
                 <a:latin typeface="Segoe UI"/>
               </a:rPr>
-              <a:t>two donors put side by side — they must be told apart from each other. Remote in the real recording (181–242 µm, similarity 0.000), so they cannot be one split cell</a:t>
-            </a:r>
-          </a:p>
-        </p:txBody>
-      </p:sp>
-      <p:sp>
-        <p:nvSpPr>
-          <p:cNvPr id="32" name="Rectangle 31"/>
+              <a:t>nothing — the control</a:t>
+            </a:r>
+          </a:p>
+        </p:txBody>
+      </p:sp>
+      <p:sp>
+        <p:nvSpPr>
+          <p:cNvPr id="23" name="Rectangle 22"/>
           <p:cNvSpPr/>
           <p:nvPr/>
         </p:nvSpPr>
         <p:spPr>
           <a:xfrm>
-            <a:off x="786384" y="5888736"/>
+            <a:off x="786384" y="4416552"/>
             <a:ext cx="10625328" cy="11887"/>
           </a:xfrm>
           <a:prstGeom prst="rect">
@@ -4385,22 +3922,125 @@
       </p:sp>
       <p:sp>
         <p:nvSpPr>
-          <p:cNvPr id="33" name="Rounded Rectangle 32"/>
+          <p:cNvPr id="24" name="TextBox 23"/>
+          <p:cNvSpPr txBox="1"/>
+          <p:nvPr/>
+        </p:nvSpPr>
+        <p:spPr>
+          <a:xfrm>
+            <a:off x="786384" y="4553712"/>
+            <a:ext cx="1554480" cy="274320"/>
+          </a:xfrm>
+          <a:prstGeom prst="rect">
+            <a:avLst/>
+          </a:prstGeom>
+          <a:noFill/>
+        </p:spPr>
+        <p:txBody>
+          <a:bodyPr wrap="square" lIns="0" rIns="0" tIns="0" bIns="0">
+            <a:spAutoFit/>
+          </a:bodyPr>
+          <a:lstStyle/>
+          <a:p>
+            <a:pPr algn="l"/>
+            <a:r>
+              <a:rPr sz="1500" b="1">
+                <a:solidFill>
+                  <a:srgbClr val="1A1F2E"/>
+                </a:solidFill>
+                <a:latin typeface="Segoe UI"/>
+              </a:rPr>
+              <a:t>collision</a:t>
+            </a:r>
+          </a:p>
+        </p:txBody>
+      </p:sp>
+      <p:sp>
+        <p:nvSpPr>
+          <p:cNvPr id="25" name="TextBox 24"/>
+          <p:cNvSpPr txBox="1"/>
+          <p:nvPr/>
+        </p:nvSpPr>
+        <p:spPr>
+          <a:xfrm>
+            <a:off x="2423160" y="4590288"/>
+            <a:ext cx="3291840" cy="365760"/>
+          </a:xfrm>
+          <a:prstGeom prst="rect">
+            <a:avLst/>
+          </a:prstGeom>
+          <a:noFill/>
+        </p:spPr>
+        <p:txBody>
+          <a:bodyPr wrap="square" lIns="0" rIns="0" tIns="0" bIns="0">
+            <a:spAutoFit/>
+          </a:bodyPr>
+          <a:lstStyle/>
+          <a:p>
+            <a:pPr algn="l"/>
+            <a:r>
+              <a:rPr sz="1150" b="0">
+                <a:solidFill>
+                  <a:srgbClr val="1A1F2E"/>
+                </a:solidFill>
+                <a:latin typeface="Segoe UI"/>
+              </a:rPr>
+              <a:t>quiet site</a:t>
+            </a:r>
+          </a:p>
+        </p:txBody>
+      </p:sp>
+      <p:sp>
+        <p:nvSpPr>
+          <p:cNvPr id="26" name="TextBox 25"/>
+          <p:cNvSpPr txBox="1"/>
+          <p:nvPr/>
+        </p:nvSpPr>
+        <p:spPr>
+          <a:xfrm>
+            <a:off x="5943600" y="4590288"/>
+            <a:ext cx="5577840" cy="365760"/>
+          </a:xfrm>
+          <a:prstGeom prst="rect">
+            <a:avLst/>
+          </a:prstGeom>
+          <a:noFill/>
+        </p:spPr>
+        <p:txBody>
+          <a:bodyPr wrap="square" lIns="0" rIns="0" tIns="0" bIns="0">
+            <a:spAutoFit/>
+          </a:bodyPr>
+          <a:lstStyle/>
+          <a:p>
+            <a:pPr algn="l"/>
+            <a:r>
+              <a:rPr sz="1150" b="0">
+                <a:solidFill>
+                  <a:srgbClr val="6B7280"/>
+                </a:solidFill>
+                <a:latin typeface="Segoe UI"/>
+              </a:rPr>
+              <a:t>each spike overlaps a resident's spike, 0.13–0.83 ms apart</a:t>
+            </a:r>
+          </a:p>
+        </p:txBody>
+      </p:sp>
+      <p:sp>
+        <p:nvSpPr>
+          <p:cNvPr id="27" name="Rectangle 26"/>
           <p:cNvSpPr/>
           <p:nvPr/>
         </p:nvSpPr>
         <p:spPr>
           <a:xfrm>
-            <a:off x="566928" y="5888736"/>
-            <a:ext cx="11064240" cy="438912"/>
-          </a:xfrm>
-          <a:prstGeom prst="roundRect">
-            <a:avLst>
-              <a:gd name="adj" fmla="val 3500"/>
-            </a:avLst>
+            <a:off x="786384" y="4983480"/>
+            <a:ext cx="10625328" cy="11887"/>
+          </a:xfrm>
+          <a:prstGeom prst="rect">
+            <a:avLst/>
           </a:prstGeom>
           <a:solidFill>
-            <a:srgbClr val="F7F2F2"/>
+            <a:srgbClr val="D7DBE0"/>
           </a:solidFill>
           <a:ln>
             <a:noFill/>
@@ -4431,14 +4071,244 @@
       </p:sp>
       <p:sp>
         <p:nvSpPr>
+          <p:cNvPr id="28" name="TextBox 27"/>
+          <p:cNvSpPr txBox="1"/>
+          <p:nvPr/>
+        </p:nvSpPr>
+        <p:spPr>
+          <a:xfrm>
+            <a:off x="786384" y="5120640"/>
+            <a:ext cx="1554480" cy="274320"/>
+          </a:xfrm>
+          <a:prstGeom prst="rect">
+            <a:avLst/>
+          </a:prstGeom>
+          <a:noFill/>
+        </p:spPr>
+        <p:txBody>
+          <a:bodyPr wrap="square" lIns="0" rIns="0" tIns="0" bIns="0">
+            <a:spAutoFit/>
+          </a:bodyPr>
+          <a:lstStyle/>
+          <a:p>
+            <a:pPr algn="l"/>
+            <a:r>
+              <a:rPr sz="1500" b="1">
+                <a:solidFill>
+                  <a:srgbClr val="1A1F2E"/>
+                </a:solidFill>
+                <a:latin typeface="Segoe UI"/>
+              </a:rPr>
+              <a:t>pair</a:t>
+            </a:r>
+          </a:p>
+        </p:txBody>
+      </p:sp>
+      <p:sp>
+        <p:nvSpPr>
+          <p:cNvPr id="29" name="TextBox 28"/>
+          <p:cNvSpPr txBox="1"/>
+          <p:nvPr/>
+        </p:nvSpPr>
+        <p:spPr>
+          <a:xfrm>
+            <a:off x="2423160" y="5157216"/>
+            <a:ext cx="3291840" cy="365760"/>
+          </a:xfrm>
+          <a:prstGeom prst="rect">
+            <a:avLst/>
+          </a:prstGeom>
+          <a:noFill/>
+        </p:spPr>
+        <p:txBody>
+          <a:bodyPr wrap="square" lIns="0" rIns="0" tIns="0" bIns="0">
+            <a:spAutoFit/>
+          </a:bodyPr>
+          <a:lstStyle/>
+          <a:p>
+            <a:pPr algn="l"/>
+            <a:r>
+              <a:rPr sz="1150" b="0">
+                <a:solidFill>
+                  <a:srgbClr val="1A1F2E"/>
+                </a:solidFill>
+                <a:latin typeface="Segoe UI"/>
+              </a:rPr>
+              <a:t>quiet sites, 3 channels apart</a:t>
+            </a:r>
+          </a:p>
+        </p:txBody>
+      </p:sp>
+      <p:sp>
+        <p:nvSpPr>
+          <p:cNvPr id="30" name="TextBox 29"/>
+          <p:cNvSpPr txBox="1"/>
+          <p:nvPr/>
+        </p:nvSpPr>
+        <p:spPr>
+          <a:xfrm>
+            <a:off x="5943600" y="5157216"/>
+            <a:ext cx="5577840" cy="365760"/>
+          </a:xfrm>
+          <a:prstGeom prst="rect">
+            <a:avLst/>
+          </a:prstGeom>
+          <a:noFill/>
+        </p:spPr>
+        <p:txBody>
+          <a:bodyPr wrap="square" lIns="0" rIns="0" tIns="0" bIns="0">
+            <a:spAutoFit/>
+          </a:bodyPr>
+          <a:lstStyle/>
+          <a:p>
+            <a:pPr algn="l"/>
+            <a:r>
+              <a:rPr sz="1150" b="0">
+                <a:solidFill>
+                  <a:srgbClr val="6B7280"/>
+                </a:solidFill>
+                <a:latin typeface="Segoe UI"/>
+              </a:rPr>
+              <a:t>two donors side by side — must be told apart from each other</a:t>
+            </a:r>
+          </a:p>
+        </p:txBody>
+      </p:sp>
+      <p:sp>
+        <p:nvSpPr>
+          <p:cNvPr id="31" name="Rectangle 30"/>
+          <p:cNvSpPr/>
+          <p:nvPr/>
+        </p:nvSpPr>
+        <p:spPr>
+          <a:xfrm>
+            <a:off x="786384" y="5550408"/>
+            <a:ext cx="10625328" cy="11887"/>
+          </a:xfrm>
+          <a:prstGeom prst="rect">
+            <a:avLst/>
+          </a:prstGeom>
+          <a:solidFill>
+            <a:srgbClr val="D7DBE0"/>
+          </a:solidFill>
+          <a:ln>
+            <a:noFill/>
+          </a:ln>
+          <a:effectLst/>
+        </p:spPr>
+        <p:style>
+          <a:lnRef idx="1">
+            <a:schemeClr val="accent1"/>
+          </a:lnRef>
+          <a:fillRef idx="3">
+            <a:schemeClr val="accent1"/>
+          </a:fillRef>
+          <a:effectRef idx="2">
+            <a:schemeClr val="accent1"/>
+          </a:effectRef>
+          <a:fontRef idx="minor">
+            <a:schemeClr val="lt1"/>
+          </a:fontRef>
+        </p:style>
+        <p:txBody>
+          <a:bodyPr rtlCol="0" anchor="ctr"/>
+          <a:lstStyle/>
+          <a:p>
+            <a:pPr algn="ctr"/>
+          </a:p>
+        </p:txBody>
+      </p:sp>
+      <p:sp>
+        <p:nvSpPr>
+          <p:cNvPr id="32" name="Rounded Rectangle 31"/>
+          <p:cNvSpPr/>
+          <p:nvPr/>
+        </p:nvSpPr>
+        <p:spPr>
+          <a:xfrm>
+            <a:off x="566928" y="5550408"/>
+            <a:ext cx="11064240" cy="566928"/>
+          </a:xfrm>
+          <a:prstGeom prst="roundRect">
+            <a:avLst>
+              <a:gd name="adj" fmla="val 3500"/>
+            </a:avLst>
+          </a:prstGeom>
+          <a:solidFill>
+            <a:srgbClr val="F7F2F2"/>
+          </a:solidFill>
+          <a:ln>
+            <a:noFill/>
+          </a:ln>
+          <a:effectLst/>
+        </p:spPr>
+        <p:style>
+          <a:lnRef idx="1">
+            <a:schemeClr val="accent1"/>
+          </a:lnRef>
+          <a:fillRef idx="3">
+            <a:schemeClr val="accent1"/>
+          </a:fillRef>
+          <a:effectRef idx="2">
+            <a:schemeClr val="accent1"/>
+          </a:effectRef>
+          <a:fontRef idx="minor">
+            <a:schemeClr val="lt1"/>
+          </a:fontRef>
+        </p:style>
+        <p:txBody>
+          <a:bodyPr rtlCol="0" anchor="ctr"/>
+          <a:lstStyle/>
+          <a:p>
+            <a:pPr algn="ctr"/>
+          </a:p>
+        </p:txBody>
+      </p:sp>
+      <p:sp>
+        <p:nvSpPr>
+          <p:cNvPr id="33" name="TextBox 32"/>
+          <p:cNvSpPr txBox="1"/>
+          <p:nvPr/>
+        </p:nvSpPr>
+        <p:spPr>
+          <a:xfrm>
+            <a:off x="786384" y="5687568"/>
+            <a:ext cx="1554480" cy="274320"/>
+          </a:xfrm>
+          <a:prstGeom prst="rect">
+            <a:avLst/>
+          </a:prstGeom>
+          <a:noFill/>
+        </p:spPr>
+        <p:txBody>
+          <a:bodyPr wrap="square" lIns="0" rIns="0" tIns="0" bIns="0">
+            <a:spAutoFit/>
+          </a:bodyPr>
+          <a:lstStyle/>
+          <a:p>
+            <a:pPr algn="l"/>
+            <a:r>
+              <a:rPr sz="1500" b="1">
+                <a:solidFill>
+                  <a:srgbClr val="B3261E"/>
+                </a:solidFill>
+                <a:latin typeface="Segoe UI"/>
+              </a:rPr>
+              <a:t>hard</a:t>
+            </a:r>
+          </a:p>
+        </p:txBody>
+      </p:sp>
+      <p:sp>
+        <p:nvSpPr>
           <p:cNvPr id="34" name="TextBox 33"/>
           <p:cNvSpPr txBox="1"/>
           <p:nvPr/>
         </p:nvSpPr>
         <p:spPr>
           <a:xfrm>
-            <a:off x="786384" y="5943600"/>
-            <a:ext cx="1188720" cy="274320"/>
+            <a:off x="2423160" y="5724144"/>
+            <a:ext cx="3291840" cy="365760"/>
           </a:xfrm>
           <a:prstGeom prst="rect">
             <a:avLst/>
@@ -4453,13 +4323,13 @@
           <a:p>
             <a:pPr algn="l"/>
             <a:r>
-              <a:rPr sz="1200" b="1">
-                <a:solidFill>
-                  <a:srgbClr val="B3261E"/>
-                </a:solidFill>
-                <a:latin typeface="Segoe UI"/>
-              </a:rPr>
-              <a:t>hard</a:t>
+              <a:rPr sz="1150" b="0">
+                <a:solidFill>
+                  <a:srgbClr val="1A1F2E"/>
+                </a:solidFill>
+                <a:latin typeface="Segoe UI"/>
+              </a:rPr>
+              <a:t>loud site, 223–466 µV neighbours</a:t>
             </a:r>
           </a:p>
         </p:txBody>
@@ -4472,8 +4342,8 @@
         </p:nvSpPr>
         <p:spPr>
           <a:xfrm>
-            <a:off x="1975104" y="5952744"/>
-            <a:ext cx="822960" cy="274320"/>
+            <a:off x="5943600" y="5724144"/>
+            <a:ext cx="5577840" cy="365760"/>
           </a:xfrm>
           <a:prstGeom prst="rect">
             <a:avLst/>
@@ -4488,127 +4358,57 @@
           <a:p>
             <a:pPr algn="l"/>
             <a:r>
-              <a:rPr sz="1050" b="0">
+              <a:rPr sz="1150" b="0">
+                <a:solidFill>
+                  <a:srgbClr val="6B7280"/>
+                </a:solidFill>
+                <a:latin typeface="Segoe UI"/>
+              </a:rPr>
+              <a:t>a large neighbour dominates the channel</a:t>
+            </a:r>
+          </a:p>
+        </p:txBody>
+      </p:sp>
+      <p:sp>
+        <p:nvSpPr>
+          <p:cNvPr id="36" name="TextBox 35"/>
+          <p:cNvSpPr txBox="1"/>
+          <p:nvPr/>
+        </p:nvSpPr>
+        <p:spPr>
+          <a:xfrm>
+            <a:off x="566928" y="6327648"/>
+            <a:ext cx="11064240" cy="274320"/>
+          </a:xfrm>
+          <a:prstGeom prst="rect">
+            <a:avLst/>
+          </a:prstGeom>
+          <a:noFill/>
+        </p:spPr>
+        <p:txBody>
+          <a:bodyPr wrap="square" lIns="0" rIns="0" tIns="0" bIns="0">
+            <a:spAutoFit/>
+          </a:bodyPr>
+          <a:lstStyle/>
+          <a:p>
+            <a:pPr algn="l"/>
+            <a:r>
+              <a:rPr sz="1100" b="0">
+                <a:solidFill>
+                  <a:srgbClr val="6B7280"/>
+                </a:solidFill>
+                <a:latin typeface="Segoe UI"/>
+              </a:rPr>
+              <a:t>Each donor rotates through tiers across the four recordings, </a:t>
+            </a:r>
+            <a:r>
+              <a:rPr sz="1100" b="1">
                 <a:solidFill>
                   <a:srgbClr val="1A1F2E"/>
                 </a:solidFill>
                 <a:latin typeface="Segoe UI"/>
               </a:rPr>
-              <a:t>3</a:t>
-            </a:r>
-          </a:p>
-        </p:txBody>
-      </p:sp>
-      <p:sp>
-        <p:nvSpPr>
-          <p:cNvPr id="36" name="TextBox 35"/>
-          <p:cNvSpPr txBox="1"/>
-          <p:nvPr/>
-        </p:nvSpPr>
-        <p:spPr>
-          <a:xfrm>
-            <a:off x="2926080" y="5952744"/>
-            <a:ext cx="2697480" cy="365760"/>
-          </a:xfrm>
-          <a:prstGeom prst="rect">
-            <a:avLst/>
-          </a:prstGeom>
-          <a:noFill/>
-        </p:spPr>
-        <p:txBody>
-          <a:bodyPr wrap="square" lIns="0" rIns="0" tIns="0" bIns="0">
-            <a:spAutoFit/>
-          </a:bodyPr>
-          <a:lstStyle/>
-          <a:p>
-            <a:pPr algn="l"/>
-            <a:r>
-              <a:rPr sz="1000" b="0">
-                <a:solidFill>
-                  <a:srgbClr val="1A1F2E"/>
-                </a:solidFill>
-                <a:latin typeface="Segoe UI"/>
-              </a:rPr>
-              <a:t>loud site, 223–466 µV neighbours</a:t>
-            </a:r>
-          </a:p>
-        </p:txBody>
-      </p:sp>
-      <p:sp>
-        <p:nvSpPr>
-          <p:cNvPr id="37" name="TextBox 36"/>
-          <p:cNvSpPr txBox="1"/>
-          <p:nvPr/>
-        </p:nvSpPr>
-        <p:spPr>
-          <a:xfrm>
-            <a:off x="5715000" y="5934456"/>
-            <a:ext cx="5760720" cy="420624"/>
-          </a:xfrm>
-          <a:prstGeom prst="rect">
-            <a:avLst/>
-          </a:prstGeom>
-          <a:noFill/>
-        </p:spPr>
-        <p:txBody>
-          <a:bodyPr wrap="square" lIns="0" rIns="0" tIns="0" bIns="0">
-            <a:spAutoFit/>
-          </a:bodyPr>
-          <a:lstStyle/>
-          <a:p>
-            <a:pPr algn="l"/>
-            <a:r>
-              <a:rPr sz="1000" b="0">
-                <a:solidFill>
-                  <a:srgbClr val="6B7280"/>
-                </a:solidFill>
-                <a:latin typeface="Segoe UI"/>
-              </a:rPr>
-              <a:t>a large neighbour dominates the channel</a:t>
-            </a:r>
-          </a:p>
-        </p:txBody>
-      </p:sp>
-      <p:sp>
-        <p:nvSpPr>
-          <p:cNvPr id="38" name="TextBox 37"/>
-          <p:cNvSpPr txBox="1"/>
-          <p:nvPr/>
-        </p:nvSpPr>
-        <p:spPr>
-          <a:xfrm>
-            <a:off x="566928" y="6437376"/>
-            <a:ext cx="11064240" cy="274320"/>
-          </a:xfrm>
-          <a:prstGeom prst="rect">
-            <a:avLst/>
-          </a:prstGeom>
-          <a:noFill/>
-        </p:spPr>
-        <p:txBody>
-          <a:bodyPr wrap="square" lIns="0" rIns="0" tIns="0" bIns="0">
-            <a:spAutoFit/>
-          </a:bodyPr>
-          <a:lstStyle/>
-          <a:p>
-            <a:pPr algn="l"/>
-            <a:r>
-              <a:rPr sz="1050" b="1">
-                <a:solidFill>
-                  <a:srgbClr val="1A1F2E"/>
-                </a:solidFill>
-                <a:latin typeface="Segoe UI"/>
-              </a:rPr>
-              <a:t>52 placements · 15,086 ground-truth spikes.  </a:t>
-            </a:r>
-            <a:r>
-              <a:rPr sz="1050" b="0">
-                <a:solidFill>
-                  <a:srgbClr val="6B7280"/>
-                </a:solidFill>
-                <a:latin typeface="Segoe UI"/>
-              </a:rPr>
-              <a:t>Stock Kilosort is also run twice as a configuration — the noise floor, and how we know the hard tier is unreliable.</a:t>
+              <a:t>so a tier difference is measured within a neuron, not between neurons.</a:t>
             </a:r>
           </a:p>
         </p:txBody>
@@ -4753,7 +4553,7 @@
         </p:nvSpPr>
         <p:spPr>
           <a:xfrm>
-            <a:off x="566928" y="1316736"/>
+            <a:off x="566928" y="1298448"/>
             <a:ext cx="5486400" cy="237744"/>
           </a:xfrm>
           <a:prstGeom prst="rect">
@@ -4788,7 +4588,7 @@
         </p:nvSpPr>
         <p:spPr>
           <a:xfrm>
-            <a:off x="4572000" y="1344168"/>
+            <a:off x="4572000" y="1325880"/>
             <a:ext cx="7059168" cy="219456"/>
           </a:xfrm>
           <a:prstGeom prst="rect">
@@ -4823,8 +4623,8 @@
         </p:nvSpPr>
         <p:spPr>
           <a:xfrm>
-            <a:off x="566928" y="1627632"/>
-            <a:ext cx="2615184" cy="786384"/>
+            <a:off x="566928" y="1591056"/>
+            <a:ext cx="2615184" cy="768096"/>
           </a:xfrm>
           <a:prstGeom prst="roundRect">
             <a:avLst>
@@ -4869,8 +4669,8 @@
         </p:nvSpPr>
         <p:spPr>
           <a:xfrm>
-            <a:off x="768096" y="1719072"/>
-            <a:ext cx="1188720" cy="237744"/>
+            <a:off x="768096" y="1673352"/>
+            <a:ext cx="1463040" cy="237744"/>
           </a:xfrm>
           <a:prstGeom prst="rect">
             <a:avLst/>
@@ -4904,7 +4704,7 @@
         </p:nvSpPr>
         <p:spPr>
           <a:xfrm>
-            <a:off x="768096" y="1938528"/>
+            <a:off x="768096" y="1892807"/>
             <a:ext cx="1097280" cy="329184"/>
           </a:xfrm>
           <a:prstGeom prst="rect">
@@ -4948,7 +4748,7 @@
         </p:nvSpPr>
         <p:spPr>
           <a:xfrm>
-            <a:off x="768096" y="2231136"/>
+            <a:off x="768096" y="2185416"/>
             <a:ext cx="1097280" cy="182880"/>
           </a:xfrm>
           <a:prstGeom prst="rect">
@@ -4983,7 +4783,7 @@
         </p:nvSpPr>
         <p:spPr>
           <a:xfrm>
-            <a:off x="1892807" y="1938528"/>
+            <a:off x="1892807" y="1892807"/>
             <a:ext cx="1097280" cy="329184"/>
           </a:xfrm>
           <a:prstGeom prst="rect">
@@ -5027,7 +4827,7 @@
         </p:nvSpPr>
         <p:spPr>
           <a:xfrm>
-            <a:off x="1892807" y="2231136"/>
+            <a:off x="1892807" y="2185416"/>
             <a:ext cx="1097280" cy="182880"/>
           </a:xfrm>
           <a:prstGeom prst="rect">
@@ -5062,8 +4862,8 @@
         </p:nvSpPr>
         <p:spPr>
           <a:xfrm>
-            <a:off x="3383280" y="1627632"/>
-            <a:ext cx="2615184" cy="786384"/>
+            <a:off x="3383280" y="1591056"/>
+            <a:ext cx="2615184" cy="768096"/>
           </a:xfrm>
           <a:prstGeom prst="roundRect">
             <a:avLst>
@@ -5108,8 +4908,8 @@
         </p:nvSpPr>
         <p:spPr>
           <a:xfrm>
-            <a:off x="3584448" y="1719072"/>
-            <a:ext cx="1188720" cy="237744"/>
+            <a:off x="3584448" y="1673352"/>
+            <a:ext cx="1463040" cy="237744"/>
           </a:xfrm>
           <a:prstGeom prst="rect">
             <a:avLst/>
@@ -5143,7 +4943,7 @@
         </p:nvSpPr>
         <p:spPr>
           <a:xfrm>
-            <a:off x="3584448" y="1938528"/>
+            <a:off x="3584448" y="1892807"/>
             <a:ext cx="1097280" cy="329184"/>
           </a:xfrm>
           <a:prstGeom prst="rect">
@@ -5187,7 +4987,7 @@
         </p:nvSpPr>
         <p:spPr>
           <a:xfrm>
-            <a:off x="3584448" y="2231136"/>
+            <a:off x="3584448" y="2185416"/>
             <a:ext cx="1097280" cy="182880"/>
           </a:xfrm>
           <a:prstGeom prst="rect">
@@ -5222,7 +5022,7 @@
         </p:nvSpPr>
         <p:spPr>
           <a:xfrm>
-            <a:off x="4709160" y="1938528"/>
+            <a:off x="4709160" y="1892807"/>
             <a:ext cx="1097280" cy="329184"/>
           </a:xfrm>
           <a:prstGeom prst="rect">
@@ -5266,7 +5066,7 @@
         </p:nvSpPr>
         <p:spPr>
           <a:xfrm>
-            <a:off x="4709160" y="2231136"/>
+            <a:off x="4709160" y="2185416"/>
             <a:ext cx="1097280" cy="182880"/>
           </a:xfrm>
           <a:prstGeom prst="rect">
@@ -5301,8 +5101,8 @@
         </p:nvSpPr>
         <p:spPr>
           <a:xfrm>
-            <a:off x="6199632" y="1627632"/>
-            <a:ext cx="2615184" cy="786384"/>
+            <a:off x="6199632" y="1591056"/>
+            <a:ext cx="2615184" cy="768096"/>
           </a:xfrm>
           <a:prstGeom prst="roundRect">
             <a:avLst>
@@ -5347,8 +5147,8 @@
         </p:nvSpPr>
         <p:spPr>
           <a:xfrm>
-            <a:off x="6400800" y="1719072"/>
-            <a:ext cx="1188720" cy="237744"/>
+            <a:off x="6400800" y="1673352"/>
+            <a:ext cx="1463040" cy="237744"/>
           </a:xfrm>
           <a:prstGeom prst="rect">
             <a:avLst/>
@@ -5382,7 +5182,7 @@
         </p:nvSpPr>
         <p:spPr>
           <a:xfrm>
-            <a:off x="6400800" y="1938528"/>
+            <a:off x="6400800" y="1892807"/>
             <a:ext cx="1097280" cy="329184"/>
           </a:xfrm>
           <a:prstGeom prst="rect">
@@ -5426,7 +5226,7 @@
         </p:nvSpPr>
         <p:spPr>
           <a:xfrm>
-            <a:off x="6400800" y="2231136"/>
+            <a:off x="6400800" y="2185416"/>
             <a:ext cx="1097280" cy="182880"/>
           </a:xfrm>
           <a:prstGeom prst="rect">
@@ -5461,7 +5261,7 @@
         </p:nvSpPr>
         <p:spPr>
           <a:xfrm>
-            <a:off x="7525512" y="1938528"/>
+            <a:off x="7525512" y="1892807"/>
             <a:ext cx="1097280" cy="329184"/>
           </a:xfrm>
           <a:prstGeom prst="rect">
@@ -5505,7 +5305,7 @@
         </p:nvSpPr>
         <p:spPr>
           <a:xfrm>
-            <a:off x="7525512" y="2231136"/>
+            <a:off x="7525512" y="2185416"/>
             <a:ext cx="1097280" cy="182880"/>
           </a:xfrm>
           <a:prstGeom prst="rect">
@@ -5540,8 +5340,8 @@
         </p:nvSpPr>
         <p:spPr>
           <a:xfrm>
-            <a:off x="9015984" y="1627632"/>
-            <a:ext cx="2615184" cy="786384"/>
+            <a:off x="9015984" y="1591056"/>
+            <a:ext cx="2615184" cy="768096"/>
           </a:xfrm>
           <a:prstGeom prst="roundRect">
             <a:avLst>
@@ -5586,8 +5386,8 @@
         </p:nvSpPr>
         <p:spPr>
           <a:xfrm>
-            <a:off x="9217152" y="1719072"/>
-            <a:ext cx="1188720" cy="237744"/>
+            <a:off x="9217152" y="1673352"/>
+            <a:ext cx="1463040" cy="237744"/>
           </a:xfrm>
           <a:prstGeom prst="rect">
             <a:avLst/>
@@ -5621,7 +5421,7 @@
         </p:nvSpPr>
         <p:spPr>
           <a:xfrm>
-            <a:off x="9217152" y="1956816"/>
+            <a:off x="9217152" y="1911095"/>
             <a:ext cx="2286000" cy="365760"/>
           </a:xfrm>
           <a:prstGeom prst="rect">
@@ -5656,7 +5456,7 @@
         </p:nvSpPr>
         <p:spPr>
           <a:xfrm>
-            <a:off x="566928" y="2670048"/>
+            <a:off x="566928" y="2542032"/>
             <a:ext cx="11064240" cy="14630"/>
           </a:xfrm>
           <a:prstGeom prst="rect">
@@ -5700,7 +5500,7 @@
         </p:nvSpPr>
         <p:spPr>
           <a:xfrm>
-            <a:off x="786384" y="2743200"/>
+            <a:off x="786384" y="2615184"/>
             <a:ext cx="1920240" cy="201168"/>
           </a:xfrm>
           <a:prstGeom prst="rect">
@@ -5735,7 +5535,7 @@
         </p:nvSpPr>
         <p:spPr>
           <a:xfrm>
-            <a:off x="2743200" y="2743200"/>
+            <a:off x="2743200" y="2615184"/>
             <a:ext cx="4297680" cy="201168"/>
           </a:xfrm>
           <a:prstGeom prst="rect">
@@ -5770,7 +5570,7 @@
         </p:nvSpPr>
         <p:spPr>
           <a:xfrm>
-            <a:off x="7187184" y="2743200"/>
+            <a:off x="7187184" y="2615184"/>
             <a:ext cx="1005840" cy="201168"/>
           </a:xfrm>
           <a:prstGeom prst="rect">
@@ -5805,7 +5605,7 @@
         </p:nvSpPr>
         <p:spPr>
           <a:xfrm>
-            <a:off x="8284464" y="2743200"/>
+            <a:off x="8284464" y="2615184"/>
             <a:ext cx="1005840" cy="201168"/>
           </a:xfrm>
           <a:prstGeom prst="rect">
@@ -5840,7 +5640,7 @@
         </p:nvSpPr>
         <p:spPr>
           <a:xfrm>
-            <a:off x="9473184" y="2743200"/>
+            <a:off x="9473184" y="2615184"/>
             <a:ext cx="2157984" cy="201168"/>
           </a:xfrm>
           <a:prstGeom prst="rect">
@@ -5875,8 +5675,8 @@
         </p:nvSpPr>
         <p:spPr>
           <a:xfrm>
-            <a:off x="566928" y="2971800"/>
-            <a:ext cx="11064240" cy="694944"/>
+            <a:off x="566928" y="2825496"/>
+            <a:ext cx="11064240" cy="585216"/>
           </a:xfrm>
           <a:prstGeom prst="roundRect">
             <a:avLst>
@@ -5921,7 +5721,7 @@
         </p:nvSpPr>
         <p:spPr>
           <a:xfrm>
-            <a:off x="786384" y="3072384"/>
+            <a:off x="786384" y="2907791"/>
             <a:ext cx="1920240" cy="274320"/>
           </a:xfrm>
           <a:prstGeom prst="rect">
@@ -5956,8 +5756,8 @@
         </p:nvSpPr>
         <p:spPr>
           <a:xfrm>
-            <a:off x="2743200" y="3054096"/>
-            <a:ext cx="4297680" cy="603504"/>
+            <a:off x="2743200" y="2889503"/>
+            <a:ext cx="4297680" cy="585216"/>
           </a:xfrm>
           <a:prstGeom prst="rect">
             <a:avLst/>
@@ -5991,7 +5791,7 @@
         </p:nvSpPr>
         <p:spPr>
           <a:xfrm>
-            <a:off x="7187184" y="3072384"/>
+            <a:off x="7187184" y="2907791"/>
             <a:ext cx="1005840" cy="310896"/>
           </a:xfrm>
           <a:prstGeom prst="rect">
@@ -6035,7 +5835,7 @@
         </p:nvSpPr>
         <p:spPr>
           <a:xfrm>
-            <a:off x="8284464" y="3072384"/>
+            <a:off x="8284464" y="2907791"/>
             <a:ext cx="1005840" cy="310896"/>
           </a:xfrm>
           <a:prstGeom prst="rect">
@@ -6079,7 +5879,7 @@
         </p:nvSpPr>
         <p:spPr>
           <a:xfrm>
-            <a:off x="9473184" y="3108960"/>
+            <a:off x="9473184" y="2944368"/>
             <a:ext cx="2157984" cy="457200"/>
           </a:xfrm>
           <a:prstGeom prst="rect">
@@ -6114,7 +5914,7 @@
         </p:nvSpPr>
         <p:spPr>
           <a:xfrm>
-            <a:off x="786384" y="3767327"/>
+            <a:off x="786384" y="3493008"/>
             <a:ext cx="1920240" cy="274320"/>
           </a:xfrm>
           <a:prstGeom prst="rect">
@@ -6149,8 +5949,8 @@
         </p:nvSpPr>
         <p:spPr>
           <a:xfrm>
-            <a:off x="2743200" y="3749039"/>
-            <a:ext cx="4297680" cy="603504"/>
+            <a:off x="2743200" y="3474720"/>
+            <a:ext cx="4297680" cy="585216"/>
           </a:xfrm>
           <a:prstGeom prst="rect">
             <a:avLst/>
@@ -6184,7 +5984,7 @@
         </p:nvSpPr>
         <p:spPr>
           <a:xfrm>
-            <a:off x="7187184" y="3767327"/>
+            <a:off x="7187184" y="3493008"/>
             <a:ext cx="1005840" cy="310896"/>
           </a:xfrm>
           <a:prstGeom prst="rect">
@@ -6228,7 +6028,7 @@
         </p:nvSpPr>
         <p:spPr>
           <a:xfrm>
-            <a:off x="8284464" y="3767327"/>
+            <a:off x="8284464" y="3493008"/>
             <a:ext cx="1005840" cy="310896"/>
           </a:xfrm>
           <a:prstGeom prst="rect">
@@ -6272,7 +6072,7 @@
         </p:nvSpPr>
         <p:spPr>
           <a:xfrm>
-            <a:off x="9473184" y="3803903"/>
+            <a:off x="9473184" y="3529584"/>
             <a:ext cx="2157984" cy="457200"/>
           </a:xfrm>
           <a:prstGeom prst="rect">
@@ -6307,7 +6107,7 @@
         </p:nvSpPr>
         <p:spPr>
           <a:xfrm>
-            <a:off x="786384" y="4361688"/>
+            <a:off x="786384" y="3995928"/>
             <a:ext cx="10625328" cy="11887"/>
           </a:xfrm>
           <a:prstGeom prst="rect">
@@ -6351,7 +6151,7 @@
         </p:nvSpPr>
         <p:spPr>
           <a:xfrm>
-            <a:off x="786384" y="4462271"/>
+            <a:off x="786384" y="4078224"/>
             <a:ext cx="1920240" cy="274320"/>
           </a:xfrm>
           <a:prstGeom prst="rect">
@@ -6373,7 +6173,7 @@
                 </a:solidFill>
                 <a:latin typeface="Segoe UI"/>
               </a:rPr>
-              <a:t>Footprint ×1</a:t>
+              <a:t>Noise precision matrix</a:t>
             </a:r>
           </a:p>
         </p:txBody>
@@ -6386,8 +6186,8 @@
         </p:nvSpPr>
         <p:spPr>
           <a:xfrm>
-            <a:off x="2743200" y="4443983"/>
-            <a:ext cx="4297680" cy="603504"/>
+            <a:off x="2743200" y="4059935"/>
+            <a:ext cx="4297680" cy="585216"/>
           </a:xfrm>
           <a:prstGeom prst="rect">
             <a:avLst/>
@@ -6408,7 +6208,7 @@
                 </a:solidFill>
                 <a:latin typeface="Segoe UI"/>
               </a:rPr>
-              <a:t>add the spike's spatial footprint — its pattern of amplitude across nearby channels — to what the clustering sees, weighted equal to the waveform</a:t>
+              <a:t>converge the template, whiten against the AR(4) noise covariance, then matched-filter the session for missed spikes   ·   runs AFTER Kilosort, not inside it</a:t>
             </a:r>
           </a:p>
         </p:txBody>
@@ -6421,7 +6221,7 @@
         </p:nvSpPr>
         <p:spPr>
           <a:xfrm>
-            <a:off x="7187184" y="4462271"/>
+            <a:off x="7187184" y="4078224"/>
             <a:ext cx="1005840" cy="310896"/>
           </a:xfrm>
           <a:prstGeom prst="rect">
@@ -6443,7 +6243,7 @@
                 </a:solidFill>
                 <a:latin typeface="Segoe UI"/>
               </a:rPr>
-              <a:t>77.1</a:t>
+              <a:t>81.1</a:t>
             </a:r>
             <a:r>
               <a:rPr sz="1050" b="1">
@@ -6465,7 +6265,7 @@
         </p:nvSpPr>
         <p:spPr>
           <a:xfrm>
-            <a:off x="8284464" y="4462271"/>
+            <a:off x="8284464" y="4078224"/>
             <a:ext cx="1005840" cy="310896"/>
           </a:xfrm>
           <a:prstGeom prst="rect">
@@ -6487,7 +6287,7 @@
                 </a:solidFill>
                 <a:latin typeface="Segoe UI"/>
               </a:rPr>
-              <a:t>65.4</a:t>
+              <a:t>55.7</a:t>
             </a:r>
             <a:r>
               <a:rPr sz="1050" b="1">
@@ -6509,7 +6309,7 @@
         </p:nvSpPr>
         <p:spPr>
           <a:xfrm>
-            <a:off x="9473184" y="4498847"/>
+            <a:off x="9473184" y="4114800"/>
             <a:ext cx="2157984" cy="457200"/>
           </a:xfrm>
           <a:prstGeom prst="rect">
@@ -6527,11 +6327,23 @@
             <a:r>
               <a:rPr sz="950" b="1">
                 <a:solidFill>
-                  <a:srgbClr val="1B6B3A"/>
-                </a:solidFill>
-                <a:latin typeface="Segoe UI"/>
-              </a:rPr>
-              <a:t>precision +5.4  (p = 0.010)</a:t>
+                  <a:srgbClr val="B3261E"/>
+                </a:solidFill>
+                <a:latin typeface="Segoe UI"/>
+              </a:rPr>
+              <a:t>of 11,027 spikes recovered,</a:t>
+            </a:r>
+          </a:p>
+          <a:p>
+            <a:pPr algn="r"/>
+            <a:r>
+              <a:rPr sz="950" b="1">
+                <a:solidFill>
+                  <a:srgbClr val="B3261E"/>
+                </a:solidFill>
+                <a:latin typeface="Segoe UI"/>
+              </a:rPr>
+              <a:t>only 2.3% were the unit's</a:t>
             </a:r>
           </a:p>
         </p:txBody>
@@ -6544,7 +6356,7 @@
         </p:nvSpPr>
         <p:spPr>
           <a:xfrm>
-            <a:off x="786384" y="5056631"/>
+            <a:off x="786384" y="4581144"/>
             <a:ext cx="10625328" cy="11887"/>
           </a:xfrm>
           <a:prstGeom prst="rect">
@@ -6588,7 +6400,7 @@
         </p:nvSpPr>
         <p:spPr>
           <a:xfrm>
-            <a:off x="786384" y="5157215"/>
+            <a:off x="786384" y="4663440"/>
             <a:ext cx="1920240" cy="274320"/>
           </a:xfrm>
           <a:prstGeom prst="rect">
@@ -6610,7 +6422,7 @@
                 </a:solidFill>
                 <a:latin typeface="Segoe UI"/>
               </a:rPr>
-              <a:t>Footprint ×3</a:t>
+              <a:t>Footprint ×1</a:t>
             </a:r>
           </a:p>
         </p:txBody>
@@ -6623,8 +6435,8 @@
         </p:nvSpPr>
         <p:spPr>
           <a:xfrm>
-            <a:off x="2743200" y="5138927"/>
-            <a:ext cx="4297680" cy="603504"/>
+            <a:off x="2743200" y="4645151"/>
+            <a:ext cx="4297680" cy="585216"/>
           </a:xfrm>
           <a:prstGeom prst="rect">
             <a:avLst/>
@@ -6645,7 +6457,7 @@
                 </a:solidFill>
                 <a:latin typeface="Segoe UI"/>
               </a:rPr>
-              <a:t>the same feature weighted three times as strongly, so footprint dominates the waveform</a:t>
+              <a:t>add the spike's spatial footprint — its pattern of amplitude across nearby channels — to what the clustering sees, weighted equal to the waveform</a:t>
             </a:r>
           </a:p>
         </p:txBody>
@@ -6658,7 +6470,7 @@
         </p:nvSpPr>
         <p:spPr>
           <a:xfrm>
-            <a:off x="7187184" y="5157215"/>
+            <a:off x="7187184" y="4663440"/>
             <a:ext cx="1005840" cy="310896"/>
           </a:xfrm>
           <a:prstGeom prst="rect">
@@ -6680,7 +6492,7 @@
                 </a:solidFill>
                 <a:latin typeface="Segoe UI"/>
               </a:rPr>
-              <a:t>81.2</a:t>
+              <a:t>77.1</a:t>
             </a:r>
             <a:r>
               <a:rPr sz="1050" b="1">
@@ -6702,7 +6514,7 @@
         </p:nvSpPr>
         <p:spPr>
           <a:xfrm>
-            <a:off x="8284464" y="5157215"/>
+            <a:off x="8284464" y="4663440"/>
             <a:ext cx="1005840" cy="310896"/>
           </a:xfrm>
           <a:prstGeom prst="rect">
@@ -6724,7 +6536,7 @@
                 </a:solidFill>
                 <a:latin typeface="Segoe UI"/>
               </a:rPr>
-              <a:t>62.1</a:t>
+              <a:t>65.4</a:t>
             </a:r>
             <a:r>
               <a:rPr sz="1050" b="1">
@@ -6746,7 +6558,7 @@
         </p:nvSpPr>
         <p:spPr>
           <a:xfrm>
-            <a:off x="9473184" y="5193791"/>
+            <a:off x="9473184" y="4700016"/>
             <a:ext cx="2157984" cy="457200"/>
           </a:xfrm>
           <a:prstGeom prst="rect">
@@ -6768,19 +6580,7 @@
                 </a:solidFill>
                 <a:latin typeface="Segoe UI"/>
               </a:rPr>
-              <a:t>recall +1.8, precision +2.2</a:t>
-            </a:r>
-          </a:p>
-          <a:p>
-            <a:pPr algn="r"/>
-            <a:r>
-              <a:rPr sz="950" b="1">
-                <a:solidFill>
-                  <a:srgbClr val="1B6B3A"/>
-                </a:solidFill>
-                <a:latin typeface="Segoe UI"/>
-              </a:rPr>
-              <a:t>pair recall 72→80 (p = 0.038)</a:t>
+              <a:t>precision +5.4  (p = 0.010)</a:t>
             </a:r>
           </a:p>
         </p:txBody>
@@ -6793,7 +6593,7 @@
         </p:nvSpPr>
         <p:spPr>
           <a:xfrm>
-            <a:off x="786384" y="5751575"/>
+            <a:off x="786384" y="5166359"/>
             <a:ext cx="10625328" cy="11887"/>
           </a:xfrm>
           <a:prstGeom prst="rect">
@@ -6831,22 +6631,225 @@
       </p:sp>
       <p:sp>
         <p:nvSpPr>
-          <p:cNvPr id="58" name="Rounded Rectangle 57"/>
+          <p:cNvPr id="58" name="TextBox 57"/>
+          <p:cNvSpPr txBox="1"/>
+          <p:nvPr/>
+        </p:nvSpPr>
+        <p:spPr>
+          <a:xfrm>
+            <a:off x="786384" y="5248655"/>
+            <a:ext cx="1920240" cy="274320"/>
+          </a:xfrm>
+          <a:prstGeom prst="rect">
+            <a:avLst/>
+          </a:prstGeom>
+          <a:noFill/>
+        </p:spPr>
+        <p:txBody>
+          <a:bodyPr wrap="square" lIns="0" rIns="0" tIns="0" bIns="0">
+            <a:spAutoFit/>
+          </a:bodyPr>
+          <a:lstStyle/>
+          <a:p>
+            <a:pPr algn="l"/>
+            <a:r>
+              <a:rPr sz="1250" b="1">
+                <a:solidFill>
+                  <a:srgbClr val="1A1F2E"/>
+                </a:solidFill>
+                <a:latin typeface="Segoe UI"/>
+              </a:rPr>
+              <a:t>Footprint ×3</a:t>
+            </a:r>
+          </a:p>
+        </p:txBody>
+      </p:sp>
+      <p:sp>
+        <p:nvSpPr>
+          <p:cNvPr id="59" name="TextBox 58"/>
+          <p:cNvSpPr txBox="1"/>
+          <p:nvPr/>
+        </p:nvSpPr>
+        <p:spPr>
+          <a:xfrm>
+            <a:off x="2743200" y="5230367"/>
+            <a:ext cx="4297680" cy="585216"/>
+          </a:xfrm>
+          <a:prstGeom prst="rect">
+            <a:avLst/>
+          </a:prstGeom>
+          <a:noFill/>
+        </p:spPr>
+        <p:txBody>
+          <a:bodyPr wrap="square" lIns="0" rIns="0" tIns="0" bIns="0">
+            <a:spAutoFit/>
+          </a:bodyPr>
+          <a:lstStyle/>
+          <a:p>
+            <a:pPr algn="l"/>
+            <a:r>
+              <a:rPr sz="950" b="0">
+                <a:solidFill>
+                  <a:srgbClr val="6B7280"/>
+                </a:solidFill>
+                <a:latin typeface="Segoe UI"/>
+              </a:rPr>
+              <a:t>the same feature weighted three times as strongly, so footprint dominates the waveform</a:t>
+            </a:r>
+          </a:p>
+        </p:txBody>
+      </p:sp>
+      <p:sp>
+        <p:nvSpPr>
+          <p:cNvPr id="60" name="TextBox 59"/>
+          <p:cNvSpPr txBox="1"/>
+          <p:nvPr/>
+        </p:nvSpPr>
+        <p:spPr>
+          <a:xfrm>
+            <a:off x="7187184" y="5248655"/>
+            <a:ext cx="1005840" cy="310896"/>
+          </a:xfrm>
+          <a:prstGeom prst="rect">
+            <a:avLst/>
+          </a:prstGeom>
+          <a:noFill/>
+        </p:spPr>
+        <p:txBody>
+          <a:bodyPr wrap="square" lIns="0" rIns="0" tIns="0" bIns="0">
+            <a:spAutoFit/>
+          </a:bodyPr>
+          <a:lstStyle/>
+          <a:p>
+            <a:pPr algn="r"/>
+            <a:r>
+              <a:rPr sz="1700" b="1">
+                <a:solidFill>
+                  <a:srgbClr val="1A1F2E"/>
+                </a:solidFill>
+                <a:latin typeface="Segoe UI"/>
+              </a:rPr>
+              <a:t>81.2</a:t>
+            </a:r>
+            <a:r>
+              <a:rPr sz="1050" b="1">
+                <a:solidFill>
+                  <a:srgbClr val="6B7280"/>
+                </a:solidFill>
+                <a:latin typeface="Segoe UI"/>
+              </a:rPr>
+              <a:t>%</a:t>
+            </a:r>
+          </a:p>
+        </p:txBody>
+      </p:sp>
+      <p:sp>
+        <p:nvSpPr>
+          <p:cNvPr id="61" name="TextBox 60"/>
+          <p:cNvSpPr txBox="1"/>
+          <p:nvPr/>
+        </p:nvSpPr>
+        <p:spPr>
+          <a:xfrm>
+            <a:off x="8284464" y="5248655"/>
+            <a:ext cx="1005840" cy="310896"/>
+          </a:xfrm>
+          <a:prstGeom prst="rect">
+            <a:avLst/>
+          </a:prstGeom>
+          <a:noFill/>
+        </p:spPr>
+        <p:txBody>
+          <a:bodyPr wrap="square" lIns="0" rIns="0" tIns="0" bIns="0">
+            <a:spAutoFit/>
+          </a:bodyPr>
+          <a:lstStyle/>
+          <a:p>
+            <a:pPr algn="r"/>
+            <a:r>
+              <a:rPr sz="1700" b="1">
+                <a:solidFill>
+                  <a:srgbClr val="1A1F2E"/>
+                </a:solidFill>
+                <a:latin typeface="Segoe UI"/>
+              </a:rPr>
+              <a:t>62.1</a:t>
+            </a:r>
+            <a:r>
+              <a:rPr sz="1050" b="1">
+                <a:solidFill>
+                  <a:srgbClr val="6B7280"/>
+                </a:solidFill>
+                <a:latin typeface="Segoe UI"/>
+              </a:rPr>
+              <a:t>%</a:t>
+            </a:r>
+          </a:p>
+        </p:txBody>
+      </p:sp>
+      <p:sp>
+        <p:nvSpPr>
+          <p:cNvPr id="62" name="TextBox 61"/>
+          <p:cNvSpPr txBox="1"/>
+          <p:nvPr/>
+        </p:nvSpPr>
+        <p:spPr>
+          <a:xfrm>
+            <a:off x="9473184" y="5285231"/>
+            <a:ext cx="2157984" cy="457200"/>
+          </a:xfrm>
+          <a:prstGeom prst="rect">
+            <a:avLst/>
+          </a:prstGeom>
+          <a:noFill/>
+        </p:spPr>
+        <p:txBody>
+          <a:bodyPr wrap="square" lIns="0" rIns="0" tIns="0" bIns="0">
+            <a:spAutoFit/>
+          </a:bodyPr>
+          <a:lstStyle/>
+          <a:p>
+            <a:pPr algn="r"/>
+            <a:r>
+              <a:rPr sz="950" b="1">
+                <a:solidFill>
+                  <a:srgbClr val="1B6B3A"/>
+                </a:solidFill>
+                <a:latin typeface="Segoe UI"/>
+              </a:rPr>
+              <a:t>recall +1.8, precision +2.2</a:t>
+            </a:r>
+          </a:p>
+          <a:p>
+            <a:pPr algn="r"/>
+            <a:r>
+              <a:rPr sz="950" b="1">
+                <a:solidFill>
+                  <a:srgbClr val="1B6B3A"/>
+                </a:solidFill>
+                <a:latin typeface="Segoe UI"/>
+              </a:rPr>
+              <a:t>pair recall 72→80 (p = 0.038)</a:t>
+            </a:r>
+          </a:p>
+        </p:txBody>
+      </p:sp>
+      <p:sp>
+        <p:nvSpPr>
+          <p:cNvPr id="63" name="Rectangle 62"/>
           <p:cNvSpPr/>
           <p:nvPr/>
         </p:nvSpPr>
         <p:spPr>
           <a:xfrm>
-            <a:off x="566928" y="5852159"/>
-            <a:ext cx="11064240" cy="475488"/>
-          </a:xfrm>
-          <a:prstGeom prst="roundRect">
-            <a:avLst>
-              <a:gd name="adj" fmla="val 3500"/>
-            </a:avLst>
+            <a:off x="786384" y="5751575"/>
+            <a:ext cx="10625328" cy="11887"/>
+          </a:xfrm>
+          <a:prstGeom prst="rect">
+            <a:avLst/>
           </a:prstGeom>
           <a:solidFill>
-            <a:srgbClr val="E8F1F1"/>
+            <a:srgbClr val="D7DBE0"/>
           </a:solidFill>
           <a:ln>
             <a:noFill/>
@@ -6877,13 +6880,59 @@
       </p:sp>
       <p:sp>
         <p:nvSpPr>
-          <p:cNvPr id="59" name="TextBox 58"/>
-          <p:cNvSpPr txBox="1"/>
-          <p:nvPr/>
-        </p:nvSpPr>
-        <p:spPr>
-          <a:xfrm>
-            <a:off x="804672" y="5961887"/>
+          <p:cNvPr id="64" name="Rounded Rectangle 63"/>
+          <p:cNvSpPr/>
+          <p:nvPr/>
+        </p:nvSpPr>
+        <p:spPr>
+          <a:xfrm>
+            <a:off x="566928" y="5833871"/>
+            <a:ext cx="11064240" cy="438912"/>
+          </a:xfrm>
+          <a:prstGeom prst="roundRect">
+            <a:avLst>
+              <a:gd name="adj" fmla="val 3500"/>
+            </a:avLst>
+          </a:prstGeom>
+          <a:solidFill>
+            <a:srgbClr val="E8F1F1"/>
+          </a:solidFill>
+          <a:ln>
+            <a:noFill/>
+          </a:ln>
+          <a:effectLst/>
+        </p:spPr>
+        <p:style>
+          <a:lnRef idx="1">
+            <a:schemeClr val="accent1"/>
+          </a:lnRef>
+          <a:fillRef idx="3">
+            <a:schemeClr val="accent1"/>
+          </a:fillRef>
+          <a:effectRef idx="2">
+            <a:schemeClr val="accent1"/>
+          </a:effectRef>
+          <a:fontRef idx="minor">
+            <a:schemeClr val="lt1"/>
+          </a:fontRef>
+        </p:style>
+        <p:txBody>
+          <a:bodyPr rtlCol="0" anchor="ctr"/>
+          <a:lstStyle/>
+          <a:p>
+            <a:pPr algn="ctr"/>
+          </a:p>
+        </p:txBody>
+      </p:sp>
+      <p:sp>
+        <p:nvSpPr>
+          <p:cNvPr id="65" name="TextBox 64"/>
+          <p:cNvSpPr txBox="1"/>
+          <p:nvPr/>
+        </p:nvSpPr>
+        <p:spPr>
+          <a:xfrm>
+            <a:off x="804672" y="5934455"/>
             <a:ext cx="10607040" cy="274320"/>
           </a:xfrm>
           <a:prstGeom prst="rect">
@@ -6914,21 +6963,21 @@
                 </a:solidFill>
                 <a:latin typeface="Segoe UI"/>
               </a:rPr>
-              <a:t>it is one idea at two strengths, and the weight was the experiment. ×1 buys purity, ×3 buys completeness — neither wins both, so the choice depends on what the analysis needs.</a:t>
-            </a:r>
-          </a:p>
-        </p:txBody>
-      </p:sp>
-      <p:sp>
-        <p:nvSpPr>
-          <p:cNvPr id="60" name="TextBox 59"/>
-          <p:cNvSpPr txBox="1"/>
-          <p:nvPr/>
-        </p:nvSpPr>
-        <p:spPr>
-          <a:xfrm>
-            <a:off x="566928" y="6419087"/>
-            <a:ext cx="11064240" cy="457200"/>
+              <a:t>one idea at two strengths, and the weight was the experiment. ×1 buys purity, ×3 buys completeness — neither wins both.</a:t>
+            </a:r>
+          </a:p>
+        </p:txBody>
+      </p:sp>
+      <p:sp>
+        <p:nvSpPr>
+          <p:cNvPr id="66" name="TextBox 65"/>
+          <p:cNvSpPr txBox="1"/>
+          <p:nvPr/>
+        </p:nvSpPr>
+        <p:spPr>
+          <a:xfrm>
+            <a:off x="566928" y="6345935"/>
+            <a:ext cx="11064240" cy="411480"/>
           </a:xfrm>
           <a:prstGeom prst="rect">
             <a:avLst/>
@@ -6949,13 +6998,13 @@
                 </a:solidFill>
                 <a:latin typeface="Segoe UI"/>
               </a:rPr>
-              <a:t>Pooled over all four tiers, as in the Shamir Sorting Audit. Noise floor: stock run twice differs by 0.9 recall / 1.6 precision, all of it on the hard tier.</a:t>
+              <a:t>Pooled over all four tiers, as in the Shamir Sorting Audit. Noise floor: stock run twice differs by 0.9 recall / 1.6 precision, all on the hard tier.</a:t>
             </a:r>
           </a:p>
           <a:p>
             <a:pPr>
               <a:spcBef>
-                <a:spcPts val="500"/>
+                <a:spcPts val="400"/>
               </a:spcBef>
             </a:pPr>
             <a:r>
@@ -6965,7 +7014,7 @@
                 </a:solidFill>
                 <a:latin typeface="Segoe UI"/>
               </a:rPr>
-              <a:t>Scores are for the one best-matching cluster per injected unit — 13 of the ~200 clusters a run produces.  </a:t>
+              <a:t>Scores are for the one best-matching cluster per injected unit — 13 of the ~200 a run produces.  </a:t>
             </a:r>
             <a:r>
               <a:rPr sz="950" b="0">
@@ -7119,8 +7168,8 @@
         </p:nvSpPr>
         <p:spPr>
           <a:xfrm>
-            <a:off x="566928" y="1371600"/>
-            <a:ext cx="11064240" cy="365760"/>
+            <a:off x="566928" y="1554480"/>
+            <a:ext cx="11064240" cy="411480"/>
           </a:xfrm>
           <a:prstGeom prst="rect">
             <a:avLst/>
@@ -7135,13 +7184,13 @@
           <a:p>
             <a:pPr algn="l"/>
             <a:r>
-              <a:rPr sz="1600" b="1">
+              <a:rPr sz="2400" b="1">
                 <a:solidFill>
                   <a:srgbClr val="1A1F2E"/>
                 </a:solidFill>
                 <a:latin typeface="Segoe UI"/>
               </a:rPr>
-              <a:t>We merged while being told the right answer — the best any merge tool could ever do.</a:t>
+              <a:t>We merged while being told the right answer.</a:t>
             </a:r>
           </a:p>
         </p:txBody>
@@ -7154,8 +7203,8 @@
         </p:nvSpPr>
         <p:spPr>
           <a:xfrm>
-            <a:off x="566928" y="1938528"/>
-            <a:ext cx="3611880" cy="1389888"/>
+            <a:off x="566928" y="2487168"/>
+            <a:ext cx="3611880" cy="1426464"/>
           </a:xfrm>
           <a:prstGeom prst="roundRect">
             <a:avLst>
@@ -7200,8 +7249,8 @@
         </p:nvSpPr>
         <p:spPr>
           <a:xfrm>
-            <a:off x="841247" y="2084831"/>
-            <a:ext cx="3108960" cy="457200"/>
+            <a:off x="859536" y="2724912"/>
+            <a:ext cx="3017520" cy="548640"/>
           </a:xfrm>
           <a:prstGeom prst="rect">
             <a:avLst/>
@@ -7216,7 +7265,7 @@
           <a:p>
             <a:pPr algn="l"/>
             <a:r>
-              <a:rPr sz="3400" b="1">
+              <a:rPr sz="4000" b="1">
                 <a:solidFill>
                   <a:srgbClr val="0F6E6E"/>
                 </a:solidFill>
@@ -7235,8 +7284,8 @@
         </p:nvSpPr>
         <p:spPr>
           <a:xfrm>
-            <a:off x="841247" y="2615184"/>
-            <a:ext cx="3108960" cy="274320"/>
+            <a:off x="859536" y="3383280"/>
+            <a:ext cx="3017520" cy="365760"/>
           </a:xfrm>
           <a:prstGeom prst="rect">
             <a:avLst/>
@@ -7251,62 +7300,27 @@
           <a:p>
             <a:pPr algn="l"/>
             <a:r>
-              <a:rPr sz="1150" b="1">
+              <a:rPr sz="1200" b="1">
                 <a:solidFill>
                   <a:srgbClr val="1A1F2E"/>
                 </a:solidFill>
                 <a:latin typeface="Segoe UI"/>
               </a:rPr>
-              <a:t>algorithm × tier cells where merging won</a:t>
-            </a:r>
-          </a:p>
-        </p:txBody>
-      </p:sp>
-      <p:sp>
-        <p:nvSpPr>
-          <p:cNvPr id="9" name="TextBox 8"/>
-          <p:cNvSpPr txBox="1"/>
-          <p:nvPr/>
-        </p:nvSpPr>
-        <p:spPr>
-          <a:xfrm>
-            <a:off x="841247" y="2907792"/>
-            <a:ext cx="3108960" cy="274320"/>
-          </a:xfrm>
-          <a:prstGeom prst="rect">
-            <a:avLst/>
-          </a:prstGeom>
-          <a:noFill/>
-        </p:spPr>
-        <p:txBody>
-          <a:bodyPr wrap="square" lIns="0" rIns="0" tIns="0" bIns="0">
-            <a:spAutoFit/>
-          </a:bodyPr>
-          <a:lstStyle/>
-          <a:p>
-            <a:pPr algn="l"/>
-            <a:r>
-              <a:rPr sz="1000" b="0">
-                <a:solidFill>
-                  <a:srgbClr val="6B7280"/>
-                </a:solidFill>
-                <a:latin typeface="Segoe UI"/>
-              </a:rPr>
-              <a:t>it lost in every one</a:t>
-            </a:r>
-          </a:p>
-        </p:txBody>
-      </p:sp>
-      <p:sp>
-        <p:nvSpPr>
-          <p:cNvPr id="10" name="Rounded Rectangle 9"/>
+              <a:t>conditions where merging won</a:t>
+            </a:r>
+          </a:p>
+        </p:txBody>
+      </p:sp>
+      <p:sp>
+        <p:nvSpPr>
+          <p:cNvPr id="9" name="Rounded Rectangle 8"/>
           <p:cNvSpPr/>
           <p:nvPr/>
         </p:nvSpPr>
         <p:spPr>
           <a:xfrm>
-            <a:off x="4398264" y="1938528"/>
-            <a:ext cx="3611880" cy="1389888"/>
+            <a:off x="4398264" y="2487168"/>
+            <a:ext cx="3611880" cy="1426464"/>
           </a:xfrm>
           <a:prstGeom prst="roundRect">
             <a:avLst>
@@ -7345,14 +7359,49 @@
       </p:sp>
       <p:sp>
         <p:nvSpPr>
+          <p:cNvPr id="10" name="TextBox 9"/>
+          <p:cNvSpPr txBox="1"/>
+          <p:nvPr/>
+        </p:nvSpPr>
+        <p:spPr>
+          <a:xfrm>
+            <a:off x="4690872" y="2724912"/>
+            <a:ext cx="3017520" cy="548640"/>
+          </a:xfrm>
+          <a:prstGeom prst="rect">
+            <a:avLst/>
+          </a:prstGeom>
+          <a:noFill/>
+        </p:spPr>
+        <p:txBody>
+          <a:bodyPr wrap="square" lIns="0" rIns="0" tIns="0" bIns="0">
+            <a:spAutoFit/>
+          </a:bodyPr>
+          <a:lstStyle/>
+          <a:p>
+            <a:pPr algn="l"/>
+            <a:r>
+              <a:rPr sz="4000" b="1">
+                <a:solidFill>
+                  <a:srgbClr val="0F6E6E"/>
+                </a:solidFill>
+                <a:latin typeface="Segoe UI"/>
+              </a:rPr>
+              <a:t>+5  /  −12</a:t>
+            </a:r>
+          </a:p>
+        </p:txBody>
+      </p:sp>
+      <p:sp>
+        <p:nvSpPr>
           <p:cNvPr id="11" name="TextBox 10"/>
           <p:cNvSpPr txBox="1"/>
           <p:nvPr/>
         </p:nvSpPr>
         <p:spPr>
           <a:xfrm>
-            <a:off x="4672584" y="2084831"/>
-            <a:ext cx="3108960" cy="457200"/>
+            <a:off x="4690872" y="3383280"/>
+            <a:ext cx="3017520" cy="365760"/>
           </a:xfrm>
           <a:prstGeom prst="rect">
             <a:avLst/>
@@ -7367,97 +7416,27 @@
           <a:p>
             <a:pPr algn="l"/>
             <a:r>
-              <a:rPr sz="3400" b="1">
-                <a:solidFill>
-                  <a:srgbClr val="0F6E6E"/>
-                </a:solidFill>
-                <a:latin typeface="Segoe UI"/>
-              </a:rPr>
-              <a:t>+5 / −12</a:t>
-            </a:r>
-          </a:p>
-        </p:txBody>
-      </p:sp>
-      <p:sp>
-        <p:nvSpPr>
-          <p:cNvPr id="12" name="TextBox 11"/>
-          <p:cNvSpPr txBox="1"/>
-          <p:nvPr/>
-        </p:nvSpPr>
-        <p:spPr>
-          <a:xfrm>
-            <a:off x="4672584" y="2615184"/>
-            <a:ext cx="3108960" cy="274320"/>
-          </a:xfrm>
-          <a:prstGeom prst="rect">
-            <a:avLst/>
-          </a:prstGeom>
-          <a:noFill/>
-        </p:spPr>
-        <p:txBody>
-          <a:bodyPr wrap="square" lIns="0" rIns="0" tIns="0" bIns="0">
-            <a:spAutoFit/>
-          </a:bodyPr>
-          <a:lstStyle/>
-          <a:p>
-            <a:pPr algn="l"/>
-            <a:r>
-              <a:rPr sz="1150" b="1">
+              <a:rPr sz="1200" b="1">
                 <a:solidFill>
                   <a:srgbClr val="1A1F2E"/>
                 </a:solidFill>
                 <a:latin typeface="Segoe UI"/>
               </a:rPr>
-              <a:t>typical recall gained / precision lost</a:t>
-            </a:r>
-          </a:p>
-        </p:txBody>
-      </p:sp>
-      <p:sp>
-        <p:nvSpPr>
-          <p:cNvPr id="13" name="TextBox 12"/>
-          <p:cNvSpPr txBox="1"/>
-          <p:nvPr/>
-        </p:nvSpPr>
-        <p:spPr>
-          <a:xfrm>
-            <a:off x="4672584" y="2907792"/>
-            <a:ext cx="3108960" cy="274320"/>
-          </a:xfrm>
-          <a:prstGeom prst="rect">
-            <a:avLst/>
-          </a:prstGeom>
-          <a:noFill/>
-        </p:spPr>
-        <p:txBody>
-          <a:bodyPr wrap="square" lIns="0" rIns="0" tIns="0" bIns="0">
-            <a:spAutoFit/>
-          </a:bodyPr>
-          <a:lstStyle/>
-          <a:p>
-            <a:pPr algn="l"/>
-            <a:r>
-              <a:rPr sz="1000" b="0">
-                <a:solidFill>
-                  <a:srgbClr val="6B7280"/>
-                </a:solidFill>
-                <a:latin typeface="Segoe UI"/>
-              </a:rPr>
-              <a:t>best case anywhere: +3.2 / −3.6</a:t>
-            </a:r>
-          </a:p>
-        </p:txBody>
-      </p:sp>
-      <p:sp>
-        <p:nvSpPr>
-          <p:cNvPr id="14" name="Rounded Rectangle 13"/>
+              <a:t>recall gained / precision lost</a:t>
+            </a:r>
+          </a:p>
+        </p:txBody>
+      </p:sp>
+      <p:sp>
+        <p:nvSpPr>
+          <p:cNvPr id="12" name="Rounded Rectangle 11"/>
           <p:cNvSpPr/>
           <p:nvPr/>
         </p:nvSpPr>
         <p:spPr>
           <a:xfrm>
-            <a:off x="8229600" y="1938528"/>
-            <a:ext cx="3611880" cy="1389888"/>
+            <a:off x="8229600" y="2487168"/>
+            <a:ext cx="3611880" cy="1426464"/>
           </a:xfrm>
           <a:prstGeom prst="roundRect">
             <a:avLst>
@@ -7496,14 +7475,14 @@
       </p:sp>
       <p:sp>
         <p:nvSpPr>
-          <p:cNvPr id="15" name="TextBox 14"/>
-          <p:cNvSpPr txBox="1"/>
-          <p:nvPr/>
-        </p:nvSpPr>
-        <p:spPr>
-          <a:xfrm>
-            <a:off x="8503920" y="2084831"/>
-            <a:ext cx="3108960" cy="457200"/>
+          <p:cNvPr id="13" name="TextBox 12"/>
+          <p:cNvSpPr txBox="1"/>
+          <p:nvPr/>
+        </p:nvSpPr>
+        <p:spPr>
+          <a:xfrm>
+            <a:off x="8522208" y="2724912"/>
+            <a:ext cx="3017520" cy="548640"/>
           </a:xfrm>
           <a:prstGeom prst="rect">
             <a:avLst/>
@@ -7518,7 +7497,7 @@
           <a:p>
             <a:pPr algn="l"/>
             <a:r>
-              <a:rPr sz="3400" b="1">
+              <a:rPr sz="4000" b="1">
                 <a:solidFill>
                   <a:srgbClr val="0F6E6E"/>
                 </a:solidFill>
@@ -7531,14 +7510,14 @@
       </p:sp>
       <p:sp>
         <p:nvSpPr>
-          <p:cNvPr id="16" name="TextBox 15"/>
-          <p:cNvSpPr txBox="1"/>
-          <p:nvPr/>
-        </p:nvSpPr>
-        <p:spPr>
-          <a:xfrm>
-            <a:off x="8503920" y="2615184"/>
-            <a:ext cx="3108960" cy="274320"/>
+          <p:cNvPr id="14" name="TextBox 13"/>
+          <p:cNvSpPr txBox="1"/>
+          <p:nvPr/>
+        </p:nvSpPr>
+        <p:spPr>
+          <a:xfrm>
+            <a:off x="8522208" y="3383280"/>
+            <a:ext cx="3017520" cy="365760"/>
           </a:xfrm>
           <a:prstGeom prst="rect">
             <a:avLst/>
@@ -7553,7 +7532,7 @@
           <a:p>
             <a:pPr algn="l"/>
             <a:r>
-              <a:rPr sz="1150" b="1">
+              <a:rPr sz="1200" b="1">
                 <a:solidFill>
                   <a:srgbClr val="1A1F2E"/>
                 </a:solidFill>
@@ -7566,181 +7545,14 @@
       </p:sp>
       <p:sp>
         <p:nvSpPr>
-          <p:cNvPr id="17" name="TextBox 16"/>
-          <p:cNvSpPr txBox="1"/>
-          <p:nvPr/>
-        </p:nvSpPr>
-        <p:spPr>
-          <a:xfrm>
-            <a:off x="8503920" y="2907792"/>
-            <a:ext cx="3108960" cy="274320"/>
-          </a:xfrm>
-          <a:prstGeom prst="rect">
-            <a:avLst/>
-          </a:prstGeom>
-          <a:noFill/>
-        </p:spPr>
-        <p:txBody>
-          <a:bodyPr wrap="square" lIns="0" rIns="0" tIns="0" bIns="0">
-            <a:spAutoFit/>
-          </a:bodyPr>
-          <a:lstStyle/>
-          <a:p>
-            <a:pPr algn="l"/>
-            <a:r>
-              <a:rPr sz="1000" b="0">
-                <a:solidFill>
-                  <a:srgbClr val="6B7280"/>
-                </a:solidFill>
-                <a:latin typeface="Segoe UI"/>
-              </a:rPr>
-              <a:t>a real spike, not noise — chance is 3.9%</a:t>
-            </a:r>
-          </a:p>
-        </p:txBody>
-      </p:sp>
-      <p:sp>
-        <p:nvSpPr>
-          <p:cNvPr id="18" name="TextBox 17"/>
-          <p:cNvSpPr txBox="1"/>
-          <p:nvPr/>
-        </p:nvSpPr>
-        <p:spPr>
-          <a:xfrm>
-            <a:off x="804672" y="3639312"/>
-            <a:ext cx="10607040" cy="310896"/>
-          </a:xfrm>
-          <a:prstGeom prst="rect">
-            <a:avLst/>
-          </a:prstGeom>
-          <a:noFill/>
-        </p:spPr>
-        <p:txBody>
-          <a:bodyPr wrap="square" lIns="0" rIns="0" tIns="0" bIns="0">
-            <a:spAutoFit/>
-          </a:bodyPr>
-          <a:lstStyle/>
-          <a:p>
-            <a:pPr algn="l"/>
-            <a:r>
-              <a:rPr sz="1400" b="1">
-                <a:solidFill>
-                  <a:srgbClr val="1A1F2E"/>
-                </a:solidFill>
-                <a:latin typeface="Segoe UI"/>
-              </a:rPr>
-              <a:t>There was little to merge in the first place. </a:t>
-            </a:r>
-            <a:r>
-              <a:rPr sz="1400" b="0">
-                <a:solidFill>
-                  <a:srgbClr val="6B7280"/>
-                </a:solidFill>
-                <a:latin typeface="Segoe UI"/>
-              </a:rPr>
-              <a:t>67–77% of units already sit in one cluster.</a:t>
-            </a:r>
-          </a:p>
-        </p:txBody>
-      </p:sp>
-      <p:sp>
-        <p:nvSpPr>
-          <p:cNvPr id="19" name="TextBox 18"/>
-          <p:cNvSpPr txBox="1"/>
-          <p:nvPr/>
-        </p:nvSpPr>
-        <p:spPr>
-          <a:xfrm>
-            <a:off x="804672" y="4114800"/>
-            <a:ext cx="10607040" cy="310896"/>
-          </a:xfrm>
-          <a:prstGeom prst="rect">
-            <a:avLst/>
-          </a:prstGeom>
-          <a:noFill/>
-        </p:spPr>
-        <p:txBody>
-          <a:bodyPr wrap="square" lIns="0" rIns="0" tIns="0" bIns="0">
-            <a:spAutoFit/>
-          </a:bodyPr>
-          <a:lstStyle/>
-          <a:p>
-            <a:pPr algn="l"/>
-            <a:r>
-              <a:rPr sz="1400" b="1">
-                <a:solidFill>
-                  <a:srgbClr val="1A1F2E"/>
-                </a:solidFill>
-                <a:latin typeface="Segoe UI"/>
-              </a:rPr>
-              <a:t>Merging imports a neighbour's spike train, </a:t>
-            </a:r>
-            <a:r>
-              <a:rPr sz="1400" b="0">
-                <a:solidFill>
-                  <a:srgbClr val="6B7280"/>
-                </a:solidFill>
-                <a:latin typeface="Segoe UI"/>
-              </a:rPr>
-              <a:t>so the cluster stops being a single cell.</a:t>
-            </a:r>
-          </a:p>
-        </p:txBody>
-      </p:sp>
-      <p:sp>
-        <p:nvSpPr>
-          <p:cNvPr id="20" name="TextBox 19"/>
-          <p:cNvSpPr txBox="1"/>
-          <p:nvPr/>
-        </p:nvSpPr>
-        <p:spPr>
-          <a:xfrm>
-            <a:off x="804672" y="4590288"/>
-            <a:ext cx="10607040" cy="310896"/>
-          </a:xfrm>
-          <a:prstGeom prst="rect">
-            <a:avLst/>
-          </a:prstGeom>
-          <a:noFill/>
-        </p:spPr>
-        <p:txBody>
-          <a:bodyPr wrap="square" lIns="0" rIns="0" tIns="0" bIns="0">
-            <a:spAutoFit/>
-          </a:bodyPr>
-          <a:lstStyle/>
-          <a:p>
-            <a:pPr algn="l"/>
-            <a:r>
-              <a:rPr sz="1400" b="1">
-                <a:solidFill>
-                  <a:srgbClr val="1A1F2E"/>
-                </a:solidFill>
-                <a:latin typeface="Segoe UI"/>
-              </a:rPr>
-              <a:t>A perfect merge tool makes every variant identical, </a:t>
-            </a:r>
-            <a:r>
-              <a:rPr sz="1400" b="0">
-                <a:solidFill>
-                  <a:srgbClr val="6B7280"/>
-                </a:solidFill>
-                <a:latin typeface="Segoe UI"/>
-              </a:rPr>
-              <a:t>all converging to about 78% recall / 46% precision.</a:t>
-            </a:r>
-          </a:p>
-        </p:txBody>
-      </p:sp>
-      <p:sp>
-        <p:nvSpPr>
-          <p:cNvPr id="21" name="Rounded Rectangle 20"/>
+          <p:cNvPr id="15" name="Rounded Rectangle 14"/>
           <p:cNvSpPr/>
           <p:nvPr/>
         </p:nvSpPr>
         <p:spPr>
           <a:xfrm>
-            <a:off x="566928" y="5230367"/>
-            <a:ext cx="11064240" cy="932688"/>
+            <a:off x="566928" y="4352544"/>
+            <a:ext cx="11064240" cy="1115568"/>
           </a:xfrm>
           <a:prstGeom prst="roundRect">
             <a:avLst>
@@ -7779,14 +7591,14 @@
       </p:sp>
       <p:sp>
         <p:nvSpPr>
-          <p:cNvPr id="22" name="TextBox 21"/>
-          <p:cNvSpPr txBox="1"/>
-          <p:nvPr/>
-        </p:nvSpPr>
-        <p:spPr>
-          <a:xfrm>
-            <a:off x="868680" y="5394959"/>
-            <a:ext cx="10424160" cy="640080"/>
+          <p:cNvPr id="16" name="TextBox 15"/>
+          <p:cNvSpPr txBox="1"/>
+          <p:nvPr/>
+        </p:nvSpPr>
+        <p:spPr>
+          <a:xfrm>
+            <a:off x="914400" y="4626864"/>
+            <a:ext cx="10332720" cy="640080"/>
           </a:xfrm>
           <a:prstGeom prst="rect">
             <a:avLst/>
@@ -7801,29 +7613,48 @@
           <a:p>
             <a:pPr algn="l"/>
             <a:r>
-              <a:rPr sz="1500" b="1">
+              <a:rPr sz="2100" b="1">
                 <a:solidFill>
                   <a:srgbClr val="0F6E6E"/>
                 </a:solidFill>
                 <a:latin typeface="Segoe UI"/>
               </a:rPr>
-              <a:t>So the failure is not detection and not splitting.</a:t>
-            </a:r>
-          </a:p>
-          <a:p>
-            <a:pPr>
-              <a:spcBef>
-                <a:spcPts val="600"/>
-              </a:spcBef>
-            </a:pPr>
-            <a:r>
-              <a:rPr sz="1300" b="0">
-                <a:solidFill>
-                  <a:srgbClr val="1A1F2E"/>
-                </a:solidFill>
-                <a:latin typeface="Segoe UI"/>
-              </a:rPr>
-              <a:t>94–96% of injected spikes do land in some cluster. The problem is which cluster each spike goes to — so the lead is the opposite operation: splitting Kilosort's mixed clusters.</a:t>
+              <a:t>You are not merging back the missing spikes. You are merging in a neighbour.</a:t>
+            </a:r>
+          </a:p>
+        </p:txBody>
+      </p:sp>
+      <p:sp>
+        <p:nvSpPr>
+          <p:cNvPr id="17" name="TextBox 16"/>
+          <p:cNvSpPr txBox="1"/>
+          <p:nvPr/>
+        </p:nvSpPr>
+        <p:spPr>
+          <a:xfrm>
+            <a:off x="566928" y="5760720"/>
+            <a:ext cx="11064240" cy="274320"/>
+          </a:xfrm>
+          <a:prstGeom prst="rect">
+            <a:avLst/>
+          </a:prstGeom>
+          <a:noFill/>
+        </p:spPr>
+        <p:txBody>
+          <a:bodyPr wrap="square" lIns="0" rIns="0" tIns="0" bIns="0">
+            <a:spAutoFit/>
+          </a:bodyPr>
+          <a:lstStyle/>
+          <a:p>
+            <a:pPr algn="l"/>
+            <a:r>
+              <a:rPr sz="1200" b="0">
+                <a:solidFill>
+                  <a:srgbClr val="6B7280"/>
+                </a:solidFill>
+                <a:latin typeface="Segoe UI"/>
+              </a:rPr>
+              <a:t>A real spike, not noise — chance is 3.9%. Most units were barely split to begin with.</a:t>
             </a:r>
           </a:p>
         </p:txBody>
